--- a/docs/retrospective-presentation.pptx
+++ b/docs/retrospective-presentation.pptx
@@ -31,6 +31,7 @@
     <p:sldId id="279" r:id="rId30"/>
     <p:sldId id="280" r:id="rId31"/>
     <p:sldId id="281" r:id="rId32"/>
+    <p:sldId id="282" r:id="rId33"/>
   </p:sldIdLst>
   <p:sldSz cx="12191695" cy="6858000" type="screen4x3"/>
   <p:notesSz cx="6858000" cy="9144000"/>
@@ -11738,7 +11739,7 @@
               </a:defRPr>
             </a:pPr>
             <a:r>
-              <a:t>AI 구독 월 수십만 원 vs 외주 수천만~1억 원</a:t>
+              <a:t>1인+AI 4.5개월·~4,500만 원 vs 외주 6~9개월·3.5~5.5억 원</a:t>
             </a:r>
           </a:p>
           <a:p>
@@ -11760,7 +11761,7 @@
               </a:defRPr>
             </a:pPr>
             <a:r>
-              <a:t>웹 비전공자 1명이 2.5개월에 DCIM 구축</a:t>
+              <a:t>비용 ~8~11배 절감 (상세: 다음 슬라이드)</a:t>
             </a:r>
           </a:p>
         </p:txBody>
@@ -12110,6 +12111,516 @@
 </file>
 
 <file path=ppt/slides/slide26.xml><?xml version="1.0" encoding="utf-8"?>
+<p:sld xmlns:a="http://schemas.openxmlformats.org/drawingml/2006/main" xmlns:p="http://schemas.openxmlformats.org/presentationml/2006/main" xmlns:r="http://schemas.openxmlformats.org/officeDocument/2006/relationships">
+  <p:cSld>
+    <p:bg>
+      <p:bgPr>
+        <a:solidFill>
+          <a:srgbClr val="FFFFFF"/>
+        </a:solidFill>
+        <a:effectLst/>
+      </p:bgPr>
+    </p:bg>
+    <p:spTree>
+      <p:nvGrpSpPr>
+        <p:cNvPr id="1" name=""/>
+        <p:cNvGrpSpPr/>
+        <p:nvPr/>
+      </p:nvGrpSpPr>
+      <p:grpSpPr/>
+      <p:sp>
+        <p:nvSpPr>
+          <p:cNvPr id="2" name="Rectangle 1"/>
+          <p:cNvSpPr/>
+          <p:nvPr/>
+        </p:nvSpPr>
+        <p:spPr>
+          <a:xfrm>
+            <a:off x="0" y="0"/>
+            <a:ext cx="12191695" cy="45720"/>
+          </a:xfrm>
+          <a:prstGeom prst="rect">
+            <a:avLst/>
+          </a:prstGeom>
+          <a:solidFill>
+            <a:srgbClr val="14B8A6"/>
+          </a:solidFill>
+          <a:ln>
+            <a:noFill/>
+          </a:ln>
+          <a:effectLst/>
+        </p:spPr>
+        <p:style>
+          <a:lnRef idx="1">
+            <a:schemeClr val="accent1"/>
+          </a:lnRef>
+          <a:fillRef idx="3">
+            <a:schemeClr val="accent1"/>
+          </a:fillRef>
+          <a:effectRef idx="2">
+            <a:schemeClr val="accent1"/>
+          </a:effectRef>
+          <a:fontRef idx="minor">
+            <a:schemeClr val="lt1"/>
+          </a:fontRef>
+        </p:style>
+        <p:txBody>
+          <a:bodyPr rtlCol="0" anchor="ctr"/>
+          <a:lstStyle/>
+          <a:p>
+            <a:pPr algn="ctr"/>
+          </a:p>
+        </p:txBody>
+      </p:sp>
+      <p:sp>
+        <p:nvSpPr>
+          <p:cNvPr id="3" name="TextBox 2"/>
+          <p:cNvSpPr txBox="1"/>
+          <p:nvPr/>
+        </p:nvSpPr>
+        <p:spPr>
+          <a:xfrm>
+            <a:off x="548640" y="274320"/>
+            <a:ext cx="10972800" cy="640080"/>
+          </a:xfrm>
+          <a:prstGeom prst="rect">
+            <a:avLst/>
+          </a:prstGeom>
+          <a:noFill/>
+        </p:spPr>
+        <p:txBody>
+          <a:bodyPr wrap="square">
+            <a:spAutoFit/>
+          </a:bodyPr>
+          <a:lstStyle/>
+          <a:p>
+            <a:pPr algn="l">
+              <a:defRPr sz="2600" b="1">
+                <a:solidFill>
+                  <a:srgbClr val="1F1F1F"/>
+                </a:solidFill>
+                <a:latin typeface="맑은 고딕"/>
+              </a:defRPr>
+            </a:pPr>
+            <a:r>
+              <a:t>경제성 — 1인+AI vs 외주 개발</a:t>
+            </a:r>
+          </a:p>
+        </p:txBody>
+      </p:sp>
+      <p:sp>
+        <p:nvSpPr>
+          <p:cNvPr id="4" name="Rectangle 3"/>
+          <p:cNvSpPr/>
+          <p:nvPr/>
+        </p:nvSpPr>
+        <p:spPr>
+          <a:xfrm>
+            <a:off x="548640" y="914400"/>
+            <a:ext cx="1828800" cy="32004"/>
+          </a:xfrm>
+          <a:prstGeom prst="rect">
+            <a:avLst/>
+          </a:prstGeom>
+          <a:solidFill>
+            <a:srgbClr val="14B8A6"/>
+          </a:solidFill>
+          <a:ln>
+            <a:noFill/>
+          </a:ln>
+          <a:effectLst/>
+        </p:spPr>
+        <p:style>
+          <a:lnRef idx="1">
+            <a:schemeClr val="accent1"/>
+          </a:lnRef>
+          <a:fillRef idx="3">
+            <a:schemeClr val="accent1"/>
+          </a:fillRef>
+          <a:effectRef idx="2">
+            <a:schemeClr val="accent1"/>
+          </a:effectRef>
+          <a:fontRef idx="minor">
+            <a:schemeClr val="lt1"/>
+          </a:fontRef>
+        </p:style>
+        <p:txBody>
+          <a:bodyPr rtlCol="0" anchor="ctr"/>
+          <a:lstStyle/>
+          <a:p>
+            <a:pPr algn="ctr"/>
+          </a:p>
+        </p:txBody>
+      </p:sp>
+      <p:sp>
+        <p:nvSpPr>
+          <p:cNvPr id="5" name="Rounded Rectangle 4"/>
+          <p:cNvSpPr/>
+          <p:nvPr/>
+        </p:nvSpPr>
+        <p:spPr>
+          <a:xfrm>
+            <a:off x="457200" y="1188720"/>
+            <a:ext cx="11247120" cy="5212080"/>
+          </a:xfrm>
+          <a:prstGeom prst="roundRect">
+            <a:avLst/>
+          </a:prstGeom>
+          <a:solidFill>
+            <a:srgbClr val="F8F9FB"/>
+          </a:solidFill>
+          <a:ln w="12700">
+            <a:solidFill>
+              <a:srgbClr val="E0E0E8"/>
+            </a:solidFill>
+          </a:ln>
+          <a:effectLst/>
+        </p:spPr>
+        <p:style>
+          <a:lnRef idx="1">
+            <a:schemeClr val="accent1"/>
+          </a:lnRef>
+          <a:fillRef idx="3">
+            <a:schemeClr val="accent1"/>
+          </a:fillRef>
+          <a:effectRef idx="2">
+            <a:schemeClr val="accent1"/>
+          </a:effectRef>
+          <a:fontRef idx="minor">
+            <a:schemeClr val="lt1"/>
+          </a:fontRef>
+        </p:style>
+        <p:txBody>
+          <a:bodyPr rtlCol="0" anchor="ctr"/>
+          <a:lstStyle/>
+          <a:p>
+            <a:pPr algn="ctr"/>
+          </a:p>
+        </p:txBody>
+      </p:sp>
+      <p:sp>
+        <p:nvSpPr>
+          <p:cNvPr id="6" name="TextBox 5"/>
+          <p:cNvSpPr txBox="1"/>
+          <p:nvPr/>
+        </p:nvSpPr>
+        <p:spPr>
+          <a:xfrm>
+            <a:off x="822960" y="1371600"/>
+            <a:ext cx="10515600" cy="4846320"/>
+          </a:xfrm>
+          <a:prstGeom prst="rect">
+            <a:avLst/>
+          </a:prstGeom>
+          <a:noFill/>
+        </p:spPr>
+        <p:txBody>
+          <a:bodyPr wrap="square">
+            <a:spAutoFit/>
+          </a:bodyPr>
+          <a:lstStyle/>
+          <a:p>
+            <a:pPr>
+              <a:lnSpc>
+                <a:spcPct val="140000"/>
+              </a:lnSpc>
+              <a:spcBef>
+                <a:spcPts val="600"/>
+              </a:spcBef>
+              <a:spcAft>
+                <a:spcPts val="200"/>
+              </a:spcAft>
+              <a:defRPr sz="1600" b="0">
+                <a:solidFill>
+                  <a:srgbClr val="1F1F1F"/>
+                </a:solidFill>
+                <a:latin typeface="맑은 고딕"/>
+              </a:defRPr>
+            </a:pPr>
+            <a:r>
+              <a:t>규모: 기능점수 ~700 FP · 44,211 LOC · API 74 · 화면 39 · DB 29모델</a:t>
+            </a:r>
+          </a:p>
+          <a:p>
+            <a:pPr>
+              <a:lnSpc>
+                <a:spcPct val="140000"/>
+              </a:lnSpc>
+              <a:spcBef>
+                <a:spcPts val="600"/>
+              </a:spcBef>
+              <a:spcAft>
+                <a:spcPts val="200"/>
+              </a:spcAft>
+              <a:defRPr sz="1600" b="0">
+                <a:solidFill>
+                  <a:srgbClr val="1F1F1F"/>
+                </a:solidFill>
+                <a:latin typeface="맑은 고딕"/>
+              </a:defRPr>
+            </a:pPr>
+          </a:p>
+          <a:p>
+            <a:pPr>
+              <a:lnSpc>
+                <a:spcPct val="140000"/>
+              </a:lnSpc>
+              <a:spcBef>
+                <a:spcPts val="600"/>
+              </a:spcBef>
+              <a:spcAft>
+                <a:spcPts val="200"/>
+              </a:spcAft>
+              <a:defRPr sz="1600" b="0">
+                <a:solidFill>
+                  <a:srgbClr val="1F1F1F"/>
+                </a:solidFill>
+                <a:latin typeface="맑은 고딕"/>
+              </a:defRPr>
+            </a:pPr>
+            <a:r>
+              <a:t>외주 예상 (팀 3~4명: PL·백엔드·프론트·QA)</a:t>
+            </a:r>
+          </a:p>
+          <a:p>
+            <a:pPr lvl="1">
+              <a:lnSpc>
+                <a:spcPct val="140000"/>
+              </a:lnSpc>
+              <a:spcBef>
+                <a:spcPts val="200"/>
+              </a:spcBef>
+              <a:spcAft>
+                <a:spcPts val="200"/>
+              </a:spcAft>
+              <a:defRPr sz="1500">
+                <a:solidFill>
+                  <a:srgbClr val="8C8C9A"/>
+                </a:solidFill>
+                <a:latin typeface="맑은 고딕"/>
+              </a:defRPr>
+            </a:pPr>
+            <a:r>
+              <a:t>기간 6~9개월 · 투입 25~35 맨먼스</a:t>
+            </a:r>
+          </a:p>
+          <a:p>
+            <a:pPr lvl="1">
+              <a:lnSpc>
+                <a:spcPct val="140000"/>
+              </a:lnSpc>
+              <a:spcBef>
+                <a:spcPts val="200"/>
+              </a:spcBef>
+              <a:spcAft>
+                <a:spcPts val="200"/>
+              </a:spcAft>
+              <a:defRPr sz="1500">
+                <a:solidFill>
+                  <a:srgbClr val="8C8C9A"/>
+                </a:solidFill>
+                <a:latin typeface="맑은 고딕"/>
+              </a:defRPr>
+            </a:pPr>
+            <a:r>
+              <a:t>비용 3.5~5.5억 원 (SI 대가 기준)</a:t>
+            </a:r>
+          </a:p>
+          <a:p>
+            <a:pPr>
+              <a:lnSpc>
+                <a:spcPct val="140000"/>
+              </a:lnSpc>
+              <a:spcBef>
+                <a:spcPts val="600"/>
+              </a:spcBef>
+              <a:spcAft>
+                <a:spcPts val="200"/>
+              </a:spcAft>
+              <a:defRPr sz="1600" b="0">
+                <a:solidFill>
+                  <a:srgbClr val="1F1F1F"/>
+                </a:solidFill>
+                <a:latin typeface="맑은 고딕"/>
+              </a:defRPr>
+            </a:pPr>
+          </a:p>
+          <a:p>
+            <a:pPr>
+              <a:lnSpc>
+                <a:spcPct val="140000"/>
+              </a:lnSpc>
+              <a:spcBef>
+                <a:spcPts val="600"/>
+              </a:spcBef>
+              <a:spcAft>
+                <a:spcPts val="200"/>
+              </a:spcAft>
+              <a:defRPr sz="1600" b="0">
+                <a:solidFill>
+                  <a:srgbClr val="1F1F1F"/>
+                </a:solidFill>
+                <a:latin typeface="맑은 고딕"/>
+              </a:defRPr>
+            </a:pPr>
+            <a:r>
+              <a:t>1인 + AI (실제)</a:t>
+            </a:r>
+          </a:p>
+          <a:p>
+            <a:pPr lvl="1">
+              <a:lnSpc>
+                <a:spcPct val="140000"/>
+              </a:lnSpc>
+              <a:spcBef>
+                <a:spcPts val="200"/>
+              </a:spcBef>
+              <a:spcAft>
+                <a:spcPts val="200"/>
+              </a:spcAft>
+              <a:defRPr sz="1500">
+                <a:solidFill>
+                  <a:srgbClr val="8C8C9A"/>
+                </a:solidFill>
+                <a:latin typeface="맑은 고딕"/>
+              </a:defRPr>
+            </a:pPr>
+            <a:r>
+              <a:t>기간 4.5개월 · 투입 4.5 맨먼스</a:t>
+            </a:r>
+          </a:p>
+          <a:p>
+            <a:pPr lvl="1">
+              <a:lnSpc>
+                <a:spcPct val="140000"/>
+              </a:lnSpc>
+              <a:spcBef>
+                <a:spcPts val="200"/>
+              </a:spcBef>
+              <a:spcAft>
+                <a:spcPts val="200"/>
+              </a:spcAft>
+              <a:defRPr sz="1500">
+                <a:solidFill>
+                  <a:srgbClr val="8C8C9A"/>
+                </a:solidFill>
+                <a:latin typeface="맑은 고딕"/>
+              </a:defRPr>
+            </a:pPr>
+            <a:r>
+              <a:t>비용 ~4,500만 원 (인건비 ~4천만 + AI 구독 ~100만)</a:t>
+            </a:r>
+          </a:p>
+          <a:p>
+            <a:pPr>
+              <a:lnSpc>
+                <a:spcPct val="140000"/>
+              </a:lnSpc>
+              <a:spcBef>
+                <a:spcPts val="600"/>
+              </a:spcBef>
+              <a:spcAft>
+                <a:spcPts val="200"/>
+              </a:spcAft>
+              <a:defRPr sz="1600" b="0">
+                <a:solidFill>
+                  <a:srgbClr val="1F1F1F"/>
+                </a:solidFill>
+                <a:latin typeface="맑은 고딕"/>
+              </a:defRPr>
+            </a:pPr>
+          </a:p>
+          <a:p>
+            <a:pPr>
+              <a:lnSpc>
+                <a:spcPct val="140000"/>
+              </a:lnSpc>
+              <a:spcBef>
+                <a:spcPts val="600"/>
+              </a:spcBef>
+              <a:spcAft>
+                <a:spcPts val="200"/>
+              </a:spcAft>
+              <a:defRPr sz="1600" b="0">
+                <a:solidFill>
+                  <a:srgbClr val="1F1F1F"/>
+                </a:solidFill>
+                <a:latin typeface="맑은 고딕"/>
+              </a:defRPr>
+            </a:pPr>
+            <a:r>
+              <a:t>효과: 비용 ~8~11배 절감 · 인당 생산성 ~155 FP/MM (외주 ~7~8배)</a:t>
+            </a:r>
+          </a:p>
+          <a:p>
+            <a:pPr>
+              <a:lnSpc>
+                <a:spcPct val="140000"/>
+              </a:lnSpc>
+              <a:spcBef>
+                <a:spcPts val="600"/>
+              </a:spcBef>
+              <a:spcAft>
+                <a:spcPts val="200"/>
+              </a:spcAft>
+              <a:defRPr sz="1600" b="0">
+                <a:solidFill>
+                  <a:srgbClr val="1F1F1F"/>
+                </a:solidFill>
+                <a:latin typeface="맑은 고딕"/>
+              </a:defRPr>
+            </a:pPr>
+            <a:r>
+              <a:t>1인 기준(AI 없이)이면 ~2.5~3년 → AI로 4.5개월 (약 6~8배 단축)</a:t>
+            </a:r>
+          </a:p>
+        </p:txBody>
+      </p:sp>
+      <p:sp>
+        <p:nvSpPr>
+          <p:cNvPr id="7" name="TextBox 6"/>
+          <p:cNvSpPr txBox="1"/>
+          <p:nvPr/>
+        </p:nvSpPr>
+        <p:spPr>
+          <a:xfrm>
+            <a:off x="10972800" y="6492240"/>
+            <a:ext cx="914400" cy="274320"/>
+          </a:xfrm>
+          <a:prstGeom prst="rect">
+            <a:avLst/>
+          </a:prstGeom>
+          <a:noFill/>
+        </p:spPr>
+        <p:txBody>
+          <a:bodyPr wrap="square">
+            <a:spAutoFit/>
+          </a:bodyPr>
+          <a:lstStyle/>
+          <a:p>
+            <a:pPr algn="r">
+              <a:defRPr sz="1000" b="0">
+                <a:solidFill>
+                  <a:srgbClr val="8C8C9A"/>
+                </a:solidFill>
+                <a:latin typeface="맑은 고딕"/>
+              </a:defRPr>
+            </a:pPr>
+            <a:r>
+              <a:t>26</a:t>
+            </a:r>
+          </a:p>
+        </p:txBody>
+      </p:sp>
+    </p:spTree>
+  </p:cSld>
+  <p:clrMapOvr>
+    <a:masterClrMapping/>
+  </p:clrMapOvr>
+</p:sld>
+</file>
+
+<file path=ppt/slides/slide27.xml><?xml version="1.0" encoding="utf-8"?>
 <p:sld xmlns:a="http://schemas.openxmlformats.org/drawingml/2006/main" xmlns:p="http://schemas.openxmlformats.org/presentationml/2006/main" xmlns:r="http://schemas.openxmlformats.org/officeDocument/2006/relationships">
   <p:cSld>
     <p:bg>

--- a/docs/retrospective-presentation.pptx
+++ b/docs/retrospective-presentation.pptx
@@ -3402,7 +3402,7 @@
               </a:defRPr>
             </a:pPr>
             <a:r>
-              <a:t>514 커밋  |  43,974줄  |  134개 기능  |  AI 99%+ 작성</a:t>
+              <a:t>576 커밋  |  44,211줄  |  135개 기능  |  AI 99%+ 작성</a:t>
             </a:r>
           </a:p>
           <a:p>
@@ -4031,7 +4031,7 @@
               </a:defRPr>
             </a:pPr>
             <a:r>
-              <a:t>커밋 분포 (514건)</a:t>
+              <a:t>커밋 분포 (576건)</a:t>
             </a:r>
           </a:p>
         </p:txBody>
@@ -10531,7 +10531,7 @@
               </a:defRPr>
             </a:pPr>
             <a:r>
-              <a:t>72개 확인 스크립트 + 29개 결과 기록</a:t>
+              <a:t>116개 확인 스크립트 + 31개 결과 기록</a:t>
             </a:r>
           </a:p>
           <a:p>
@@ -10900,7 +10900,7 @@
               </a:defRPr>
             </a:pPr>
             <a:r>
-              <a:t>514커밋 중 refactor 3건뿐 &gt; 기술 부채 축적</a:t>
+              <a:t>576커밋 중 refactor 3건뿐 &gt; 기술 부채 축적</a:t>
             </a:r>
           </a:p>
           <a:p>
@@ -10944,7 +10944,7 @@
               </a:defRPr>
             </a:pPr>
             <a:r>
-              <a:t>8개 테스트 파일로 43,974줄은 부족</a:t>
+              <a:t>8개 테스트 파일로 44,211줄은 부족</a:t>
             </a:r>
           </a:p>
           <a:p>
@@ -13658,7 +13658,7 @@
                         </a:defRPr>
                       </a:pPr>
                       <a:r>
-                        <a:t>514개 (AI 99%+ 작성)</a:t>
+                        <a:t>576개 (AI 99%+ 작성)</a:t>
                       </a:r>
                     </a:p>
                   </a:txBody>
@@ -13708,7 +13708,7 @@
                         </a:defRPr>
                       </a:pPr>
                       <a:r>
-                        <a:t>43,974줄 / 215개 파일</a:t>
+                        <a:t>44,211줄 / 218개 파일</a:t>
                       </a:r>
                     </a:p>
                   </a:txBody>
@@ -13758,7 +13758,7 @@
                         </a:defRPr>
                       </a:pPr>
                       <a:r>
-                        <a:t>73개</a:t>
+                        <a:t>74개</a:t>
                       </a:r>
                     </a:p>
                   </a:txBody>
@@ -13908,7 +13908,7 @@
                         </a:defRPr>
                       </a:pPr>
                       <a:r>
-                        <a:t>134개 (features.md 기준)</a:t>
+                        <a:t>135개 (features.md 기준)</a:t>
                       </a:r>
                     </a:p>
                   </a:txBody>
@@ -13958,7 +13958,7 @@
                         </a:defRPr>
                       </a:pPr>
                       <a:r>
-                        <a:t>72개 작성, 29개 결과 기록</a:t>
+                        <a:t>116개 작성, 31개 결과 기록</a:t>
                       </a:r>
                     </a:p>
                   </a:txBody>
@@ -14008,7 +14008,7 @@
                         </a:defRPr>
                       </a:pPr>
                       <a:r>
-                        <a:t>509개 키 (한/영)</a:t>
+                        <a:t>511개 키 (한/영)</a:t>
                       </a:r>
                     </a:p>
                   </a:txBody>
@@ -14899,7 +14899,7 @@
               </a:defRPr>
             </a:pPr>
             <a:r>
-              <a:t>통합 39페이지 + 73개 API</a:t>
+              <a:t>통합 39페이지 + 74개 API</a:t>
             </a:r>
           </a:p>
           <a:p>

--- a/docs/retrospective-presentation.pptx
+++ b/docs/retrospective-presentation.pptx
@@ -32,6 +32,29 @@
     <p:sldId id="280" r:id="rId31"/>
     <p:sldId id="281" r:id="rId32"/>
     <p:sldId id="282" r:id="rId33"/>
+    <p:sldId id="283" r:id="rId34"/>
+    <p:sldId id="284" r:id="rId35"/>
+    <p:sldId id="285" r:id="rId36"/>
+    <p:sldId id="286" r:id="rId37"/>
+    <p:sldId id="287" r:id="rId38"/>
+    <p:sldId id="288" r:id="rId39"/>
+    <p:sldId id="289" r:id="rId40"/>
+    <p:sldId id="290" r:id="rId41"/>
+    <p:sldId id="291" r:id="rId42"/>
+    <p:sldId id="292" r:id="rId43"/>
+    <p:sldId id="293" r:id="rId44"/>
+    <p:sldId id="294" r:id="rId45"/>
+    <p:sldId id="295" r:id="rId46"/>
+    <p:sldId id="296" r:id="rId47"/>
+    <p:sldId id="297" r:id="rId48"/>
+    <p:sldId id="298" r:id="rId49"/>
+    <p:sldId id="299" r:id="rId50"/>
+    <p:sldId id="300" r:id="rId51"/>
+    <p:sldId id="301" r:id="rId52"/>
+    <p:sldId id="302" r:id="rId53"/>
+    <p:sldId id="303" r:id="rId54"/>
+    <p:sldId id="304" r:id="rId55"/>
+    <p:sldId id="305" r:id="rId56"/>
   </p:sldIdLst>
   <p:sldSz cx="12191695" cy="6858000" type="screen4x3"/>
   <p:notesSz cx="6858000" cy="9144000"/>
@@ -13018,6 +13041,723 @@
 </p:sld>
 </file>
 
+<file path=ppt/slides/slide28.xml><?xml version="1.0" encoding="utf-8"?>
+<p:sld xmlns:a="http://schemas.openxmlformats.org/drawingml/2006/main" xmlns:p="http://schemas.openxmlformats.org/presentationml/2006/main" xmlns:r="http://schemas.openxmlformats.org/officeDocument/2006/relationships">
+  <p:cSld>
+    <p:bg>
+      <p:bgPr>
+        <a:solidFill>
+          <a:srgbClr val="FFFFFF"/>
+        </a:solidFill>
+        <a:effectLst/>
+      </p:bgPr>
+    </p:bg>
+    <p:spTree>
+      <p:nvGrpSpPr>
+        <p:cNvPr id="1" name=""/>
+        <p:cNvGrpSpPr/>
+        <p:nvPr/>
+      </p:nvGrpSpPr>
+      <p:grpSpPr/>
+      <p:sp>
+        <p:nvSpPr>
+          <p:cNvPr id="2" name="Rectangle 1"/>
+          <p:cNvSpPr/>
+          <p:nvPr/>
+        </p:nvSpPr>
+        <p:spPr>
+          <a:xfrm>
+            <a:off x="0" y="0"/>
+            <a:ext cx="109728" cy="6858000"/>
+          </a:xfrm>
+          <a:prstGeom prst="rect">
+            <a:avLst/>
+          </a:prstGeom>
+          <a:solidFill>
+            <a:srgbClr val="14B8A6"/>
+          </a:solidFill>
+          <a:ln>
+            <a:noFill/>
+          </a:ln>
+          <a:effectLst/>
+        </p:spPr>
+        <p:style>
+          <a:lnRef idx="1">
+            <a:schemeClr val="accent1"/>
+          </a:lnRef>
+          <a:fillRef idx="3">
+            <a:schemeClr val="accent1"/>
+          </a:fillRef>
+          <a:effectRef idx="2">
+            <a:schemeClr val="accent1"/>
+          </a:effectRef>
+          <a:fontRef idx="minor">
+            <a:schemeClr val="lt1"/>
+          </a:fontRef>
+        </p:style>
+        <p:txBody>
+          <a:bodyPr rtlCol="0" anchor="ctr"/>
+          <a:lstStyle/>
+          <a:p>
+            <a:pPr algn="ctr"/>
+          </a:p>
+        </p:txBody>
+      </p:sp>
+      <p:sp>
+        <p:nvSpPr>
+          <p:cNvPr id="3" name="Oval 2"/>
+          <p:cNvSpPr/>
+          <p:nvPr/>
+        </p:nvSpPr>
+        <p:spPr>
+          <a:xfrm>
+            <a:off x="1371600" y="2011680"/>
+            <a:ext cx="1097280" cy="1097280"/>
+          </a:xfrm>
+          <a:prstGeom prst="ellipse">
+            <a:avLst/>
+          </a:prstGeom>
+          <a:solidFill>
+            <a:srgbClr val="14B8A6"/>
+          </a:solidFill>
+          <a:ln>
+            <a:noFill/>
+          </a:ln>
+          <a:effectLst/>
+        </p:spPr>
+        <p:style>
+          <a:lnRef idx="1">
+            <a:schemeClr val="accent1"/>
+          </a:lnRef>
+          <a:fillRef idx="3">
+            <a:schemeClr val="accent1"/>
+          </a:fillRef>
+          <a:effectRef idx="2">
+            <a:schemeClr val="accent1"/>
+          </a:effectRef>
+          <a:fontRef idx="minor">
+            <a:schemeClr val="lt1"/>
+          </a:fontRef>
+        </p:style>
+        <p:txBody>
+          <a:bodyPr rtlCol="0" anchor="ctr" wrap="none"/>
+          <a:lstStyle/>
+          <a:p>
+            <a:pPr algn="ctr">
+              <a:spcBef>
+                <a:spcPts val="1200"/>
+              </a:spcBef>
+              <a:defRPr sz="3600" b="1">
+                <a:solidFill>
+                  <a:srgbClr val="FFFFFF"/>
+                </a:solidFill>
+                <a:latin typeface="맑은 고딕"/>
+              </a:defRPr>
+            </a:pPr>
+            <a:r>
+              <a:t>10</a:t>
+            </a:r>
+          </a:p>
+        </p:txBody>
+      </p:sp>
+      <p:sp>
+        <p:nvSpPr>
+          <p:cNvPr id="4" name="TextBox 3"/>
+          <p:cNvSpPr txBox="1"/>
+          <p:nvPr/>
+        </p:nvSpPr>
+        <p:spPr>
+          <a:xfrm>
+            <a:off x="2926080" y="1828800"/>
+            <a:ext cx="8229600" cy="914400"/>
+          </a:xfrm>
+          <a:prstGeom prst="rect">
+            <a:avLst/>
+          </a:prstGeom>
+          <a:noFill/>
+        </p:spPr>
+        <p:txBody>
+          <a:bodyPr wrap="square">
+            <a:spAutoFit/>
+          </a:bodyPr>
+          <a:lstStyle/>
+          <a:p>
+            <a:pPr algn="l">
+              <a:defRPr sz="4000" b="1">
+                <a:solidFill>
+                  <a:srgbClr val="1F1F1F"/>
+                </a:solidFill>
+                <a:latin typeface="맑은 고딕"/>
+              </a:defRPr>
+            </a:pPr>
+            <a:r>
+              <a:t>부록. 화면 스크린샷</a:t>
+            </a:r>
+          </a:p>
+        </p:txBody>
+      </p:sp>
+      <p:sp>
+        <p:nvSpPr>
+          <p:cNvPr id="5" name="TextBox 4"/>
+          <p:cNvSpPr txBox="1"/>
+          <p:nvPr/>
+        </p:nvSpPr>
+        <p:spPr>
+          <a:xfrm>
+            <a:off x="2926080" y="2926080"/>
+            <a:ext cx="8229600" cy="548640"/>
+          </a:xfrm>
+          <a:prstGeom prst="rect">
+            <a:avLst/>
+          </a:prstGeom>
+          <a:noFill/>
+        </p:spPr>
+        <p:txBody>
+          <a:bodyPr wrap="square">
+            <a:spAutoFit/>
+          </a:bodyPr>
+          <a:lstStyle/>
+          <a:p>
+            <a:pPr algn="l">
+              <a:defRPr sz="1800" b="0">
+                <a:solidFill>
+                  <a:srgbClr val="5A5A6E"/>
+                </a:solidFill>
+                <a:latin typeface="맑은 고딕"/>
+              </a:defRPr>
+            </a:pPr>
+            <a:r>
+              <a:t>실제 운영 화면 (DC Express)</a:t>
+            </a:r>
+          </a:p>
+        </p:txBody>
+      </p:sp>
+      <p:sp>
+        <p:nvSpPr>
+          <p:cNvPr id="6" name="Rectangle 5"/>
+          <p:cNvSpPr/>
+          <p:nvPr/>
+        </p:nvSpPr>
+        <p:spPr>
+          <a:xfrm>
+            <a:off x="2926080" y="3657600"/>
+            <a:ext cx="3657600" cy="36576"/>
+          </a:xfrm>
+          <a:prstGeom prst="rect">
+            <a:avLst/>
+          </a:prstGeom>
+          <a:solidFill>
+            <a:srgbClr val="14B8A6"/>
+          </a:solidFill>
+          <a:ln>
+            <a:noFill/>
+          </a:ln>
+          <a:effectLst/>
+        </p:spPr>
+        <p:style>
+          <a:lnRef idx="1">
+            <a:schemeClr val="accent1"/>
+          </a:lnRef>
+          <a:fillRef idx="3">
+            <a:schemeClr val="accent1"/>
+          </a:fillRef>
+          <a:effectRef idx="2">
+            <a:schemeClr val="accent1"/>
+          </a:effectRef>
+          <a:fontRef idx="minor">
+            <a:schemeClr val="lt1"/>
+          </a:fontRef>
+        </p:style>
+        <p:txBody>
+          <a:bodyPr rtlCol="0" anchor="ctr"/>
+          <a:lstStyle/>
+          <a:p>
+            <a:pPr algn="ctr"/>
+          </a:p>
+        </p:txBody>
+      </p:sp>
+      <p:sp>
+        <p:nvSpPr>
+          <p:cNvPr id="7" name="Rectangle 6"/>
+          <p:cNvSpPr/>
+          <p:nvPr/>
+        </p:nvSpPr>
+        <p:spPr>
+          <a:xfrm>
+            <a:off x="0" y="6748272"/>
+            <a:ext cx="12191695" cy="54864"/>
+          </a:xfrm>
+          <a:prstGeom prst="rect">
+            <a:avLst/>
+          </a:prstGeom>
+          <a:solidFill>
+            <a:srgbClr val="14B8A6"/>
+          </a:solidFill>
+          <a:ln>
+            <a:noFill/>
+          </a:ln>
+          <a:effectLst/>
+        </p:spPr>
+        <p:style>
+          <a:lnRef idx="1">
+            <a:schemeClr val="accent1"/>
+          </a:lnRef>
+          <a:fillRef idx="3">
+            <a:schemeClr val="accent1"/>
+          </a:fillRef>
+          <a:effectRef idx="2">
+            <a:schemeClr val="accent1"/>
+          </a:effectRef>
+          <a:fontRef idx="minor">
+            <a:schemeClr val="lt1"/>
+          </a:fontRef>
+        </p:style>
+        <p:txBody>
+          <a:bodyPr rtlCol="0" anchor="ctr"/>
+          <a:lstStyle/>
+          <a:p>
+            <a:pPr algn="ctr"/>
+          </a:p>
+        </p:txBody>
+      </p:sp>
+    </p:spTree>
+  </p:cSld>
+  <p:clrMapOvr>
+    <a:masterClrMapping/>
+  </p:clrMapOvr>
+</p:sld>
+</file>
+
+<file path=ppt/slides/slide29.xml><?xml version="1.0" encoding="utf-8"?>
+<p:sld xmlns:a="http://schemas.openxmlformats.org/drawingml/2006/main" xmlns:p="http://schemas.openxmlformats.org/presentationml/2006/main" xmlns:r="http://schemas.openxmlformats.org/officeDocument/2006/relationships">
+  <p:cSld>
+    <p:bg>
+      <p:bgPr>
+        <a:solidFill>
+          <a:srgbClr val="FFFFFF"/>
+        </a:solidFill>
+        <a:effectLst/>
+      </p:bgPr>
+    </p:bg>
+    <p:spTree>
+      <p:nvGrpSpPr>
+        <p:cNvPr id="1" name=""/>
+        <p:cNvGrpSpPr/>
+        <p:nvPr/>
+      </p:nvGrpSpPr>
+      <p:grpSpPr/>
+      <p:sp>
+        <p:nvSpPr>
+          <p:cNvPr id="2" name="Rectangle 1"/>
+          <p:cNvSpPr/>
+          <p:nvPr/>
+        </p:nvSpPr>
+        <p:spPr>
+          <a:xfrm>
+            <a:off x="0" y="0"/>
+            <a:ext cx="12191695" cy="45720"/>
+          </a:xfrm>
+          <a:prstGeom prst="rect">
+            <a:avLst/>
+          </a:prstGeom>
+          <a:solidFill>
+            <a:srgbClr val="0070C0"/>
+          </a:solidFill>
+          <a:ln>
+            <a:noFill/>
+          </a:ln>
+          <a:effectLst/>
+        </p:spPr>
+        <p:style>
+          <a:lnRef idx="1">
+            <a:schemeClr val="accent1"/>
+          </a:lnRef>
+          <a:fillRef idx="3">
+            <a:schemeClr val="accent1"/>
+          </a:fillRef>
+          <a:effectRef idx="2">
+            <a:schemeClr val="accent1"/>
+          </a:effectRef>
+          <a:fontRef idx="minor">
+            <a:schemeClr val="lt1"/>
+          </a:fontRef>
+        </p:style>
+        <p:txBody>
+          <a:bodyPr rtlCol="0" anchor="ctr"/>
+          <a:lstStyle/>
+          <a:p>
+            <a:pPr algn="ctr"/>
+          </a:p>
+        </p:txBody>
+      </p:sp>
+      <p:sp>
+        <p:nvSpPr>
+          <p:cNvPr id="3" name="Rounded Rectangle 2"/>
+          <p:cNvSpPr/>
+          <p:nvPr/>
+        </p:nvSpPr>
+        <p:spPr>
+          <a:xfrm>
+            <a:off x="548640" y="256032"/>
+            <a:ext cx="685800" cy="457200"/>
+          </a:xfrm>
+          <a:prstGeom prst="roundRect">
+            <a:avLst/>
+          </a:prstGeom>
+          <a:solidFill>
+            <a:srgbClr val="0070C0"/>
+          </a:solidFill>
+          <a:ln>
+            <a:noFill/>
+          </a:ln>
+          <a:effectLst/>
+        </p:spPr>
+        <p:style>
+          <a:lnRef idx="1">
+            <a:schemeClr val="accent1"/>
+          </a:lnRef>
+          <a:fillRef idx="3">
+            <a:schemeClr val="accent1"/>
+          </a:fillRef>
+          <a:effectRef idx="2">
+            <a:schemeClr val="accent1"/>
+          </a:effectRef>
+          <a:fontRef idx="minor">
+            <a:schemeClr val="lt1"/>
+          </a:fontRef>
+        </p:style>
+        <p:txBody>
+          <a:bodyPr rtlCol="0" anchor="ctr"/>
+          <a:lstStyle/>
+          <a:p>
+            <a:pPr algn="ctr">
+              <a:defRPr sz="1400" b="1">
+                <a:solidFill>
+                  <a:srgbClr val="FFFFFF"/>
+                </a:solidFill>
+                <a:latin typeface="맑은 고딕"/>
+              </a:defRPr>
+            </a:pPr>
+            <a:r>
+              <a:t>A01</a:t>
+            </a:r>
+          </a:p>
+        </p:txBody>
+      </p:sp>
+      <p:sp>
+        <p:nvSpPr>
+          <p:cNvPr id="4" name="TextBox 3"/>
+          <p:cNvSpPr txBox="1"/>
+          <p:nvPr/>
+        </p:nvSpPr>
+        <p:spPr>
+          <a:xfrm>
+            <a:off x="1371600" y="274320"/>
+            <a:ext cx="10241280" cy="548640"/>
+          </a:xfrm>
+          <a:prstGeom prst="rect">
+            <a:avLst/>
+          </a:prstGeom>
+          <a:noFill/>
+        </p:spPr>
+        <p:txBody>
+          <a:bodyPr wrap="square">
+            <a:spAutoFit/>
+          </a:bodyPr>
+          <a:lstStyle/>
+          <a:p>
+            <a:pPr algn="l">
+              <a:defRPr sz="2200" b="1">
+                <a:solidFill>
+                  <a:srgbClr val="1F1F1F"/>
+                </a:solidFill>
+                <a:latin typeface="맑은 고딕"/>
+              </a:defRPr>
+            </a:pPr>
+            <a:r>
+              <a:t>로그인</a:t>
+            </a:r>
+          </a:p>
+        </p:txBody>
+      </p:sp>
+      <p:sp>
+        <p:nvSpPr>
+          <p:cNvPr id="5" name="Rectangle 4"/>
+          <p:cNvSpPr/>
+          <p:nvPr/>
+        </p:nvSpPr>
+        <p:spPr>
+          <a:xfrm>
+            <a:off x="548640" y="841248"/>
+            <a:ext cx="1828800" cy="27432"/>
+          </a:xfrm>
+          <a:prstGeom prst="rect">
+            <a:avLst/>
+          </a:prstGeom>
+          <a:solidFill>
+            <a:srgbClr val="0070C0"/>
+          </a:solidFill>
+          <a:ln>
+            <a:noFill/>
+          </a:ln>
+          <a:effectLst/>
+        </p:spPr>
+        <p:style>
+          <a:lnRef idx="1">
+            <a:schemeClr val="accent1"/>
+          </a:lnRef>
+          <a:fillRef idx="3">
+            <a:schemeClr val="accent1"/>
+          </a:fillRef>
+          <a:effectRef idx="2">
+            <a:schemeClr val="accent1"/>
+          </a:effectRef>
+          <a:fontRef idx="minor">
+            <a:schemeClr val="lt1"/>
+          </a:fontRef>
+        </p:style>
+        <p:txBody>
+          <a:bodyPr rtlCol="0" anchor="ctr"/>
+          <a:lstStyle/>
+          <a:p>
+            <a:pPr algn="ctr"/>
+          </a:p>
+        </p:txBody>
+      </p:sp>
+      <p:sp>
+        <p:nvSpPr>
+          <p:cNvPr id="6" name="Rounded Rectangle 5"/>
+          <p:cNvSpPr/>
+          <p:nvPr/>
+        </p:nvSpPr>
+        <p:spPr>
+          <a:xfrm>
+            <a:off x="640080" y="1097280"/>
+            <a:ext cx="10908792" cy="4892040"/>
+          </a:xfrm>
+          <a:prstGeom prst="roundRect">
+            <a:avLst/>
+          </a:prstGeom>
+          <a:solidFill>
+            <a:srgbClr val="F8F9FB"/>
+          </a:solidFill>
+          <a:ln w="15240">
+            <a:solidFill>
+              <a:srgbClr val="0070C0"/>
+            </a:solidFill>
+          </a:ln>
+          <a:effectLst/>
+        </p:spPr>
+        <p:style>
+          <a:lnRef idx="1">
+            <a:schemeClr val="accent1"/>
+          </a:lnRef>
+          <a:fillRef idx="3">
+            <a:schemeClr val="accent1"/>
+          </a:fillRef>
+          <a:effectRef idx="2">
+            <a:schemeClr val="accent1"/>
+          </a:effectRef>
+          <a:fontRef idx="minor">
+            <a:schemeClr val="lt1"/>
+          </a:fontRef>
+        </p:style>
+        <p:txBody>
+          <a:bodyPr rtlCol="0" anchor="ctr"/>
+          <a:lstStyle/>
+          <a:p>
+            <a:pPr algn="ctr"/>
+          </a:p>
+        </p:txBody>
+      </p:sp>
+      <p:sp>
+        <p:nvSpPr>
+          <p:cNvPr id="7" name="TextBox 6"/>
+          <p:cNvSpPr txBox="1"/>
+          <p:nvPr/>
+        </p:nvSpPr>
+        <p:spPr>
+          <a:xfrm>
+            <a:off x="640080" y="2834640"/>
+            <a:ext cx="10908792" cy="548640"/>
+          </a:xfrm>
+          <a:prstGeom prst="rect">
+            <a:avLst/>
+          </a:prstGeom>
+          <a:noFill/>
+        </p:spPr>
+        <p:txBody>
+          <a:bodyPr wrap="square">
+            <a:spAutoFit/>
+          </a:bodyPr>
+          <a:lstStyle/>
+          <a:p>
+            <a:pPr algn="ctr">
+              <a:defRPr sz="2000" b="1">
+                <a:solidFill>
+                  <a:srgbClr val="8C8C9A"/>
+                </a:solidFill>
+                <a:latin typeface="맑은 고딕"/>
+              </a:defRPr>
+            </a:pPr>
+            <a:r>
+              <a:t>🖼  화면 캡처 위치</a:t>
+            </a:r>
+          </a:p>
+        </p:txBody>
+      </p:sp>
+      <p:sp>
+        <p:nvSpPr>
+          <p:cNvPr id="8" name="TextBox 7"/>
+          <p:cNvSpPr txBox="1"/>
+          <p:nvPr/>
+        </p:nvSpPr>
+        <p:spPr>
+          <a:xfrm>
+            <a:off x="640080" y="3474720"/>
+            <a:ext cx="10908792" cy="457200"/>
+          </a:xfrm>
+          <a:prstGeom prst="rect">
+            <a:avLst/>
+          </a:prstGeom>
+          <a:noFill/>
+        </p:spPr>
+        <p:txBody>
+          <a:bodyPr wrap="square">
+            <a:spAutoFit/>
+          </a:bodyPr>
+          <a:lstStyle/>
+          <a:p>
+            <a:pPr algn="ctr">
+              <a:defRPr sz="1300" b="0">
+                <a:solidFill>
+                  <a:srgbClr val="0070C0"/>
+                </a:solidFill>
+                <a:latin typeface="Consolas"/>
+              </a:defRPr>
+            </a:pPr>
+            <a:r>
+              <a:t>docs/images/login.png</a:t>
+            </a:r>
+          </a:p>
+        </p:txBody>
+      </p:sp>
+      <p:sp>
+        <p:nvSpPr>
+          <p:cNvPr id="9" name="TextBox 8"/>
+          <p:cNvSpPr txBox="1"/>
+          <p:nvPr/>
+        </p:nvSpPr>
+        <p:spPr>
+          <a:xfrm>
+            <a:off x="640080" y="3977640"/>
+            <a:ext cx="10908792" cy="457200"/>
+          </a:xfrm>
+          <a:prstGeom prst="rect">
+            <a:avLst/>
+          </a:prstGeom>
+          <a:noFill/>
+        </p:spPr>
+        <p:txBody>
+          <a:bodyPr wrap="square">
+            <a:spAutoFit/>
+          </a:bodyPr>
+          <a:lstStyle/>
+          <a:p>
+            <a:pPr algn="ctr">
+              <a:defRPr sz="1100" b="0">
+                <a:solidFill>
+                  <a:srgbClr val="8C8C9A"/>
+                </a:solidFill>
+                <a:latin typeface="맑은 고딕"/>
+              </a:defRPr>
+            </a:pPr>
+            <a:r>
+              <a:t>이 파일명으로 저장 후 스크립트를 다시 실행하면 자동 삽입됩니다</a:t>
+            </a:r>
+          </a:p>
+        </p:txBody>
+      </p:sp>
+      <p:sp>
+        <p:nvSpPr>
+          <p:cNvPr id="10" name="TextBox 9"/>
+          <p:cNvSpPr txBox="1"/>
+          <p:nvPr/>
+        </p:nvSpPr>
+        <p:spPr>
+          <a:xfrm>
+            <a:off x="640080" y="6144768"/>
+            <a:ext cx="10908792" cy="502920"/>
+          </a:xfrm>
+          <a:prstGeom prst="rect">
+            <a:avLst/>
+          </a:prstGeom>
+          <a:noFill/>
+        </p:spPr>
+        <p:txBody>
+          <a:bodyPr wrap="square">
+            <a:spAutoFit/>
+          </a:bodyPr>
+          <a:lstStyle/>
+          <a:p>
+            <a:pPr algn="l">
+              <a:defRPr sz="1300" b="0">
+                <a:solidFill>
+                  <a:srgbClr val="5A5A6E"/>
+                </a:solidFill>
+                <a:latin typeface="맑은 고딕"/>
+              </a:defRPr>
+            </a:pPr>
+            <a:r>
+              <a:t>자체 인증(NextAuth) 로그인 화면</a:t>
+            </a:r>
+          </a:p>
+        </p:txBody>
+      </p:sp>
+      <p:sp>
+        <p:nvSpPr>
+          <p:cNvPr id="11" name="TextBox 10"/>
+          <p:cNvSpPr txBox="1"/>
+          <p:nvPr/>
+        </p:nvSpPr>
+        <p:spPr>
+          <a:xfrm>
+            <a:off x="10972800" y="6492240"/>
+            <a:ext cx="914400" cy="274320"/>
+          </a:xfrm>
+          <a:prstGeom prst="rect">
+            <a:avLst/>
+          </a:prstGeom>
+          <a:noFill/>
+        </p:spPr>
+        <p:txBody>
+          <a:bodyPr wrap="square">
+            <a:spAutoFit/>
+          </a:bodyPr>
+          <a:lstStyle/>
+          <a:p>
+            <a:pPr algn="r">
+              <a:defRPr sz="1000" b="0">
+                <a:solidFill>
+                  <a:srgbClr val="8C8C9A"/>
+                </a:solidFill>
+                <a:latin typeface="맑은 고딕"/>
+              </a:defRPr>
+            </a:pPr>
+            <a:r>
+              <a:t>29</a:t>
+            </a:r>
+          </a:p>
+        </p:txBody>
+      </p:sp>
+    </p:spTree>
+  </p:cSld>
+  <p:clrMapOvr>
+    <a:masterClrMapping/>
+  </p:clrMapOvr>
+</p:sld>
+</file>
+
 <file path=ppt/slides/slide3.xml><?xml version="1.0" encoding="utf-8"?>
 <p:sld xmlns:a="http://schemas.openxmlformats.org/drawingml/2006/main" xmlns:p="http://schemas.openxmlformats.org/presentationml/2006/main" xmlns:r="http://schemas.openxmlformats.org/officeDocument/2006/relationships">
   <p:cSld>
@@ -13294,6 +14034,4306 @@
           <a:lstStyle/>
           <a:p>
             <a:pPr algn="ctr"/>
+          </a:p>
+        </p:txBody>
+      </p:sp>
+    </p:spTree>
+  </p:cSld>
+  <p:clrMapOvr>
+    <a:masterClrMapping/>
+  </p:clrMapOvr>
+</p:sld>
+</file>
+
+<file path=ppt/slides/slide30.xml><?xml version="1.0" encoding="utf-8"?>
+<p:sld xmlns:a="http://schemas.openxmlformats.org/drawingml/2006/main" xmlns:p="http://schemas.openxmlformats.org/presentationml/2006/main" xmlns:r="http://schemas.openxmlformats.org/officeDocument/2006/relationships">
+  <p:cSld>
+    <p:bg>
+      <p:bgPr>
+        <a:solidFill>
+          <a:srgbClr val="FFFFFF"/>
+        </a:solidFill>
+        <a:effectLst/>
+      </p:bgPr>
+    </p:bg>
+    <p:spTree>
+      <p:nvGrpSpPr>
+        <p:cNvPr id="1" name=""/>
+        <p:cNvGrpSpPr/>
+        <p:nvPr/>
+      </p:nvGrpSpPr>
+      <p:grpSpPr/>
+      <p:sp>
+        <p:nvSpPr>
+          <p:cNvPr id="2" name="Rectangle 1"/>
+          <p:cNvSpPr/>
+          <p:nvPr/>
+        </p:nvSpPr>
+        <p:spPr>
+          <a:xfrm>
+            <a:off x="0" y="0"/>
+            <a:ext cx="12191695" cy="45720"/>
+          </a:xfrm>
+          <a:prstGeom prst="rect">
+            <a:avLst/>
+          </a:prstGeom>
+          <a:solidFill>
+            <a:srgbClr val="0070C0"/>
+          </a:solidFill>
+          <a:ln>
+            <a:noFill/>
+          </a:ln>
+          <a:effectLst/>
+        </p:spPr>
+        <p:style>
+          <a:lnRef idx="1">
+            <a:schemeClr val="accent1"/>
+          </a:lnRef>
+          <a:fillRef idx="3">
+            <a:schemeClr val="accent1"/>
+          </a:fillRef>
+          <a:effectRef idx="2">
+            <a:schemeClr val="accent1"/>
+          </a:effectRef>
+          <a:fontRef idx="minor">
+            <a:schemeClr val="lt1"/>
+          </a:fontRef>
+        </p:style>
+        <p:txBody>
+          <a:bodyPr rtlCol="0" anchor="ctr"/>
+          <a:lstStyle/>
+          <a:p>
+            <a:pPr algn="ctr"/>
+          </a:p>
+        </p:txBody>
+      </p:sp>
+      <p:sp>
+        <p:nvSpPr>
+          <p:cNvPr id="3" name="Rounded Rectangle 2"/>
+          <p:cNvSpPr/>
+          <p:nvPr/>
+        </p:nvSpPr>
+        <p:spPr>
+          <a:xfrm>
+            <a:off x="548640" y="256032"/>
+            <a:ext cx="685800" cy="457200"/>
+          </a:xfrm>
+          <a:prstGeom prst="roundRect">
+            <a:avLst/>
+          </a:prstGeom>
+          <a:solidFill>
+            <a:srgbClr val="0070C0"/>
+          </a:solidFill>
+          <a:ln>
+            <a:noFill/>
+          </a:ln>
+          <a:effectLst/>
+        </p:spPr>
+        <p:style>
+          <a:lnRef idx="1">
+            <a:schemeClr val="accent1"/>
+          </a:lnRef>
+          <a:fillRef idx="3">
+            <a:schemeClr val="accent1"/>
+          </a:fillRef>
+          <a:effectRef idx="2">
+            <a:schemeClr val="accent1"/>
+          </a:effectRef>
+          <a:fontRef idx="minor">
+            <a:schemeClr val="lt1"/>
+          </a:fontRef>
+        </p:style>
+        <p:txBody>
+          <a:bodyPr rtlCol="0" anchor="ctr"/>
+          <a:lstStyle/>
+          <a:p>
+            <a:pPr algn="ctr">
+              <a:defRPr sz="1400" b="1">
+                <a:solidFill>
+                  <a:srgbClr val="FFFFFF"/>
+                </a:solidFill>
+                <a:latin typeface="맑은 고딕"/>
+              </a:defRPr>
+            </a:pPr>
+            <a:r>
+              <a:t>A02</a:t>
+            </a:r>
+          </a:p>
+        </p:txBody>
+      </p:sp>
+      <p:sp>
+        <p:nvSpPr>
+          <p:cNvPr id="4" name="TextBox 3"/>
+          <p:cNvSpPr txBox="1"/>
+          <p:nvPr/>
+        </p:nvSpPr>
+        <p:spPr>
+          <a:xfrm>
+            <a:off x="1371600" y="274320"/>
+            <a:ext cx="10241280" cy="548640"/>
+          </a:xfrm>
+          <a:prstGeom prst="rect">
+            <a:avLst/>
+          </a:prstGeom>
+          <a:noFill/>
+        </p:spPr>
+        <p:txBody>
+          <a:bodyPr wrap="square">
+            <a:spAutoFit/>
+          </a:bodyPr>
+          <a:lstStyle/>
+          <a:p>
+            <a:pPr algn="l">
+              <a:defRPr sz="2200" b="1">
+                <a:solidFill>
+                  <a:srgbClr val="1F1F1F"/>
+                </a:solidFill>
+                <a:latin typeface="맑은 고딕"/>
+              </a:defRPr>
+            </a:pPr>
+            <a:r>
+              <a:t>대시보드 — 전체</a:t>
+            </a:r>
+          </a:p>
+        </p:txBody>
+      </p:sp>
+      <p:sp>
+        <p:nvSpPr>
+          <p:cNvPr id="5" name="Rectangle 4"/>
+          <p:cNvSpPr/>
+          <p:nvPr/>
+        </p:nvSpPr>
+        <p:spPr>
+          <a:xfrm>
+            <a:off x="548640" y="841248"/>
+            <a:ext cx="1828800" cy="27432"/>
+          </a:xfrm>
+          <a:prstGeom prst="rect">
+            <a:avLst/>
+          </a:prstGeom>
+          <a:solidFill>
+            <a:srgbClr val="0070C0"/>
+          </a:solidFill>
+          <a:ln>
+            <a:noFill/>
+          </a:ln>
+          <a:effectLst/>
+        </p:spPr>
+        <p:style>
+          <a:lnRef idx="1">
+            <a:schemeClr val="accent1"/>
+          </a:lnRef>
+          <a:fillRef idx="3">
+            <a:schemeClr val="accent1"/>
+          </a:fillRef>
+          <a:effectRef idx="2">
+            <a:schemeClr val="accent1"/>
+          </a:effectRef>
+          <a:fontRef idx="minor">
+            <a:schemeClr val="lt1"/>
+          </a:fontRef>
+        </p:style>
+        <p:txBody>
+          <a:bodyPr rtlCol="0" anchor="ctr"/>
+          <a:lstStyle/>
+          <a:p>
+            <a:pPr algn="ctr"/>
+          </a:p>
+        </p:txBody>
+      </p:sp>
+      <p:sp>
+        <p:nvSpPr>
+          <p:cNvPr id="6" name="Rounded Rectangle 5"/>
+          <p:cNvSpPr/>
+          <p:nvPr/>
+        </p:nvSpPr>
+        <p:spPr>
+          <a:xfrm>
+            <a:off x="640080" y="1097280"/>
+            <a:ext cx="10908792" cy="4892040"/>
+          </a:xfrm>
+          <a:prstGeom prst="roundRect">
+            <a:avLst/>
+          </a:prstGeom>
+          <a:solidFill>
+            <a:srgbClr val="F8F9FB"/>
+          </a:solidFill>
+          <a:ln w="15240">
+            <a:solidFill>
+              <a:srgbClr val="0070C0"/>
+            </a:solidFill>
+          </a:ln>
+          <a:effectLst/>
+        </p:spPr>
+        <p:style>
+          <a:lnRef idx="1">
+            <a:schemeClr val="accent1"/>
+          </a:lnRef>
+          <a:fillRef idx="3">
+            <a:schemeClr val="accent1"/>
+          </a:fillRef>
+          <a:effectRef idx="2">
+            <a:schemeClr val="accent1"/>
+          </a:effectRef>
+          <a:fontRef idx="minor">
+            <a:schemeClr val="lt1"/>
+          </a:fontRef>
+        </p:style>
+        <p:txBody>
+          <a:bodyPr rtlCol="0" anchor="ctr"/>
+          <a:lstStyle/>
+          <a:p>
+            <a:pPr algn="ctr"/>
+          </a:p>
+        </p:txBody>
+      </p:sp>
+      <p:sp>
+        <p:nvSpPr>
+          <p:cNvPr id="7" name="TextBox 6"/>
+          <p:cNvSpPr txBox="1"/>
+          <p:nvPr/>
+        </p:nvSpPr>
+        <p:spPr>
+          <a:xfrm>
+            <a:off x="640080" y="2834640"/>
+            <a:ext cx="10908792" cy="548640"/>
+          </a:xfrm>
+          <a:prstGeom prst="rect">
+            <a:avLst/>
+          </a:prstGeom>
+          <a:noFill/>
+        </p:spPr>
+        <p:txBody>
+          <a:bodyPr wrap="square">
+            <a:spAutoFit/>
+          </a:bodyPr>
+          <a:lstStyle/>
+          <a:p>
+            <a:pPr algn="ctr">
+              <a:defRPr sz="2000" b="1">
+                <a:solidFill>
+                  <a:srgbClr val="8C8C9A"/>
+                </a:solidFill>
+                <a:latin typeface="맑은 고딕"/>
+              </a:defRPr>
+            </a:pPr>
+            <a:r>
+              <a:t>🖼  화면 캡처 위치</a:t>
+            </a:r>
+          </a:p>
+        </p:txBody>
+      </p:sp>
+      <p:sp>
+        <p:nvSpPr>
+          <p:cNvPr id="8" name="TextBox 7"/>
+          <p:cNvSpPr txBox="1"/>
+          <p:nvPr/>
+        </p:nvSpPr>
+        <p:spPr>
+          <a:xfrm>
+            <a:off x="640080" y="3474720"/>
+            <a:ext cx="10908792" cy="457200"/>
+          </a:xfrm>
+          <a:prstGeom prst="rect">
+            <a:avLst/>
+          </a:prstGeom>
+          <a:noFill/>
+        </p:spPr>
+        <p:txBody>
+          <a:bodyPr wrap="square">
+            <a:spAutoFit/>
+          </a:bodyPr>
+          <a:lstStyle/>
+          <a:p>
+            <a:pPr algn="ctr">
+              <a:defRPr sz="1300" b="0">
+                <a:solidFill>
+                  <a:srgbClr val="0070C0"/>
+                </a:solidFill>
+                <a:latin typeface="Consolas"/>
+              </a:defRPr>
+            </a:pPr>
+            <a:r>
+              <a:t>docs/images/dashboard-overview.png</a:t>
+            </a:r>
+          </a:p>
+        </p:txBody>
+      </p:sp>
+      <p:sp>
+        <p:nvSpPr>
+          <p:cNvPr id="9" name="TextBox 8"/>
+          <p:cNvSpPr txBox="1"/>
+          <p:nvPr/>
+        </p:nvSpPr>
+        <p:spPr>
+          <a:xfrm>
+            <a:off x="640080" y="3977640"/>
+            <a:ext cx="10908792" cy="457200"/>
+          </a:xfrm>
+          <a:prstGeom prst="rect">
+            <a:avLst/>
+          </a:prstGeom>
+          <a:noFill/>
+        </p:spPr>
+        <p:txBody>
+          <a:bodyPr wrap="square">
+            <a:spAutoFit/>
+          </a:bodyPr>
+          <a:lstStyle/>
+          <a:p>
+            <a:pPr algn="ctr">
+              <a:defRPr sz="1100" b="0">
+                <a:solidFill>
+                  <a:srgbClr val="8C8C9A"/>
+                </a:solidFill>
+                <a:latin typeface="맑은 고딕"/>
+              </a:defRPr>
+            </a:pPr>
+            <a:r>
+              <a:t>이 파일명으로 저장 후 스크립트를 다시 실행하면 자동 삽입됩니다</a:t>
+            </a:r>
+          </a:p>
+        </p:txBody>
+      </p:sp>
+      <p:sp>
+        <p:nvSpPr>
+          <p:cNvPr id="10" name="TextBox 9"/>
+          <p:cNvSpPr txBox="1"/>
+          <p:nvPr/>
+        </p:nvSpPr>
+        <p:spPr>
+          <a:xfrm>
+            <a:off x="640080" y="6144768"/>
+            <a:ext cx="10908792" cy="502920"/>
+          </a:xfrm>
+          <a:prstGeom prst="rect">
+            <a:avLst/>
+          </a:prstGeom>
+          <a:noFill/>
+        </p:spPr>
+        <p:txBody>
+          <a:bodyPr wrap="square">
+            <a:spAutoFit/>
+          </a:bodyPr>
+          <a:lstStyle/>
+          <a:p>
+            <a:pPr algn="l">
+              <a:defRPr sz="1300" b="0">
+                <a:solidFill>
+                  <a:srgbClr val="5A5A6E"/>
+                </a:solidFill>
+                <a:latin typeface="맑은 고딕"/>
+              </a:defRPr>
+            </a:pPr>
+            <a:r>
+              <a:t>서버 현황·전력/PUE·알림·파일시스템 경고를 한 화면에</a:t>
+            </a:r>
+          </a:p>
+        </p:txBody>
+      </p:sp>
+      <p:sp>
+        <p:nvSpPr>
+          <p:cNvPr id="11" name="TextBox 10"/>
+          <p:cNvSpPr txBox="1"/>
+          <p:nvPr/>
+        </p:nvSpPr>
+        <p:spPr>
+          <a:xfrm>
+            <a:off x="10972800" y="6492240"/>
+            <a:ext cx="914400" cy="274320"/>
+          </a:xfrm>
+          <a:prstGeom prst="rect">
+            <a:avLst/>
+          </a:prstGeom>
+          <a:noFill/>
+        </p:spPr>
+        <p:txBody>
+          <a:bodyPr wrap="square">
+            <a:spAutoFit/>
+          </a:bodyPr>
+          <a:lstStyle/>
+          <a:p>
+            <a:pPr algn="r">
+              <a:defRPr sz="1000" b="0">
+                <a:solidFill>
+                  <a:srgbClr val="8C8C9A"/>
+                </a:solidFill>
+                <a:latin typeface="맑은 고딕"/>
+              </a:defRPr>
+            </a:pPr>
+            <a:r>
+              <a:t>30</a:t>
+            </a:r>
+          </a:p>
+        </p:txBody>
+      </p:sp>
+    </p:spTree>
+  </p:cSld>
+  <p:clrMapOvr>
+    <a:masterClrMapping/>
+  </p:clrMapOvr>
+</p:sld>
+</file>
+
+<file path=ppt/slides/slide31.xml><?xml version="1.0" encoding="utf-8"?>
+<p:sld xmlns:a="http://schemas.openxmlformats.org/drawingml/2006/main" xmlns:p="http://schemas.openxmlformats.org/presentationml/2006/main" xmlns:r="http://schemas.openxmlformats.org/officeDocument/2006/relationships">
+  <p:cSld>
+    <p:bg>
+      <p:bgPr>
+        <a:solidFill>
+          <a:srgbClr val="FFFFFF"/>
+        </a:solidFill>
+        <a:effectLst/>
+      </p:bgPr>
+    </p:bg>
+    <p:spTree>
+      <p:nvGrpSpPr>
+        <p:cNvPr id="1" name=""/>
+        <p:cNvGrpSpPr/>
+        <p:nvPr/>
+      </p:nvGrpSpPr>
+      <p:grpSpPr/>
+      <p:sp>
+        <p:nvSpPr>
+          <p:cNvPr id="2" name="Rectangle 1"/>
+          <p:cNvSpPr/>
+          <p:nvPr/>
+        </p:nvSpPr>
+        <p:spPr>
+          <a:xfrm>
+            <a:off x="0" y="0"/>
+            <a:ext cx="12191695" cy="45720"/>
+          </a:xfrm>
+          <a:prstGeom prst="rect">
+            <a:avLst/>
+          </a:prstGeom>
+          <a:solidFill>
+            <a:srgbClr val="0070C0"/>
+          </a:solidFill>
+          <a:ln>
+            <a:noFill/>
+          </a:ln>
+          <a:effectLst/>
+        </p:spPr>
+        <p:style>
+          <a:lnRef idx="1">
+            <a:schemeClr val="accent1"/>
+          </a:lnRef>
+          <a:fillRef idx="3">
+            <a:schemeClr val="accent1"/>
+          </a:fillRef>
+          <a:effectRef idx="2">
+            <a:schemeClr val="accent1"/>
+          </a:effectRef>
+          <a:fontRef idx="minor">
+            <a:schemeClr val="lt1"/>
+          </a:fontRef>
+        </p:style>
+        <p:txBody>
+          <a:bodyPr rtlCol="0" anchor="ctr"/>
+          <a:lstStyle/>
+          <a:p>
+            <a:pPr algn="ctr"/>
+          </a:p>
+        </p:txBody>
+      </p:sp>
+      <p:sp>
+        <p:nvSpPr>
+          <p:cNvPr id="3" name="Rounded Rectangle 2"/>
+          <p:cNvSpPr/>
+          <p:nvPr/>
+        </p:nvSpPr>
+        <p:spPr>
+          <a:xfrm>
+            <a:off x="548640" y="256032"/>
+            <a:ext cx="685800" cy="457200"/>
+          </a:xfrm>
+          <a:prstGeom prst="roundRect">
+            <a:avLst/>
+          </a:prstGeom>
+          <a:solidFill>
+            <a:srgbClr val="0070C0"/>
+          </a:solidFill>
+          <a:ln>
+            <a:noFill/>
+          </a:ln>
+          <a:effectLst/>
+        </p:spPr>
+        <p:style>
+          <a:lnRef idx="1">
+            <a:schemeClr val="accent1"/>
+          </a:lnRef>
+          <a:fillRef idx="3">
+            <a:schemeClr val="accent1"/>
+          </a:fillRef>
+          <a:effectRef idx="2">
+            <a:schemeClr val="accent1"/>
+          </a:effectRef>
+          <a:fontRef idx="minor">
+            <a:schemeClr val="lt1"/>
+          </a:fontRef>
+        </p:style>
+        <p:txBody>
+          <a:bodyPr rtlCol="0" anchor="ctr"/>
+          <a:lstStyle/>
+          <a:p>
+            <a:pPr algn="ctr">
+              <a:defRPr sz="1400" b="1">
+                <a:solidFill>
+                  <a:srgbClr val="FFFFFF"/>
+                </a:solidFill>
+                <a:latin typeface="맑은 고딕"/>
+              </a:defRPr>
+            </a:pPr>
+            <a:r>
+              <a:t>A03</a:t>
+            </a:r>
+          </a:p>
+        </p:txBody>
+      </p:sp>
+      <p:sp>
+        <p:nvSpPr>
+          <p:cNvPr id="4" name="TextBox 3"/>
+          <p:cNvSpPr txBox="1"/>
+          <p:nvPr/>
+        </p:nvSpPr>
+        <p:spPr>
+          <a:xfrm>
+            <a:off x="1371600" y="274320"/>
+            <a:ext cx="10241280" cy="548640"/>
+          </a:xfrm>
+          <a:prstGeom prst="rect">
+            <a:avLst/>
+          </a:prstGeom>
+          <a:noFill/>
+        </p:spPr>
+        <p:txBody>
+          <a:bodyPr wrap="square">
+            <a:spAutoFit/>
+          </a:bodyPr>
+          <a:lstStyle/>
+          <a:p>
+            <a:pPr algn="l">
+              <a:defRPr sz="2200" b="1">
+                <a:solidFill>
+                  <a:srgbClr val="1F1F1F"/>
+                </a:solidFill>
+                <a:latin typeface="맑은 고딕"/>
+              </a:defRPr>
+            </a:pPr>
+            <a:r>
+              <a:t>대시보드 — 파일시스템 경고</a:t>
+            </a:r>
+          </a:p>
+        </p:txBody>
+      </p:sp>
+      <p:sp>
+        <p:nvSpPr>
+          <p:cNvPr id="5" name="Rectangle 4"/>
+          <p:cNvSpPr/>
+          <p:nvPr/>
+        </p:nvSpPr>
+        <p:spPr>
+          <a:xfrm>
+            <a:off x="548640" y="841248"/>
+            <a:ext cx="1828800" cy="27432"/>
+          </a:xfrm>
+          <a:prstGeom prst="rect">
+            <a:avLst/>
+          </a:prstGeom>
+          <a:solidFill>
+            <a:srgbClr val="0070C0"/>
+          </a:solidFill>
+          <a:ln>
+            <a:noFill/>
+          </a:ln>
+          <a:effectLst/>
+        </p:spPr>
+        <p:style>
+          <a:lnRef idx="1">
+            <a:schemeClr val="accent1"/>
+          </a:lnRef>
+          <a:fillRef idx="3">
+            <a:schemeClr val="accent1"/>
+          </a:fillRef>
+          <a:effectRef idx="2">
+            <a:schemeClr val="accent1"/>
+          </a:effectRef>
+          <a:fontRef idx="minor">
+            <a:schemeClr val="lt1"/>
+          </a:fontRef>
+        </p:style>
+        <p:txBody>
+          <a:bodyPr rtlCol="0" anchor="ctr"/>
+          <a:lstStyle/>
+          <a:p>
+            <a:pPr algn="ctr"/>
+          </a:p>
+        </p:txBody>
+      </p:sp>
+      <p:sp>
+        <p:nvSpPr>
+          <p:cNvPr id="6" name="Rounded Rectangle 5"/>
+          <p:cNvSpPr/>
+          <p:nvPr/>
+        </p:nvSpPr>
+        <p:spPr>
+          <a:xfrm>
+            <a:off x="640080" y="1097280"/>
+            <a:ext cx="10908792" cy="4892040"/>
+          </a:xfrm>
+          <a:prstGeom prst="roundRect">
+            <a:avLst/>
+          </a:prstGeom>
+          <a:solidFill>
+            <a:srgbClr val="F8F9FB"/>
+          </a:solidFill>
+          <a:ln w="15240">
+            <a:solidFill>
+              <a:srgbClr val="0070C0"/>
+            </a:solidFill>
+          </a:ln>
+          <a:effectLst/>
+        </p:spPr>
+        <p:style>
+          <a:lnRef idx="1">
+            <a:schemeClr val="accent1"/>
+          </a:lnRef>
+          <a:fillRef idx="3">
+            <a:schemeClr val="accent1"/>
+          </a:fillRef>
+          <a:effectRef idx="2">
+            <a:schemeClr val="accent1"/>
+          </a:effectRef>
+          <a:fontRef idx="minor">
+            <a:schemeClr val="lt1"/>
+          </a:fontRef>
+        </p:style>
+        <p:txBody>
+          <a:bodyPr rtlCol="0" anchor="ctr"/>
+          <a:lstStyle/>
+          <a:p>
+            <a:pPr algn="ctr"/>
+          </a:p>
+        </p:txBody>
+      </p:sp>
+      <p:sp>
+        <p:nvSpPr>
+          <p:cNvPr id="7" name="TextBox 6"/>
+          <p:cNvSpPr txBox="1"/>
+          <p:nvPr/>
+        </p:nvSpPr>
+        <p:spPr>
+          <a:xfrm>
+            <a:off x="640080" y="2834640"/>
+            <a:ext cx="10908792" cy="548640"/>
+          </a:xfrm>
+          <a:prstGeom prst="rect">
+            <a:avLst/>
+          </a:prstGeom>
+          <a:noFill/>
+        </p:spPr>
+        <p:txBody>
+          <a:bodyPr wrap="square">
+            <a:spAutoFit/>
+          </a:bodyPr>
+          <a:lstStyle/>
+          <a:p>
+            <a:pPr algn="ctr">
+              <a:defRPr sz="2000" b="1">
+                <a:solidFill>
+                  <a:srgbClr val="8C8C9A"/>
+                </a:solidFill>
+                <a:latin typeface="맑은 고딕"/>
+              </a:defRPr>
+            </a:pPr>
+            <a:r>
+              <a:t>🖼  화면 캡처 위치</a:t>
+            </a:r>
+          </a:p>
+        </p:txBody>
+      </p:sp>
+      <p:sp>
+        <p:nvSpPr>
+          <p:cNvPr id="8" name="TextBox 7"/>
+          <p:cNvSpPr txBox="1"/>
+          <p:nvPr/>
+        </p:nvSpPr>
+        <p:spPr>
+          <a:xfrm>
+            <a:off x="640080" y="3474720"/>
+            <a:ext cx="10908792" cy="457200"/>
+          </a:xfrm>
+          <a:prstGeom prst="rect">
+            <a:avLst/>
+          </a:prstGeom>
+          <a:noFill/>
+        </p:spPr>
+        <p:txBody>
+          <a:bodyPr wrap="square">
+            <a:spAutoFit/>
+          </a:bodyPr>
+          <a:lstStyle/>
+          <a:p>
+            <a:pPr algn="ctr">
+              <a:defRPr sz="1300" b="0">
+                <a:solidFill>
+                  <a:srgbClr val="0070C0"/>
+                </a:solidFill>
+                <a:latin typeface="Consolas"/>
+              </a:defRPr>
+            </a:pPr>
+            <a:r>
+              <a:t>docs/images/dashboard-filesystem-warning.png</a:t>
+            </a:r>
+          </a:p>
+        </p:txBody>
+      </p:sp>
+      <p:sp>
+        <p:nvSpPr>
+          <p:cNvPr id="9" name="TextBox 8"/>
+          <p:cNvSpPr txBox="1"/>
+          <p:nvPr/>
+        </p:nvSpPr>
+        <p:spPr>
+          <a:xfrm>
+            <a:off x="640080" y="3977640"/>
+            <a:ext cx="10908792" cy="457200"/>
+          </a:xfrm>
+          <a:prstGeom prst="rect">
+            <a:avLst/>
+          </a:prstGeom>
+          <a:noFill/>
+        </p:spPr>
+        <p:txBody>
+          <a:bodyPr wrap="square">
+            <a:spAutoFit/>
+          </a:bodyPr>
+          <a:lstStyle/>
+          <a:p>
+            <a:pPr algn="ctr">
+              <a:defRPr sz="1100" b="0">
+                <a:solidFill>
+                  <a:srgbClr val="8C8C9A"/>
+                </a:solidFill>
+                <a:latin typeface="맑은 고딕"/>
+              </a:defRPr>
+            </a:pPr>
+            <a:r>
+              <a:t>이 파일명으로 저장 후 스크립트를 다시 실행하면 자동 삽입됩니다</a:t>
+            </a:r>
+          </a:p>
+        </p:txBody>
+      </p:sp>
+      <p:sp>
+        <p:nvSpPr>
+          <p:cNvPr id="10" name="TextBox 9"/>
+          <p:cNvSpPr txBox="1"/>
+          <p:nvPr/>
+        </p:nvSpPr>
+        <p:spPr>
+          <a:xfrm>
+            <a:off x="640080" y="6144768"/>
+            <a:ext cx="10908792" cy="502920"/>
+          </a:xfrm>
+          <a:prstGeom prst="rect">
+            <a:avLst/>
+          </a:prstGeom>
+          <a:noFill/>
+        </p:spPr>
+        <p:txBody>
+          <a:bodyPr wrap="square">
+            <a:spAutoFit/>
+          </a:bodyPr>
+          <a:lstStyle/>
+          <a:p>
+            <a:pPr algn="l">
+              <a:defRPr sz="1300" b="0">
+                <a:solidFill>
+                  <a:srgbClr val="5A5A6E"/>
+                </a:solidFill>
+                <a:latin typeface="맑은 고딕"/>
+              </a:defRPr>
+            </a:pPr>
+            <a:r>
+              <a:t>사용률 70%+ 서버를 서버 단위로 집계·표시</a:t>
+            </a:r>
+          </a:p>
+        </p:txBody>
+      </p:sp>
+      <p:sp>
+        <p:nvSpPr>
+          <p:cNvPr id="11" name="TextBox 10"/>
+          <p:cNvSpPr txBox="1"/>
+          <p:nvPr/>
+        </p:nvSpPr>
+        <p:spPr>
+          <a:xfrm>
+            <a:off x="10972800" y="6492240"/>
+            <a:ext cx="914400" cy="274320"/>
+          </a:xfrm>
+          <a:prstGeom prst="rect">
+            <a:avLst/>
+          </a:prstGeom>
+          <a:noFill/>
+        </p:spPr>
+        <p:txBody>
+          <a:bodyPr wrap="square">
+            <a:spAutoFit/>
+          </a:bodyPr>
+          <a:lstStyle/>
+          <a:p>
+            <a:pPr algn="r">
+              <a:defRPr sz="1000" b="0">
+                <a:solidFill>
+                  <a:srgbClr val="8C8C9A"/>
+                </a:solidFill>
+                <a:latin typeface="맑은 고딕"/>
+              </a:defRPr>
+            </a:pPr>
+            <a:r>
+              <a:t>31</a:t>
+            </a:r>
+          </a:p>
+        </p:txBody>
+      </p:sp>
+    </p:spTree>
+  </p:cSld>
+  <p:clrMapOvr>
+    <a:masterClrMapping/>
+  </p:clrMapOvr>
+</p:sld>
+</file>
+
+<file path=ppt/slides/slide32.xml><?xml version="1.0" encoding="utf-8"?>
+<p:sld xmlns:a="http://schemas.openxmlformats.org/drawingml/2006/main" xmlns:p="http://schemas.openxmlformats.org/presentationml/2006/main" xmlns:r="http://schemas.openxmlformats.org/officeDocument/2006/relationships">
+  <p:cSld>
+    <p:bg>
+      <p:bgPr>
+        <a:solidFill>
+          <a:srgbClr val="FFFFFF"/>
+        </a:solidFill>
+        <a:effectLst/>
+      </p:bgPr>
+    </p:bg>
+    <p:spTree>
+      <p:nvGrpSpPr>
+        <p:cNvPr id="1" name=""/>
+        <p:cNvGrpSpPr/>
+        <p:nvPr/>
+      </p:nvGrpSpPr>
+      <p:grpSpPr/>
+      <p:sp>
+        <p:nvSpPr>
+          <p:cNvPr id="2" name="Rectangle 1"/>
+          <p:cNvSpPr/>
+          <p:nvPr/>
+        </p:nvSpPr>
+        <p:spPr>
+          <a:xfrm>
+            <a:off x="0" y="0"/>
+            <a:ext cx="12191695" cy="45720"/>
+          </a:xfrm>
+          <a:prstGeom prst="rect">
+            <a:avLst/>
+          </a:prstGeom>
+          <a:solidFill>
+            <a:srgbClr val="0070C0"/>
+          </a:solidFill>
+          <a:ln>
+            <a:noFill/>
+          </a:ln>
+          <a:effectLst/>
+        </p:spPr>
+        <p:style>
+          <a:lnRef idx="1">
+            <a:schemeClr val="accent1"/>
+          </a:lnRef>
+          <a:fillRef idx="3">
+            <a:schemeClr val="accent1"/>
+          </a:fillRef>
+          <a:effectRef idx="2">
+            <a:schemeClr val="accent1"/>
+          </a:effectRef>
+          <a:fontRef idx="minor">
+            <a:schemeClr val="lt1"/>
+          </a:fontRef>
+        </p:style>
+        <p:txBody>
+          <a:bodyPr rtlCol="0" anchor="ctr"/>
+          <a:lstStyle/>
+          <a:p>
+            <a:pPr algn="ctr"/>
+          </a:p>
+        </p:txBody>
+      </p:sp>
+      <p:sp>
+        <p:nvSpPr>
+          <p:cNvPr id="3" name="Rounded Rectangle 2"/>
+          <p:cNvSpPr/>
+          <p:nvPr/>
+        </p:nvSpPr>
+        <p:spPr>
+          <a:xfrm>
+            <a:off x="548640" y="256032"/>
+            <a:ext cx="685800" cy="457200"/>
+          </a:xfrm>
+          <a:prstGeom prst="roundRect">
+            <a:avLst/>
+          </a:prstGeom>
+          <a:solidFill>
+            <a:srgbClr val="0070C0"/>
+          </a:solidFill>
+          <a:ln>
+            <a:noFill/>
+          </a:ln>
+          <a:effectLst/>
+        </p:spPr>
+        <p:style>
+          <a:lnRef idx="1">
+            <a:schemeClr val="accent1"/>
+          </a:lnRef>
+          <a:fillRef idx="3">
+            <a:schemeClr val="accent1"/>
+          </a:fillRef>
+          <a:effectRef idx="2">
+            <a:schemeClr val="accent1"/>
+          </a:effectRef>
+          <a:fontRef idx="minor">
+            <a:schemeClr val="lt1"/>
+          </a:fontRef>
+        </p:style>
+        <p:txBody>
+          <a:bodyPr rtlCol="0" anchor="ctr"/>
+          <a:lstStyle/>
+          <a:p>
+            <a:pPr algn="ctr">
+              <a:defRPr sz="1400" b="1">
+                <a:solidFill>
+                  <a:srgbClr val="FFFFFF"/>
+                </a:solidFill>
+                <a:latin typeface="맑은 고딕"/>
+              </a:defRPr>
+            </a:pPr>
+            <a:r>
+              <a:t>A04</a:t>
+            </a:r>
+          </a:p>
+        </p:txBody>
+      </p:sp>
+      <p:sp>
+        <p:nvSpPr>
+          <p:cNvPr id="4" name="TextBox 3"/>
+          <p:cNvSpPr txBox="1"/>
+          <p:nvPr/>
+        </p:nvSpPr>
+        <p:spPr>
+          <a:xfrm>
+            <a:off x="1371600" y="274320"/>
+            <a:ext cx="10241280" cy="548640"/>
+          </a:xfrm>
+          <a:prstGeom prst="rect">
+            <a:avLst/>
+          </a:prstGeom>
+          <a:noFill/>
+        </p:spPr>
+        <p:txBody>
+          <a:bodyPr wrap="square">
+            <a:spAutoFit/>
+          </a:bodyPr>
+          <a:lstStyle/>
+          <a:p>
+            <a:pPr algn="l">
+              <a:defRPr sz="2200" b="1">
+                <a:solidFill>
+                  <a:srgbClr val="1F1F1F"/>
+                </a:solidFill>
+                <a:latin typeface="맑은 고딕"/>
+              </a:defRPr>
+            </a:pPr>
+            <a:r>
+              <a:t>서버 모니터링 — 목록</a:t>
+            </a:r>
+          </a:p>
+        </p:txBody>
+      </p:sp>
+      <p:sp>
+        <p:nvSpPr>
+          <p:cNvPr id="5" name="Rectangle 4"/>
+          <p:cNvSpPr/>
+          <p:nvPr/>
+        </p:nvSpPr>
+        <p:spPr>
+          <a:xfrm>
+            <a:off x="548640" y="841248"/>
+            <a:ext cx="1828800" cy="27432"/>
+          </a:xfrm>
+          <a:prstGeom prst="rect">
+            <a:avLst/>
+          </a:prstGeom>
+          <a:solidFill>
+            <a:srgbClr val="0070C0"/>
+          </a:solidFill>
+          <a:ln>
+            <a:noFill/>
+          </a:ln>
+          <a:effectLst/>
+        </p:spPr>
+        <p:style>
+          <a:lnRef idx="1">
+            <a:schemeClr val="accent1"/>
+          </a:lnRef>
+          <a:fillRef idx="3">
+            <a:schemeClr val="accent1"/>
+          </a:fillRef>
+          <a:effectRef idx="2">
+            <a:schemeClr val="accent1"/>
+          </a:effectRef>
+          <a:fontRef idx="minor">
+            <a:schemeClr val="lt1"/>
+          </a:fontRef>
+        </p:style>
+        <p:txBody>
+          <a:bodyPr rtlCol="0" anchor="ctr"/>
+          <a:lstStyle/>
+          <a:p>
+            <a:pPr algn="ctr"/>
+          </a:p>
+        </p:txBody>
+      </p:sp>
+      <p:sp>
+        <p:nvSpPr>
+          <p:cNvPr id="6" name="Rounded Rectangle 5"/>
+          <p:cNvSpPr/>
+          <p:nvPr/>
+        </p:nvSpPr>
+        <p:spPr>
+          <a:xfrm>
+            <a:off x="640080" y="1097280"/>
+            <a:ext cx="10908792" cy="4892040"/>
+          </a:xfrm>
+          <a:prstGeom prst="roundRect">
+            <a:avLst/>
+          </a:prstGeom>
+          <a:solidFill>
+            <a:srgbClr val="F8F9FB"/>
+          </a:solidFill>
+          <a:ln w="15240">
+            <a:solidFill>
+              <a:srgbClr val="0070C0"/>
+            </a:solidFill>
+          </a:ln>
+          <a:effectLst/>
+        </p:spPr>
+        <p:style>
+          <a:lnRef idx="1">
+            <a:schemeClr val="accent1"/>
+          </a:lnRef>
+          <a:fillRef idx="3">
+            <a:schemeClr val="accent1"/>
+          </a:fillRef>
+          <a:effectRef idx="2">
+            <a:schemeClr val="accent1"/>
+          </a:effectRef>
+          <a:fontRef idx="minor">
+            <a:schemeClr val="lt1"/>
+          </a:fontRef>
+        </p:style>
+        <p:txBody>
+          <a:bodyPr rtlCol="0" anchor="ctr"/>
+          <a:lstStyle/>
+          <a:p>
+            <a:pPr algn="ctr"/>
+          </a:p>
+        </p:txBody>
+      </p:sp>
+      <p:sp>
+        <p:nvSpPr>
+          <p:cNvPr id="7" name="TextBox 6"/>
+          <p:cNvSpPr txBox="1"/>
+          <p:nvPr/>
+        </p:nvSpPr>
+        <p:spPr>
+          <a:xfrm>
+            <a:off x="640080" y="2834640"/>
+            <a:ext cx="10908792" cy="548640"/>
+          </a:xfrm>
+          <a:prstGeom prst="rect">
+            <a:avLst/>
+          </a:prstGeom>
+          <a:noFill/>
+        </p:spPr>
+        <p:txBody>
+          <a:bodyPr wrap="square">
+            <a:spAutoFit/>
+          </a:bodyPr>
+          <a:lstStyle/>
+          <a:p>
+            <a:pPr algn="ctr">
+              <a:defRPr sz="2000" b="1">
+                <a:solidFill>
+                  <a:srgbClr val="8C8C9A"/>
+                </a:solidFill>
+                <a:latin typeface="맑은 고딕"/>
+              </a:defRPr>
+            </a:pPr>
+            <a:r>
+              <a:t>🖼  화면 캡처 위치</a:t>
+            </a:r>
+          </a:p>
+        </p:txBody>
+      </p:sp>
+      <p:sp>
+        <p:nvSpPr>
+          <p:cNvPr id="8" name="TextBox 7"/>
+          <p:cNvSpPr txBox="1"/>
+          <p:nvPr/>
+        </p:nvSpPr>
+        <p:spPr>
+          <a:xfrm>
+            <a:off x="640080" y="3474720"/>
+            <a:ext cx="10908792" cy="457200"/>
+          </a:xfrm>
+          <a:prstGeom prst="rect">
+            <a:avLst/>
+          </a:prstGeom>
+          <a:noFill/>
+        </p:spPr>
+        <p:txBody>
+          <a:bodyPr wrap="square">
+            <a:spAutoFit/>
+          </a:bodyPr>
+          <a:lstStyle/>
+          <a:p>
+            <a:pPr algn="ctr">
+              <a:defRPr sz="1300" b="0">
+                <a:solidFill>
+                  <a:srgbClr val="0070C0"/>
+                </a:solidFill>
+                <a:latin typeface="Consolas"/>
+              </a:defRPr>
+            </a:pPr>
+            <a:r>
+              <a:t>docs/images/servers-list.png</a:t>
+            </a:r>
+          </a:p>
+        </p:txBody>
+      </p:sp>
+      <p:sp>
+        <p:nvSpPr>
+          <p:cNvPr id="9" name="TextBox 8"/>
+          <p:cNvSpPr txBox="1"/>
+          <p:nvPr/>
+        </p:nvSpPr>
+        <p:spPr>
+          <a:xfrm>
+            <a:off x="640080" y="3977640"/>
+            <a:ext cx="10908792" cy="457200"/>
+          </a:xfrm>
+          <a:prstGeom prst="rect">
+            <a:avLst/>
+          </a:prstGeom>
+          <a:noFill/>
+        </p:spPr>
+        <p:txBody>
+          <a:bodyPr wrap="square">
+            <a:spAutoFit/>
+          </a:bodyPr>
+          <a:lstStyle/>
+          <a:p>
+            <a:pPr algn="ctr">
+              <a:defRPr sz="1100" b="0">
+                <a:solidFill>
+                  <a:srgbClr val="8C8C9A"/>
+                </a:solidFill>
+                <a:latin typeface="맑은 고딕"/>
+              </a:defRPr>
+            </a:pPr>
+            <a:r>
+              <a:t>이 파일명으로 저장 후 스크립트를 다시 실행하면 자동 삽입됩니다</a:t>
+            </a:r>
+          </a:p>
+        </p:txBody>
+      </p:sp>
+      <p:sp>
+        <p:nvSpPr>
+          <p:cNvPr id="10" name="TextBox 9"/>
+          <p:cNvSpPr txBox="1"/>
+          <p:nvPr/>
+        </p:nvSpPr>
+        <p:spPr>
+          <a:xfrm>
+            <a:off x="640080" y="6144768"/>
+            <a:ext cx="10908792" cy="502920"/>
+          </a:xfrm>
+          <a:prstGeom prst="rect">
+            <a:avLst/>
+          </a:prstGeom>
+          <a:noFill/>
+        </p:spPr>
+        <p:txBody>
+          <a:bodyPr wrap="square">
+            <a:spAutoFit/>
+          </a:bodyPr>
+          <a:lstStyle/>
+          <a:p>
+            <a:pPr algn="l">
+              <a:defRPr sz="1300" b="0">
+                <a:solidFill>
+                  <a:srgbClr val="5A5A6E"/>
+                </a:solidFill>
+                <a:latin typeface="맑은 고딕"/>
+              </a:defRPr>
+            </a:pPr>
+            <a:r>
+              <a:t>전체 서버 목록과 상태</a:t>
+            </a:r>
+          </a:p>
+        </p:txBody>
+      </p:sp>
+      <p:sp>
+        <p:nvSpPr>
+          <p:cNvPr id="11" name="TextBox 10"/>
+          <p:cNvSpPr txBox="1"/>
+          <p:nvPr/>
+        </p:nvSpPr>
+        <p:spPr>
+          <a:xfrm>
+            <a:off x="10972800" y="6492240"/>
+            <a:ext cx="914400" cy="274320"/>
+          </a:xfrm>
+          <a:prstGeom prst="rect">
+            <a:avLst/>
+          </a:prstGeom>
+          <a:noFill/>
+        </p:spPr>
+        <p:txBody>
+          <a:bodyPr wrap="square">
+            <a:spAutoFit/>
+          </a:bodyPr>
+          <a:lstStyle/>
+          <a:p>
+            <a:pPr algn="r">
+              <a:defRPr sz="1000" b="0">
+                <a:solidFill>
+                  <a:srgbClr val="8C8C9A"/>
+                </a:solidFill>
+                <a:latin typeface="맑은 고딕"/>
+              </a:defRPr>
+            </a:pPr>
+            <a:r>
+              <a:t>32</a:t>
+            </a:r>
+          </a:p>
+        </p:txBody>
+      </p:sp>
+    </p:spTree>
+  </p:cSld>
+  <p:clrMapOvr>
+    <a:masterClrMapping/>
+  </p:clrMapOvr>
+</p:sld>
+</file>
+
+<file path=ppt/slides/slide33.xml><?xml version="1.0" encoding="utf-8"?>
+<p:sld xmlns:a="http://schemas.openxmlformats.org/drawingml/2006/main" xmlns:p="http://schemas.openxmlformats.org/presentationml/2006/main" xmlns:r="http://schemas.openxmlformats.org/officeDocument/2006/relationships">
+  <p:cSld>
+    <p:bg>
+      <p:bgPr>
+        <a:solidFill>
+          <a:srgbClr val="FFFFFF"/>
+        </a:solidFill>
+        <a:effectLst/>
+      </p:bgPr>
+    </p:bg>
+    <p:spTree>
+      <p:nvGrpSpPr>
+        <p:cNvPr id="1" name=""/>
+        <p:cNvGrpSpPr/>
+        <p:nvPr/>
+      </p:nvGrpSpPr>
+      <p:grpSpPr/>
+      <p:sp>
+        <p:nvSpPr>
+          <p:cNvPr id="2" name="Rectangle 1"/>
+          <p:cNvSpPr/>
+          <p:nvPr/>
+        </p:nvSpPr>
+        <p:spPr>
+          <a:xfrm>
+            <a:off x="0" y="0"/>
+            <a:ext cx="12191695" cy="45720"/>
+          </a:xfrm>
+          <a:prstGeom prst="rect">
+            <a:avLst/>
+          </a:prstGeom>
+          <a:solidFill>
+            <a:srgbClr val="0070C0"/>
+          </a:solidFill>
+          <a:ln>
+            <a:noFill/>
+          </a:ln>
+          <a:effectLst/>
+        </p:spPr>
+        <p:style>
+          <a:lnRef idx="1">
+            <a:schemeClr val="accent1"/>
+          </a:lnRef>
+          <a:fillRef idx="3">
+            <a:schemeClr val="accent1"/>
+          </a:fillRef>
+          <a:effectRef idx="2">
+            <a:schemeClr val="accent1"/>
+          </a:effectRef>
+          <a:fontRef idx="minor">
+            <a:schemeClr val="lt1"/>
+          </a:fontRef>
+        </p:style>
+        <p:txBody>
+          <a:bodyPr rtlCol="0" anchor="ctr"/>
+          <a:lstStyle/>
+          <a:p>
+            <a:pPr algn="ctr"/>
+          </a:p>
+        </p:txBody>
+      </p:sp>
+      <p:sp>
+        <p:nvSpPr>
+          <p:cNvPr id="3" name="Rounded Rectangle 2"/>
+          <p:cNvSpPr/>
+          <p:nvPr/>
+        </p:nvSpPr>
+        <p:spPr>
+          <a:xfrm>
+            <a:off x="548640" y="256032"/>
+            <a:ext cx="685800" cy="457200"/>
+          </a:xfrm>
+          <a:prstGeom prst="roundRect">
+            <a:avLst/>
+          </a:prstGeom>
+          <a:solidFill>
+            <a:srgbClr val="0070C0"/>
+          </a:solidFill>
+          <a:ln>
+            <a:noFill/>
+          </a:ln>
+          <a:effectLst/>
+        </p:spPr>
+        <p:style>
+          <a:lnRef idx="1">
+            <a:schemeClr val="accent1"/>
+          </a:lnRef>
+          <a:fillRef idx="3">
+            <a:schemeClr val="accent1"/>
+          </a:fillRef>
+          <a:effectRef idx="2">
+            <a:schemeClr val="accent1"/>
+          </a:effectRef>
+          <a:fontRef idx="minor">
+            <a:schemeClr val="lt1"/>
+          </a:fontRef>
+        </p:style>
+        <p:txBody>
+          <a:bodyPr rtlCol="0" anchor="ctr"/>
+          <a:lstStyle/>
+          <a:p>
+            <a:pPr algn="ctr">
+              <a:defRPr sz="1400" b="1">
+                <a:solidFill>
+                  <a:srgbClr val="FFFFFF"/>
+                </a:solidFill>
+                <a:latin typeface="맑은 고딕"/>
+              </a:defRPr>
+            </a:pPr>
+            <a:r>
+              <a:t>A05</a:t>
+            </a:r>
+          </a:p>
+        </p:txBody>
+      </p:sp>
+      <p:sp>
+        <p:nvSpPr>
+          <p:cNvPr id="4" name="TextBox 3"/>
+          <p:cNvSpPr txBox="1"/>
+          <p:nvPr/>
+        </p:nvSpPr>
+        <p:spPr>
+          <a:xfrm>
+            <a:off x="1371600" y="274320"/>
+            <a:ext cx="10241280" cy="548640"/>
+          </a:xfrm>
+          <a:prstGeom prst="rect">
+            <a:avLst/>
+          </a:prstGeom>
+          <a:noFill/>
+        </p:spPr>
+        <p:txBody>
+          <a:bodyPr wrap="square">
+            <a:spAutoFit/>
+          </a:bodyPr>
+          <a:lstStyle/>
+          <a:p>
+            <a:pPr algn="l">
+              <a:defRPr sz="2200" b="1">
+                <a:solidFill>
+                  <a:srgbClr val="1F1F1F"/>
+                </a:solidFill>
+                <a:latin typeface="맑은 고딕"/>
+              </a:defRPr>
+            </a:pPr>
+            <a:r>
+              <a:t>서버 상세 — 상단 지표</a:t>
+            </a:r>
+          </a:p>
+        </p:txBody>
+      </p:sp>
+      <p:sp>
+        <p:nvSpPr>
+          <p:cNvPr id="5" name="Rectangle 4"/>
+          <p:cNvSpPr/>
+          <p:nvPr/>
+        </p:nvSpPr>
+        <p:spPr>
+          <a:xfrm>
+            <a:off x="548640" y="841248"/>
+            <a:ext cx="1828800" cy="27432"/>
+          </a:xfrm>
+          <a:prstGeom prst="rect">
+            <a:avLst/>
+          </a:prstGeom>
+          <a:solidFill>
+            <a:srgbClr val="0070C0"/>
+          </a:solidFill>
+          <a:ln>
+            <a:noFill/>
+          </a:ln>
+          <a:effectLst/>
+        </p:spPr>
+        <p:style>
+          <a:lnRef idx="1">
+            <a:schemeClr val="accent1"/>
+          </a:lnRef>
+          <a:fillRef idx="3">
+            <a:schemeClr val="accent1"/>
+          </a:fillRef>
+          <a:effectRef idx="2">
+            <a:schemeClr val="accent1"/>
+          </a:effectRef>
+          <a:fontRef idx="minor">
+            <a:schemeClr val="lt1"/>
+          </a:fontRef>
+        </p:style>
+        <p:txBody>
+          <a:bodyPr rtlCol="0" anchor="ctr"/>
+          <a:lstStyle/>
+          <a:p>
+            <a:pPr algn="ctr"/>
+          </a:p>
+        </p:txBody>
+      </p:sp>
+      <p:sp>
+        <p:nvSpPr>
+          <p:cNvPr id="6" name="Rounded Rectangle 5"/>
+          <p:cNvSpPr/>
+          <p:nvPr/>
+        </p:nvSpPr>
+        <p:spPr>
+          <a:xfrm>
+            <a:off x="640080" y="1097280"/>
+            <a:ext cx="10908792" cy="4892040"/>
+          </a:xfrm>
+          <a:prstGeom prst="roundRect">
+            <a:avLst/>
+          </a:prstGeom>
+          <a:solidFill>
+            <a:srgbClr val="F8F9FB"/>
+          </a:solidFill>
+          <a:ln w="15240">
+            <a:solidFill>
+              <a:srgbClr val="0070C0"/>
+            </a:solidFill>
+          </a:ln>
+          <a:effectLst/>
+        </p:spPr>
+        <p:style>
+          <a:lnRef idx="1">
+            <a:schemeClr val="accent1"/>
+          </a:lnRef>
+          <a:fillRef idx="3">
+            <a:schemeClr val="accent1"/>
+          </a:fillRef>
+          <a:effectRef idx="2">
+            <a:schemeClr val="accent1"/>
+          </a:effectRef>
+          <a:fontRef idx="minor">
+            <a:schemeClr val="lt1"/>
+          </a:fontRef>
+        </p:style>
+        <p:txBody>
+          <a:bodyPr rtlCol="0" anchor="ctr"/>
+          <a:lstStyle/>
+          <a:p>
+            <a:pPr algn="ctr"/>
+          </a:p>
+        </p:txBody>
+      </p:sp>
+      <p:sp>
+        <p:nvSpPr>
+          <p:cNvPr id="7" name="TextBox 6"/>
+          <p:cNvSpPr txBox="1"/>
+          <p:nvPr/>
+        </p:nvSpPr>
+        <p:spPr>
+          <a:xfrm>
+            <a:off x="640080" y="2834640"/>
+            <a:ext cx="10908792" cy="548640"/>
+          </a:xfrm>
+          <a:prstGeom prst="rect">
+            <a:avLst/>
+          </a:prstGeom>
+          <a:noFill/>
+        </p:spPr>
+        <p:txBody>
+          <a:bodyPr wrap="square">
+            <a:spAutoFit/>
+          </a:bodyPr>
+          <a:lstStyle/>
+          <a:p>
+            <a:pPr algn="ctr">
+              <a:defRPr sz="2000" b="1">
+                <a:solidFill>
+                  <a:srgbClr val="8C8C9A"/>
+                </a:solidFill>
+                <a:latin typeface="맑은 고딕"/>
+              </a:defRPr>
+            </a:pPr>
+            <a:r>
+              <a:t>🖼  화면 캡처 위치</a:t>
+            </a:r>
+          </a:p>
+        </p:txBody>
+      </p:sp>
+      <p:sp>
+        <p:nvSpPr>
+          <p:cNvPr id="8" name="TextBox 7"/>
+          <p:cNvSpPr txBox="1"/>
+          <p:nvPr/>
+        </p:nvSpPr>
+        <p:spPr>
+          <a:xfrm>
+            <a:off x="640080" y="3474720"/>
+            <a:ext cx="10908792" cy="457200"/>
+          </a:xfrm>
+          <a:prstGeom prst="rect">
+            <a:avLst/>
+          </a:prstGeom>
+          <a:noFill/>
+        </p:spPr>
+        <p:txBody>
+          <a:bodyPr wrap="square">
+            <a:spAutoFit/>
+          </a:bodyPr>
+          <a:lstStyle/>
+          <a:p>
+            <a:pPr algn="ctr">
+              <a:defRPr sz="1300" b="0">
+                <a:solidFill>
+                  <a:srgbClr val="0070C0"/>
+                </a:solidFill>
+                <a:latin typeface="Consolas"/>
+              </a:defRPr>
+            </a:pPr>
+            <a:r>
+              <a:t>docs/images/server-detail-top.png</a:t>
+            </a:r>
+          </a:p>
+        </p:txBody>
+      </p:sp>
+      <p:sp>
+        <p:nvSpPr>
+          <p:cNvPr id="9" name="TextBox 8"/>
+          <p:cNvSpPr txBox="1"/>
+          <p:nvPr/>
+        </p:nvSpPr>
+        <p:spPr>
+          <a:xfrm>
+            <a:off x="640080" y="3977640"/>
+            <a:ext cx="10908792" cy="457200"/>
+          </a:xfrm>
+          <a:prstGeom prst="rect">
+            <a:avLst/>
+          </a:prstGeom>
+          <a:noFill/>
+        </p:spPr>
+        <p:txBody>
+          <a:bodyPr wrap="square">
+            <a:spAutoFit/>
+          </a:bodyPr>
+          <a:lstStyle/>
+          <a:p>
+            <a:pPr algn="ctr">
+              <a:defRPr sz="1100" b="0">
+                <a:solidFill>
+                  <a:srgbClr val="8C8C9A"/>
+                </a:solidFill>
+                <a:latin typeface="맑은 고딕"/>
+              </a:defRPr>
+            </a:pPr>
+            <a:r>
+              <a:t>이 파일명으로 저장 후 스크립트를 다시 실행하면 자동 삽입됩니다</a:t>
+            </a:r>
+          </a:p>
+        </p:txBody>
+      </p:sp>
+      <p:sp>
+        <p:nvSpPr>
+          <p:cNvPr id="10" name="TextBox 9"/>
+          <p:cNvSpPr txBox="1"/>
+          <p:nvPr/>
+        </p:nvSpPr>
+        <p:spPr>
+          <a:xfrm>
+            <a:off x="640080" y="6144768"/>
+            <a:ext cx="10908792" cy="502920"/>
+          </a:xfrm>
+          <a:prstGeom prst="rect">
+            <a:avLst/>
+          </a:prstGeom>
+          <a:noFill/>
+        </p:spPr>
+        <p:txBody>
+          <a:bodyPr wrap="square">
+            <a:spAutoFit/>
+          </a:bodyPr>
+          <a:lstStyle/>
+          <a:p>
+            <a:pPr algn="l">
+              <a:defRPr sz="1300" b="0">
+                <a:solidFill>
+                  <a:srgbClr val="5A5A6E"/>
+                </a:solidFill>
+                <a:latin typeface="맑은 고딕"/>
+              </a:defRPr>
+            </a:pPr>
+            <a:r>
+              <a:t>CPU·메모리·디스크·네트워크 실시간 차트</a:t>
+            </a:r>
+          </a:p>
+        </p:txBody>
+      </p:sp>
+      <p:sp>
+        <p:nvSpPr>
+          <p:cNvPr id="11" name="TextBox 10"/>
+          <p:cNvSpPr txBox="1"/>
+          <p:nvPr/>
+        </p:nvSpPr>
+        <p:spPr>
+          <a:xfrm>
+            <a:off x="10972800" y="6492240"/>
+            <a:ext cx="914400" cy="274320"/>
+          </a:xfrm>
+          <a:prstGeom prst="rect">
+            <a:avLst/>
+          </a:prstGeom>
+          <a:noFill/>
+        </p:spPr>
+        <p:txBody>
+          <a:bodyPr wrap="square">
+            <a:spAutoFit/>
+          </a:bodyPr>
+          <a:lstStyle/>
+          <a:p>
+            <a:pPr algn="r">
+              <a:defRPr sz="1000" b="0">
+                <a:solidFill>
+                  <a:srgbClr val="8C8C9A"/>
+                </a:solidFill>
+                <a:latin typeface="맑은 고딕"/>
+              </a:defRPr>
+            </a:pPr>
+            <a:r>
+              <a:t>33</a:t>
+            </a:r>
+          </a:p>
+        </p:txBody>
+      </p:sp>
+    </p:spTree>
+  </p:cSld>
+  <p:clrMapOvr>
+    <a:masterClrMapping/>
+  </p:clrMapOvr>
+</p:sld>
+</file>
+
+<file path=ppt/slides/slide34.xml><?xml version="1.0" encoding="utf-8"?>
+<p:sld xmlns:a="http://schemas.openxmlformats.org/drawingml/2006/main" xmlns:p="http://schemas.openxmlformats.org/presentationml/2006/main" xmlns:r="http://schemas.openxmlformats.org/officeDocument/2006/relationships">
+  <p:cSld>
+    <p:bg>
+      <p:bgPr>
+        <a:solidFill>
+          <a:srgbClr val="FFFFFF"/>
+        </a:solidFill>
+        <a:effectLst/>
+      </p:bgPr>
+    </p:bg>
+    <p:spTree>
+      <p:nvGrpSpPr>
+        <p:cNvPr id="1" name=""/>
+        <p:cNvGrpSpPr/>
+        <p:nvPr/>
+      </p:nvGrpSpPr>
+      <p:grpSpPr/>
+      <p:sp>
+        <p:nvSpPr>
+          <p:cNvPr id="2" name="Rectangle 1"/>
+          <p:cNvSpPr/>
+          <p:nvPr/>
+        </p:nvSpPr>
+        <p:spPr>
+          <a:xfrm>
+            <a:off x="0" y="0"/>
+            <a:ext cx="12191695" cy="45720"/>
+          </a:xfrm>
+          <a:prstGeom prst="rect">
+            <a:avLst/>
+          </a:prstGeom>
+          <a:solidFill>
+            <a:srgbClr val="0070C0"/>
+          </a:solidFill>
+          <a:ln>
+            <a:noFill/>
+          </a:ln>
+          <a:effectLst/>
+        </p:spPr>
+        <p:style>
+          <a:lnRef idx="1">
+            <a:schemeClr val="accent1"/>
+          </a:lnRef>
+          <a:fillRef idx="3">
+            <a:schemeClr val="accent1"/>
+          </a:fillRef>
+          <a:effectRef idx="2">
+            <a:schemeClr val="accent1"/>
+          </a:effectRef>
+          <a:fontRef idx="minor">
+            <a:schemeClr val="lt1"/>
+          </a:fontRef>
+        </p:style>
+        <p:txBody>
+          <a:bodyPr rtlCol="0" anchor="ctr"/>
+          <a:lstStyle/>
+          <a:p>
+            <a:pPr algn="ctr"/>
+          </a:p>
+        </p:txBody>
+      </p:sp>
+      <p:sp>
+        <p:nvSpPr>
+          <p:cNvPr id="3" name="Rounded Rectangle 2"/>
+          <p:cNvSpPr/>
+          <p:nvPr/>
+        </p:nvSpPr>
+        <p:spPr>
+          <a:xfrm>
+            <a:off x="548640" y="256032"/>
+            <a:ext cx="685800" cy="457200"/>
+          </a:xfrm>
+          <a:prstGeom prst="roundRect">
+            <a:avLst/>
+          </a:prstGeom>
+          <a:solidFill>
+            <a:srgbClr val="0070C0"/>
+          </a:solidFill>
+          <a:ln>
+            <a:noFill/>
+          </a:ln>
+          <a:effectLst/>
+        </p:spPr>
+        <p:style>
+          <a:lnRef idx="1">
+            <a:schemeClr val="accent1"/>
+          </a:lnRef>
+          <a:fillRef idx="3">
+            <a:schemeClr val="accent1"/>
+          </a:fillRef>
+          <a:effectRef idx="2">
+            <a:schemeClr val="accent1"/>
+          </a:effectRef>
+          <a:fontRef idx="minor">
+            <a:schemeClr val="lt1"/>
+          </a:fontRef>
+        </p:style>
+        <p:txBody>
+          <a:bodyPr rtlCol="0" anchor="ctr"/>
+          <a:lstStyle/>
+          <a:p>
+            <a:pPr algn="ctr">
+              <a:defRPr sz="1400" b="1">
+                <a:solidFill>
+                  <a:srgbClr val="FFFFFF"/>
+                </a:solidFill>
+                <a:latin typeface="맑은 고딕"/>
+              </a:defRPr>
+            </a:pPr>
+            <a:r>
+              <a:t>A06</a:t>
+            </a:r>
+          </a:p>
+        </p:txBody>
+      </p:sp>
+      <p:sp>
+        <p:nvSpPr>
+          <p:cNvPr id="4" name="TextBox 3"/>
+          <p:cNvSpPr txBox="1"/>
+          <p:nvPr/>
+        </p:nvSpPr>
+        <p:spPr>
+          <a:xfrm>
+            <a:off x="1371600" y="274320"/>
+            <a:ext cx="10241280" cy="548640"/>
+          </a:xfrm>
+          <a:prstGeom prst="rect">
+            <a:avLst/>
+          </a:prstGeom>
+          <a:noFill/>
+        </p:spPr>
+        <p:txBody>
+          <a:bodyPr wrap="square">
+            <a:spAutoFit/>
+          </a:bodyPr>
+          <a:lstStyle/>
+          <a:p>
+            <a:pPr algn="l">
+              <a:defRPr sz="2200" b="1">
+                <a:solidFill>
+                  <a:srgbClr val="1F1F1F"/>
+                </a:solidFill>
+                <a:latin typeface="맑은 고딕"/>
+              </a:defRPr>
+            </a:pPr>
+            <a:r>
+              <a:t>서버 상세 — 파일시스템</a:t>
+            </a:r>
+          </a:p>
+        </p:txBody>
+      </p:sp>
+      <p:sp>
+        <p:nvSpPr>
+          <p:cNvPr id="5" name="Rectangle 4"/>
+          <p:cNvSpPr/>
+          <p:nvPr/>
+        </p:nvSpPr>
+        <p:spPr>
+          <a:xfrm>
+            <a:off x="548640" y="841248"/>
+            <a:ext cx="1828800" cy="27432"/>
+          </a:xfrm>
+          <a:prstGeom prst="rect">
+            <a:avLst/>
+          </a:prstGeom>
+          <a:solidFill>
+            <a:srgbClr val="0070C0"/>
+          </a:solidFill>
+          <a:ln>
+            <a:noFill/>
+          </a:ln>
+          <a:effectLst/>
+        </p:spPr>
+        <p:style>
+          <a:lnRef idx="1">
+            <a:schemeClr val="accent1"/>
+          </a:lnRef>
+          <a:fillRef idx="3">
+            <a:schemeClr val="accent1"/>
+          </a:fillRef>
+          <a:effectRef idx="2">
+            <a:schemeClr val="accent1"/>
+          </a:effectRef>
+          <a:fontRef idx="minor">
+            <a:schemeClr val="lt1"/>
+          </a:fontRef>
+        </p:style>
+        <p:txBody>
+          <a:bodyPr rtlCol="0" anchor="ctr"/>
+          <a:lstStyle/>
+          <a:p>
+            <a:pPr algn="ctr"/>
+          </a:p>
+        </p:txBody>
+      </p:sp>
+      <p:sp>
+        <p:nvSpPr>
+          <p:cNvPr id="6" name="Rounded Rectangle 5"/>
+          <p:cNvSpPr/>
+          <p:nvPr/>
+        </p:nvSpPr>
+        <p:spPr>
+          <a:xfrm>
+            <a:off x="640080" y="1097280"/>
+            <a:ext cx="10908792" cy="4892040"/>
+          </a:xfrm>
+          <a:prstGeom prst="roundRect">
+            <a:avLst/>
+          </a:prstGeom>
+          <a:solidFill>
+            <a:srgbClr val="F8F9FB"/>
+          </a:solidFill>
+          <a:ln w="15240">
+            <a:solidFill>
+              <a:srgbClr val="0070C0"/>
+            </a:solidFill>
+          </a:ln>
+          <a:effectLst/>
+        </p:spPr>
+        <p:style>
+          <a:lnRef idx="1">
+            <a:schemeClr val="accent1"/>
+          </a:lnRef>
+          <a:fillRef idx="3">
+            <a:schemeClr val="accent1"/>
+          </a:fillRef>
+          <a:effectRef idx="2">
+            <a:schemeClr val="accent1"/>
+          </a:effectRef>
+          <a:fontRef idx="minor">
+            <a:schemeClr val="lt1"/>
+          </a:fontRef>
+        </p:style>
+        <p:txBody>
+          <a:bodyPr rtlCol="0" anchor="ctr"/>
+          <a:lstStyle/>
+          <a:p>
+            <a:pPr algn="ctr"/>
+          </a:p>
+        </p:txBody>
+      </p:sp>
+      <p:sp>
+        <p:nvSpPr>
+          <p:cNvPr id="7" name="TextBox 6"/>
+          <p:cNvSpPr txBox="1"/>
+          <p:nvPr/>
+        </p:nvSpPr>
+        <p:spPr>
+          <a:xfrm>
+            <a:off x="640080" y="2834640"/>
+            <a:ext cx="10908792" cy="548640"/>
+          </a:xfrm>
+          <a:prstGeom prst="rect">
+            <a:avLst/>
+          </a:prstGeom>
+          <a:noFill/>
+        </p:spPr>
+        <p:txBody>
+          <a:bodyPr wrap="square">
+            <a:spAutoFit/>
+          </a:bodyPr>
+          <a:lstStyle/>
+          <a:p>
+            <a:pPr algn="ctr">
+              <a:defRPr sz="2000" b="1">
+                <a:solidFill>
+                  <a:srgbClr val="8C8C9A"/>
+                </a:solidFill>
+                <a:latin typeface="맑은 고딕"/>
+              </a:defRPr>
+            </a:pPr>
+            <a:r>
+              <a:t>🖼  화면 캡처 위치</a:t>
+            </a:r>
+          </a:p>
+        </p:txBody>
+      </p:sp>
+      <p:sp>
+        <p:nvSpPr>
+          <p:cNvPr id="8" name="TextBox 7"/>
+          <p:cNvSpPr txBox="1"/>
+          <p:nvPr/>
+        </p:nvSpPr>
+        <p:spPr>
+          <a:xfrm>
+            <a:off x="640080" y="3474720"/>
+            <a:ext cx="10908792" cy="457200"/>
+          </a:xfrm>
+          <a:prstGeom prst="rect">
+            <a:avLst/>
+          </a:prstGeom>
+          <a:noFill/>
+        </p:spPr>
+        <p:txBody>
+          <a:bodyPr wrap="square">
+            <a:spAutoFit/>
+          </a:bodyPr>
+          <a:lstStyle/>
+          <a:p>
+            <a:pPr algn="ctr">
+              <a:defRPr sz="1300" b="0">
+                <a:solidFill>
+                  <a:srgbClr val="0070C0"/>
+                </a:solidFill>
+                <a:latin typeface="Consolas"/>
+              </a:defRPr>
+            </a:pPr>
+            <a:r>
+              <a:t>docs/images/server-detail-filesystem.png</a:t>
+            </a:r>
+          </a:p>
+        </p:txBody>
+      </p:sp>
+      <p:sp>
+        <p:nvSpPr>
+          <p:cNvPr id="9" name="TextBox 8"/>
+          <p:cNvSpPr txBox="1"/>
+          <p:nvPr/>
+        </p:nvSpPr>
+        <p:spPr>
+          <a:xfrm>
+            <a:off x="640080" y="3977640"/>
+            <a:ext cx="10908792" cy="457200"/>
+          </a:xfrm>
+          <a:prstGeom prst="rect">
+            <a:avLst/>
+          </a:prstGeom>
+          <a:noFill/>
+        </p:spPr>
+        <p:txBody>
+          <a:bodyPr wrap="square">
+            <a:spAutoFit/>
+          </a:bodyPr>
+          <a:lstStyle/>
+          <a:p>
+            <a:pPr algn="ctr">
+              <a:defRPr sz="1100" b="0">
+                <a:solidFill>
+                  <a:srgbClr val="8C8C9A"/>
+                </a:solidFill>
+                <a:latin typeface="맑은 고딕"/>
+              </a:defRPr>
+            </a:pPr>
+            <a:r>
+              <a:t>이 파일명으로 저장 후 스크립트를 다시 실행하면 자동 삽입됩니다</a:t>
+            </a:r>
+          </a:p>
+        </p:txBody>
+      </p:sp>
+      <p:sp>
+        <p:nvSpPr>
+          <p:cNvPr id="10" name="TextBox 9"/>
+          <p:cNvSpPr txBox="1"/>
+          <p:nvPr/>
+        </p:nvSpPr>
+        <p:spPr>
+          <a:xfrm>
+            <a:off x="640080" y="6144768"/>
+            <a:ext cx="10908792" cy="502920"/>
+          </a:xfrm>
+          <a:prstGeom prst="rect">
+            <a:avLst/>
+          </a:prstGeom>
+          <a:noFill/>
+        </p:spPr>
+        <p:txBody>
+          <a:bodyPr wrap="square">
+            <a:spAutoFit/>
+          </a:bodyPr>
+          <a:lstStyle/>
+          <a:p>
+            <a:pPr algn="l">
+              <a:defRPr sz="1300" b="0">
+                <a:solidFill>
+                  <a:srgbClr val="5A5A6E"/>
+                </a:solidFill>
+                <a:latin typeface="맑은 고딕"/>
+              </a:defRPr>
+            </a:pPr>
+            <a:r>
+              <a:t>마운트별 사용량(NFS 포함)</a:t>
+            </a:r>
+          </a:p>
+        </p:txBody>
+      </p:sp>
+      <p:sp>
+        <p:nvSpPr>
+          <p:cNvPr id="11" name="TextBox 10"/>
+          <p:cNvSpPr txBox="1"/>
+          <p:nvPr/>
+        </p:nvSpPr>
+        <p:spPr>
+          <a:xfrm>
+            <a:off x="10972800" y="6492240"/>
+            <a:ext cx="914400" cy="274320"/>
+          </a:xfrm>
+          <a:prstGeom prst="rect">
+            <a:avLst/>
+          </a:prstGeom>
+          <a:noFill/>
+        </p:spPr>
+        <p:txBody>
+          <a:bodyPr wrap="square">
+            <a:spAutoFit/>
+          </a:bodyPr>
+          <a:lstStyle/>
+          <a:p>
+            <a:pPr algn="r">
+              <a:defRPr sz="1000" b="0">
+                <a:solidFill>
+                  <a:srgbClr val="8C8C9A"/>
+                </a:solidFill>
+                <a:latin typeface="맑은 고딕"/>
+              </a:defRPr>
+            </a:pPr>
+            <a:r>
+              <a:t>34</a:t>
+            </a:r>
+          </a:p>
+        </p:txBody>
+      </p:sp>
+    </p:spTree>
+  </p:cSld>
+  <p:clrMapOvr>
+    <a:masterClrMapping/>
+  </p:clrMapOvr>
+</p:sld>
+</file>
+
+<file path=ppt/slides/slide35.xml><?xml version="1.0" encoding="utf-8"?>
+<p:sld xmlns:a="http://schemas.openxmlformats.org/drawingml/2006/main" xmlns:p="http://schemas.openxmlformats.org/presentationml/2006/main" xmlns:r="http://schemas.openxmlformats.org/officeDocument/2006/relationships">
+  <p:cSld>
+    <p:bg>
+      <p:bgPr>
+        <a:solidFill>
+          <a:srgbClr val="FFFFFF"/>
+        </a:solidFill>
+        <a:effectLst/>
+      </p:bgPr>
+    </p:bg>
+    <p:spTree>
+      <p:nvGrpSpPr>
+        <p:cNvPr id="1" name=""/>
+        <p:cNvGrpSpPr/>
+        <p:nvPr/>
+      </p:nvGrpSpPr>
+      <p:grpSpPr/>
+      <p:sp>
+        <p:nvSpPr>
+          <p:cNvPr id="2" name="Rectangle 1"/>
+          <p:cNvSpPr/>
+          <p:nvPr/>
+        </p:nvSpPr>
+        <p:spPr>
+          <a:xfrm>
+            <a:off x="0" y="0"/>
+            <a:ext cx="12191695" cy="45720"/>
+          </a:xfrm>
+          <a:prstGeom prst="rect">
+            <a:avLst/>
+          </a:prstGeom>
+          <a:solidFill>
+            <a:srgbClr val="0070C0"/>
+          </a:solidFill>
+          <a:ln>
+            <a:noFill/>
+          </a:ln>
+          <a:effectLst/>
+        </p:spPr>
+        <p:style>
+          <a:lnRef idx="1">
+            <a:schemeClr val="accent1"/>
+          </a:lnRef>
+          <a:fillRef idx="3">
+            <a:schemeClr val="accent1"/>
+          </a:fillRef>
+          <a:effectRef idx="2">
+            <a:schemeClr val="accent1"/>
+          </a:effectRef>
+          <a:fontRef idx="minor">
+            <a:schemeClr val="lt1"/>
+          </a:fontRef>
+        </p:style>
+        <p:txBody>
+          <a:bodyPr rtlCol="0" anchor="ctr"/>
+          <a:lstStyle/>
+          <a:p>
+            <a:pPr algn="ctr"/>
+          </a:p>
+        </p:txBody>
+      </p:sp>
+      <p:sp>
+        <p:nvSpPr>
+          <p:cNvPr id="3" name="Rounded Rectangle 2"/>
+          <p:cNvSpPr/>
+          <p:nvPr/>
+        </p:nvSpPr>
+        <p:spPr>
+          <a:xfrm>
+            <a:off x="548640" y="256032"/>
+            <a:ext cx="685800" cy="457200"/>
+          </a:xfrm>
+          <a:prstGeom prst="roundRect">
+            <a:avLst/>
+          </a:prstGeom>
+          <a:solidFill>
+            <a:srgbClr val="0070C0"/>
+          </a:solidFill>
+          <a:ln>
+            <a:noFill/>
+          </a:ln>
+          <a:effectLst/>
+        </p:spPr>
+        <p:style>
+          <a:lnRef idx="1">
+            <a:schemeClr val="accent1"/>
+          </a:lnRef>
+          <a:fillRef idx="3">
+            <a:schemeClr val="accent1"/>
+          </a:fillRef>
+          <a:effectRef idx="2">
+            <a:schemeClr val="accent1"/>
+          </a:effectRef>
+          <a:fontRef idx="minor">
+            <a:schemeClr val="lt1"/>
+          </a:fontRef>
+        </p:style>
+        <p:txBody>
+          <a:bodyPr rtlCol="0" anchor="ctr"/>
+          <a:lstStyle/>
+          <a:p>
+            <a:pPr algn="ctr">
+              <a:defRPr sz="1400" b="1">
+                <a:solidFill>
+                  <a:srgbClr val="FFFFFF"/>
+                </a:solidFill>
+                <a:latin typeface="맑은 고딕"/>
+              </a:defRPr>
+            </a:pPr>
+            <a:r>
+              <a:t>A07</a:t>
+            </a:r>
+          </a:p>
+        </p:txBody>
+      </p:sp>
+      <p:sp>
+        <p:nvSpPr>
+          <p:cNvPr id="4" name="TextBox 3"/>
+          <p:cNvSpPr txBox="1"/>
+          <p:nvPr/>
+        </p:nvSpPr>
+        <p:spPr>
+          <a:xfrm>
+            <a:off x="1371600" y="274320"/>
+            <a:ext cx="10241280" cy="548640"/>
+          </a:xfrm>
+          <a:prstGeom prst="rect">
+            <a:avLst/>
+          </a:prstGeom>
+          <a:noFill/>
+        </p:spPr>
+        <p:txBody>
+          <a:bodyPr wrap="square">
+            <a:spAutoFit/>
+          </a:bodyPr>
+          <a:lstStyle/>
+          <a:p>
+            <a:pPr algn="l">
+              <a:defRPr sz="2200" b="1">
+                <a:solidFill>
+                  <a:srgbClr val="1F1F1F"/>
+                </a:solidFill>
+                <a:latin typeface="맑은 고딕"/>
+              </a:defRPr>
+            </a:pPr>
+            <a:r>
+              <a:t>서버 상세 — BMC 센서/전원</a:t>
+            </a:r>
+          </a:p>
+        </p:txBody>
+      </p:sp>
+      <p:sp>
+        <p:nvSpPr>
+          <p:cNvPr id="5" name="Rectangle 4"/>
+          <p:cNvSpPr/>
+          <p:nvPr/>
+        </p:nvSpPr>
+        <p:spPr>
+          <a:xfrm>
+            <a:off x="548640" y="841248"/>
+            <a:ext cx="1828800" cy="27432"/>
+          </a:xfrm>
+          <a:prstGeom prst="rect">
+            <a:avLst/>
+          </a:prstGeom>
+          <a:solidFill>
+            <a:srgbClr val="0070C0"/>
+          </a:solidFill>
+          <a:ln>
+            <a:noFill/>
+          </a:ln>
+          <a:effectLst/>
+        </p:spPr>
+        <p:style>
+          <a:lnRef idx="1">
+            <a:schemeClr val="accent1"/>
+          </a:lnRef>
+          <a:fillRef idx="3">
+            <a:schemeClr val="accent1"/>
+          </a:fillRef>
+          <a:effectRef idx="2">
+            <a:schemeClr val="accent1"/>
+          </a:effectRef>
+          <a:fontRef idx="minor">
+            <a:schemeClr val="lt1"/>
+          </a:fontRef>
+        </p:style>
+        <p:txBody>
+          <a:bodyPr rtlCol="0" anchor="ctr"/>
+          <a:lstStyle/>
+          <a:p>
+            <a:pPr algn="ctr"/>
+          </a:p>
+        </p:txBody>
+      </p:sp>
+      <p:sp>
+        <p:nvSpPr>
+          <p:cNvPr id="6" name="Rounded Rectangle 5"/>
+          <p:cNvSpPr/>
+          <p:nvPr/>
+        </p:nvSpPr>
+        <p:spPr>
+          <a:xfrm>
+            <a:off x="640080" y="1097280"/>
+            <a:ext cx="10908792" cy="4892040"/>
+          </a:xfrm>
+          <a:prstGeom prst="roundRect">
+            <a:avLst/>
+          </a:prstGeom>
+          <a:solidFill>
+            <a:srgbClr val="F8F9FB"/>
+          </a:solidFill>
+          <a:ln w="15240">
+            <a:solidFill>
+              <a:srgbClr val="0070C0"/>
+            </a:solidFill>
+          </a:ln>
+          <a:effectLst/>
+        </p:spPr>
+        <p:style>
+          <a:lnRef idx="1">
+            <a:schemeClr val="accent1"/>
+          </a:lnRef>
+          <a:fillRef idx="3">
+            <a:schemeClr val="accent1"/>
+          </a:fillRef>
+          <a:effectRef idx="2">
+            <a:schemeClr val="accent1"/>
+          </a:effectRef>
+          <a:fontRef idx="minor">
+            <a:schemeClr val="lt1"/>
+          </a:fontRef>
+        </p:style>
+        <p:txBody>
+          <a:bodyPr rtlCol="0" anchor="ctr"/>
+          <a:lstStyle/>
+          <a:p>
+            <a:pPr algn="ctr"/>
+          </a:p>
+        </p:txBody>
+      </p:sp>
+      <p:sp>
+        <p:nvSpPr>
+          <p:cNvPr id="7" name="TextBox 6"/>
+          <p:cNvSpPr txBox="1"/>
+          <p:nvPr/>
+        </p:nvSpPr>
+        <p:spPr>
+          <a:xfrm>
+            <a:off x="640080" y="2834640"/>
+            <a:ext cx="10908792" cy="548640"/>
+          </a:xfrm>
+          <a:prstGeom prst="rect">
+            <a:avLst/>
+          </a:prstGeom>
+          <a:noFill/>
+        </p:spPr>
+        <p:txBody>
+          <a:bodyPr wrap="square">
+            <a:spAutoFit/>
+          </a:bodyPr>
+          <a:lstStyle/>
+          <a:p>
+            <a:pPr algn="ctr">
+              <a:defRPr sz="2000" b="1">
+                <a:solidFill>
+                  <a:srgbClr val="8C8C9A"/>
+                </a:solidFill>
+                <a:latin typeface="맑은 고딕"/>
+              </a:defRPr>
+            </a:pPr>
+            <a:r>
+              <a:t>🖼  화면 캡처 위치</a:t>
+            </a:r>
+          </a:p>
+        </p:txBody>
+      </p:sp>
+      <p:sp>
+        <p:nvSpPr>
+          <p:cNvPr id="8" name="TextBox 7"/>
+          <p:cNvSpPr txBox="1"/>
+          <p:nvPr/>
+        </p:nvSpPr>
+        <p:spPr>
+          <a:xfrm>
+            <a:off x="640080" y="3474720"/>
+            <a:ext cx="10908792" cy="457200"/>
+          </a:xfrm>
+          <a:prstGeom prst="rect">
+            <a:avLst/>
+          </a:prstGeom>
+          <a:noFill/>
+        </p:spPr>
+        <p:txBody>
+          <a:bodyPr wrap="square">
+            <a:spAutoFit/>
+          </a:bodyPr>
+          <a:lstStyle/>
+          <a:p>
+            <a:pPr algn="ctr">
+              <a:defRPr sz="1300" b="0">
+                <a:solidFill>
+                  <a:srgbClr val="0070C0"/>
+                </a:solidFill>
+                <a:latin typeface="Consolas"/>
+              </a:defRPr>
+            </a:pPr>
+            <a:r>
+              <a:t>docs/images/server-detail-bmc.png</a:t>
+            </a:r>
+          </a:p>
+        </p:txBody>
+      </p:sp>
+      <p:sp>
+        <p:nvSpPr>
+          <p:cNvPr id="9" name="TextBox 8"/>
+          <p:cNvSpPr txBox="1"/>
+          <p:nvPr/>
+        </p:nvSpPr>
+        <p:spPr>
+          <a:xfrm>
+            <a:off x="640080" y="3977640"/>
+            <a:ext cx="10908792" cy="457200"/>
+          </a:xfrm>
+          <a:prstGeom prst="rect">
+            <a:avLst/>
+          </a:prstGeom>
+          <a:noFill/>
+        </p:spPr>
+        <p:txBody>
+          <a:bodyPr wrap="square">
+            <a:spAutoFit/>
+          </a:bodyPr>
+          <a:lstStyle/>
+          <a:p>
+            <a:pPr algn="ctr">
+              <a:defRPr sz="1100" b="0">
+                <a:solidFill>
+                  <a:srgbClr val="8C8C9A"/>
+                </a:solidFill>
+                <a:latin typeface="맑은 고딕"/>
+              </a:defRPr>
+            </a:pPr>
+            <a:r>
+              <a:t>이 파일명으로 저장 후 스크립트를 다시 실행하면 자동 삽입됩니다</a:t>
+            </a:r>
+          </a:p>
+        </p:txBody>
+      </p:sp>
+      <p:sp>
+        <p:nvSpPr>
+          <p:cNvPr id="10" name="TextBox 9"/>
+          <p:cNvSpPr txBox="1"/>
+          <p:nvPr/>
+        </p:nvSpPr>
+        <p:spPr>
+          <a:xfrm>
+            <a:off x="640080" y="6144768"/>
+            <a:ext cx="10908792" cy="502920"/>
+          </a:xfrm>
+          <a:prstGeom prst="rect">
+            <a:avLst/>
+          </a:prstGeom>
+          <a:noFill/>
+        </p:spPr>
+        <p:txBody>
+          <a:bodyPr wrap="square">
+            <a:spAutoFit/>
+          </a:bodyPr>
+          <a:lstStyle/>
+          <a:p>
+            <a:pPr algn="l">
+              <a:defRPr sz="1300" b="0">
+                <a:solidFill>
+                  <a:srgbClr val="5A5A6E"/>
+                </a:solidFill>
+                <a:latin typeface="맑은 고딕"/>
+              </a:defRPr>
+            </a:pPr>
+            <a:r>
+              <a:t>BMC 센서 + 웹 원격 전원 제어</a:t>
+            </a:r>
+          </a:p>
+        </p:txBody>
+      </p:sp>
+      <p:sp>
+        <p:nvSpPr>
+          <p:cNvPr id="11" name="TextBox 10"/>
+          <p:cNvSpPr txBox="1"/>
+          <p:nvPr/>
+        </p:nvSpPr>
+        <p:spPr>
+          <a:xfrm>
+            <a:off x="10972800" y="6492240"/>
+            <a:ext cx="914400" cy="274320"/>
+          </a:xfrm>
+          <a:prstGeom prst="rect">
+            <a:avLst/>
+          </a:prstGeom>
+          <a:noFill/>
+        </p:spPr>
+        <p:txBody>
+          <a:bodyPr wrap="square">
+            <a:spAutoFit/>
+          </a:bodyPr>
+          <a:lstStyle/>
+          <a:p>
+            <a:pPr algn="r">
+              <a:defRPr sz="1000" b="0">
+                <a:solidFill>
+                  <a:srgbClr val="8C8C9A"/>
+                </a:solidFill>
+                <a:latin typeface="맑은 고딕"/>
+              </a:defRPr>
+            </a:pPr>
+            <a:r>
+              <a:t>35</a:t>
+            </a:r>
+          </a:p>
+        </p:txBody>
+      </p:sp>
+    </p:spTree>
+  </p:cSld>
+  <p:clrMapOvr>
+    <a:masterClrMapping/>
+  </p:clrMapOvr>
+</p:sld>
+</file>
+
+<file path=ppt/slides/slide36.xml><?xml version="1.0" encoding="utf-8"?>
+<p:sld xmlns:a="http://schemas.openxmlformats.org/drawingml/2006/main" xmlns:p="http://schemas.openxmlformats.org/presentationml/2006/main" xmlns:r="http://schemas.openxmlformats.org/officeDocument/2006/relationships">
+  <p:cSld>
+    <p:bg>
+      <p:bgPr>
+        <a:solidFill>
+          <a:srgbClr val="FFFFFF"/>
+        </a:solidFill>
+        <a:effectLst/>
+      </p:bgPr>
+    </p:bg>
+    <p:spTree>
+      <p:nvGrpSpPr>
+        <p:cNvPr id="1" name=""/>
+        <p:cNvGrpSpPr/>
+        <p:nvPr/>
+      </p:nvGrpSpPr>
+      <p:grpSpPr/>
+      <p:sp>
+        <p:nvSpPr>
+          <p:cNvPr id="2" name="Rectangle 1"/>
+          <p:cNvSpPr/>
+          <p:nvPr/>
+        </p:nvSpPr>
+        <p:spPr>
+          <a:xfrm>
+            <a:off x="0" y="0"/>
+            <a:ext cx="12191695" cy="45720"/>
+          </a:xfrm>
+          <a:prstGeom prst="rect">
+            <a:avLst/>
+          </a:prstGeom>
+          <a:solidFill>
+            <a:srgbClr val="0070C0"/>
+          </a:solidFill>
+          <a:ln>
+            <a:noFill/>
+          </a:ln>
+          <a:effectLst/>
+        </p:spPr>
+        <p:style>
+          <a:lnRef idx="1">
+            <a:schemeClr val="accent1"/>
+          </a:lnRef>
+          <a:fillRef idx="3">
+            <a:schemeClr val="accent1"/>
+          </a:fillRef>
+          <a:effectRef idx="2">
+            <a:schemeClr val="accent1"/>
+          </a:effectRef>
+          <a:fontRef idx="minor">
+            <a:schemeClr val="lt1"/>
+          </a:fontRef>
+        </p:style>
+        <p:txBody>
+          <a:bodyPr rtlCol="0" anchor="ctr"/>
+          <a:lstStyle/>
+          <a:p>
+            <a:pPr algn="ctr"/>
+          </a:p>
+        </p:txBody>
+      </p:sp>
+      <p:sp>
+        <p:nvSpPr>
+          <p:cNvPr id="3" name="Rounded Rectangle 2"/>
+          <p:cNvSpPr/>
+          <p:nvPr/>
+        </p:nvSpPr>
+        <p:spPr>
+          <a:xfrm>
+            <a:off x="548640" y="256032"/>
+            <a:ext cx="685800" cy="457200"/>
+          </a:xfrm>
+          <a:prstGeom prst="roundRect">
+            <a:avLst/>
+          </a:prstGeom>
+          <a:solidFill>
+            <a:srgbClr val="0070C0"/>
+          </a:solidFill>
+          <a:ln>
+            <a:noFill/>
+          </a:ln>
+          <a:effectLst/>
+        </p:spPr>
+        <p:style>
+          <a:lnRef idx="1">
+            <a:schemeClr val="accent1"/>
+          </a:lnRef>
+          <a:fillRef idx="3">
+            <a:schemeClr val="accent1"/>
+          </a:fillRef>
+          <a:effectRef idx="2">
+            <a:schemeClr val="accent1"/>
+          </a:effectRef>
+          <a:fontRef idx="minor">
+            <a:schemeClr val="lt1"/>
+          </a:fontRef>
+        </p:style>
+        <p:txBody>
+          <a:bodyPr rtlCol="0" anchor="ctr"/>
+          <a:lstStyle/>
+          <a:p>
+            <a:pPr algn="ctr">
+              <a:defRPr sz="1400" b="1">
+                <a:solidFill>
+                  <a:srgbClr val="FFFFFF"/>
+                </a:solidFill>
+                <a:latin typeface="맑은 고딕"/>
+              </a:defRPr>
+            </a:pPr>
+            <a:r>
+              <a:t>A08</a:t>
+            </a:r>
+          </a:p>
+        </p:txBody>
+      </p:sp>
+      <p:sp>
+        <p:nvSpPr>
+          <p:cNvPr id="4" name="TextBox 3"/>
+          <p:cNvSpPr txBox="1"/>
+          <p:nvPr/>
+        </p:nvSpPr>
+        <p:spPr>
+          <a:xfrm>
+            <a:off x="1371600" y="274320"/>
+            <a:ext cx="10241280" cy="548640"/>
+          </a:xfrm>
+          <a:prstGeom prst="rect">
+            <a:avLst/>
+          </a:prstGeom>
+          <a:noFill/>
+        </p:spPr>
+        <p:txBody>
+          <a:bodyPr wrap="square">
+            <a:spAutoFit/>
+          </a:bodyPr>
+          <a:lstStyle/>
+          <a:p>
+            <a:pPr algn="l">
+              <a:defRPr sz="2200" b="1">
+                <a:solidFill>
+                  <a:srgbClr val="1F1F1F"/>
+                </a:solidFill>
+                <a:latin typeface="맑은 고딕"/>
+              </a:defRPr>
+            </a:pPr>
+            <a:r>
+              <a:t>메모리 상세</a:t>
+            </a:r>
+          </a:p>
+        </p:txBody>
+      </p:sp>
+      <p:sp>
+        <p:nvSpPr>
+          <p:cNvPr id="5" name="Rectangle 4"/>
+          <p:cNvSpPr/>
+          <p:nvPr/>
+        </p:nvSpPr>
+        <p:spPr>
+          <a:xfrm>
+            <a:off x="548640" y="841248"/>
+            <a:ext cx="1828800" cy="27432"/>
+          </a:xfrm>
+          <a:prstGeom prst="rect">
+            <a:avLst/>
+          </a:prstGeom>
+          <a:solidFill>
+            <a:srgbClr val="0070C0"/>
+          </a:solidFill>
+          <a:ln>
+            <a:noFill/>
+          </a:ln>
+          <a:effectLst/>
+        </p:spPr>
+        <p:style>
+          <a:lnRef idx="1">
+            <a:schemeClr val="accent1"/>
+          </a:lnRef>
+          <a:fillRef idx="3">
+            <a:schemeClr val="accent1"/>
+          </a:fillRef>
+          <a:effectRef idx="2">
+            <a:schemeClr val="accent1"/>
+          </a:effectRef>
+          <a:fontRef idx="minor">
+            <a:schemeClr val="lt1"/>
+          </a:fontRef>
+        </p:style>
+        <p:txBody>
+          <a:bodyPr rtlCol="0" anchor="ctr"/>
+          <a:lstStyle/>
+          <a:p>
+            <a:pPr algn="ctr"/>
+          </a:p>
+        </p:txBody>
+      </p:sp>
+      <p:sp>
+        <p:nvSpPr>
+          <p:cNvPr id="6" name="Rounded Rectangle 5"/>
+          <p:cNvSpPr/>
+          <p:nvPr/>
+        </p:nvSpPr>
+        <p:spPr>
+          <a:xfrm>
+            <a:off x="640080" y="1097280"/>
+            <a:ext cx="10908792" cy="4892040"/>
+          </a:xfrm>
+          <a:prstGeom prst="roundRect">
+            <a:avLst/>
+          </a:prstGeom>
+          <a:solidFill>
+            <a:srgbClr val="F8F9FB"/>
+          </a:solidFill>
+          <a:ln w="15240">
+            <a:solidFill>
+              <a:srgbClr val="0070C0"/>
+            </a:solidFill>
+          </a:ln>
+          <a:effectLst/>
+        </p:spPr>
+        <p:style>
+          <a:lnRef idx="1">
+            <a:schemeClr val="accent1"/>
+          </a:lnRef>
+          <a:fillRef idx="3">
+            <a:schemeClr val="accent1"/>
+          </a:fillRef>
+          <a:effectRef idx="2">
+            <a:schemeClr val="accent1"/>
+          </a:effectRef>
+          <a:fontRef idx="minor">
+            <a:schemeClr val="lt1"/>
+          </a:fontRef>
+        </p:style>
+        <p:txBody>
+          <a:bodyPr rtlCol="0" anchor="ctr"/>
+          <a:lstStyle/>
+          <a:p>
+            <a:pPr algn="ctr"/>
+          </a:p>
+        </p:txBody>
+      </p:sp>
+      <p:sp>
+        <p:nvSpPr>
+          <p:cNvPr id="7" name="TextBox 6"/>
+          <p:cNvSpPr txBox="1"/>
+          <p:nvPr/>
+        </p:nvSpPr>
+        <p:spPr>
+          <a:xfrm>
+            <a:off x="640080" y="2834640"/>
+            <a:ext cx="10908792" cy="548640"/>
+          </a:xfrm>
+          <a:prstGeom prst="rect">
+            <a:avLst/>
+          </a:prstGeom>
+          <a:noFill/>
+        </p:spPr>
+        <p:txBody>
+          <a:bodyPr wrap="square">
+            <a:spAutoFit/>
+          </a:bodyPr>
+          <a:lstStyle/>
+          <a:p>
+            <a:pPr algn="ctr">
+              <a:defRPr sz="2000" b="1">
+                <a:solidFill>
+                  <a:srgbClr val="8C8C9A"/>
+                </a:solidFill>
+                <a:latin typeface="맑은 고딕"/>
+              </a:defRPr>
+            </a:pPr>
+            <a:r>
+              <a:t>🖼  화면 캡처 위치</a:t>
+            </a:r>
+          </a:p>
+        </p:txBody>
+      </p:sp>
+      <p:sp>
+        <p:nvSpPr>
+          <p:cNvPr id="8" name="TextBox 7"/>
+          <p:cNvSpPr txBox="1"/>
+          <p:nvPr/>
+        </p:nvSpPr>
+        <p:spPr>
+          <a:xfrm>
+            <a:off x="640080" y="3474720"/>
+            <a:ext cx="10908792" cy="457200"/>
+          </a:xfrm>
+          <a:prstGeom prst="rect">
+            <a:avLst/>
+          </a:prstGeom>
+          <a:noFill/>
+        </p:spPr>
+        <p:txBody>
+          <a:bodyPr wrap="square">
+            <a:spAutoFit/>
+          </a:bodyPr>
+          <a:lstStyle/>
+          <a:p>
+            <a:pPr algn="ctr">
+              <a:defRPr sz="1300" b="0">
+                <a:solidFill>
+                  <a:srgbClr val="0070C0"/>
+                </a:solidFill>
+                <a:latin typeface="Consolas"/>
+              </a:defRPr>
+            </a:pPr>
+            <a:r>
+              <a:t>docs/images/memory-detail.png</a:t>
+            </a:r>
+          </a:p>
+        </p:txBody>
+      </p:sp>
+      <p:sp>
+        <p:nvSpPr>
+          <p:cNvPr id="9" name="TextBox 8"/>
+          <p:cNvSpPr txBox="1"/>
+          <p:nvPr/>
+        </p:nvSpPr>
+        <p:spPr>
+          <a:xfrm>
+            <a:off x="640080" y="3977640"/>
+            <a:ext cx="10908792" cy="457200"/>
+          </a:xfrm>
+          <a:prstGeom prst="rect">
+            <a:avLst/>
+          </a:prstGeom>
+          <a:noFill/>
+        </p:spPr>
+        <p:txBody>
+          <a:bodyPr wrap="square">
+            <a:spAutoFit/>
+          </a:bodyPr>
+          <a:lstStyle/>
+          <a:p>
+            <a:pPr algn="ctr">
+              <a:defRPr sz="1100" b="0">
+                <a:solidFill>
+                  <a:srgbClr val="8C8C9A"/>
+                </a:solidFill>
+                <a:latin typeface="맑은 고딕"/>
+              </a:defRPr>
+            </a:pPr>
+            <a:r>
+              <a:t>이 파일명으로 저장 후 스크립트를 다시 실행하면 자동 삽입됩니다</a:t>
+            </a:r>
+          </a:p>
+        </p:txBody>
+      </p:sp>
+      <p:sp>
+        <p:nvSpPr>
+          <p:cNvPr id="10" name="TextBox 9"/>
+          <p:cNvSpPr txBox="1"/>
+          <p:nvPr/>
+        </p:nvSpPr>
+        <p:spPr>
+          <a:xfrm>
+            <a:off x="640080" y="6144768"/>
+            <a:ext cx="10908792" cy="502920"/>
+          </a:xfrm>
+          <a:prstGeom prst="rect">
+            <a:avLst/>
+          </a:prstGeom>
+          <a:noFill/>
+        </p:spPr>
+        <p:txBody>
+          <a:bodyPr wrap="square">
+            <a:spAutoFit/>
+          </a:bodyPr>
+          <a:lstStyle/>
+          <a:p>
+            <a:pPr algn="l">
+              <a:defRPr sz="1300" b="0">
+                <a:solidFill>
+                  <a:srgbClr val="5A5A6E"/>
+                </a:solidFill>
+                <a:latin typeface="맑은 고딕"/>
+              </a:defRPr>
+            </a:pPr>
+            <a:r>
+              <a:t>DIMM 슬롯별 상세 + 채널 다이어그램</a:t>
+            </a:r>
+          </a:p>
+        </p:txBody>
+      </p:sp>
+      <p:sp>
+        <p:nvSpPr>
+          <p:cNvPr id="11" name="TextBox 10"/>
+          <p:cNvSpPr txBox="1"/>
+          <p:nvPr/>
+        </p:nvSpPr>
+        <p:spPr>
+          <a:xfrm>
+            <a:off x="10972800" y="6492240"/>
+            <a:ext cx="914400" cy="274320"/>
+          </a:xfrm>
+          <a:prstGeom prst="rect">
+            <a:avLst/>
+          </a:prstGeom>
+          <a:noFill/>
+        </p:spPr>
+        <p:txBody>
+          <a:bodyPr wrap="square">
+            <a:spAutoFit/>
+          </a:bodyPr>
+          <a:lstStyle/>
+          <a:p>
+            <a:pPr algn="r">
+              <a:defRPr sz="1000" b="0">
+                <a:solidFill>
+                  <a:srgbClr val="8C8C9A"/>
+                </a:solidFill>
+                <a:latin typeface="맑은 고딕"/>
+              </a:defRPr>
+            </a:pPr>
+            <a:r>
+              <a:t>36</a:t>
+            </a:r>
+          </a:p>
+        </p:txBody>
+      </p:sp>
+    </p:spTree>
+  </p:cSld>
+  <p:clrMapOvr>
+    <a:masterClrMapping/>
+  </p:clrMapOvr>
+</p:sld>
+</file>
+
+<file path=ppt/slides/slide37.xml><?xml version="1.0" encoding="utf-8"?>
+<p:sld xmlns:a="http://schemas.openxmlformats.org/drawingml/2006/main" xmlns:p="http://schemas.openxmlformats.org/presentationml/2006/main" xmlns:r="http://schemas.openxmlformats.org/officeDocument/2006/relationships">
+  <p:cSld>
+    <p:bg>
+      <p:bgPr>
+        <a:solidFill>
+          <a:srgbClr val="FFFFFF"/>
+        </a:solidFill>
+        <a:effectLst/>
+      </p:bgPr>
+    </p:bg>
+    <p:spTree>
+      <p:nvGrpSpPr>
+        <p:cNvPr id="1" name=""/>
+        <p:cNvGrpSpPr/>
+        <p:nvPr/>
+      </p:nvGrpSpPr>
+      <p:grpSpPr/>
+      <p:sp>
+        <p:nvSpPr>
+          <p:cNvPr id="2" name="Rectangle 1"/>
+          <p:cNvSpPr/>
+          <p:nvPr/>
+        </p:nvSpPr>
+        <p:spPr>
+          <a:xfrm>
+            <a:off x="0" y="0"/>
+            <a:ext cx="12191695" cy="45720"/>
+          </a:xfrm>
+          <a:prstGeom prst="rect">
+            <a:avLst/>
+          </a:prstGeom>
+          <a:solidFill>
+            <a:srgbClr val="0070C0"/>
+          </a:solidFill>
+          <a:ln>
+            <a:noFill/>
+          </a:ln>
+          <a:effectLst/>
+        </p:spPr>
+        <p:style>
+          <a:lnRef idx="1">
+            <a:schemeClr val="accent1"/>
+          </a:lnRef>
+          <a:fillRef idx="3">
+            <a:schemeClr val="accent1"/>
+          </a:fillRef>
+          <a:effectRef idx="2">
+            <a:schemeClr val="accent1"/>
+          </a:effectRef>
+          <a:fontRef idx="minor">
+            <a:schemeClr val="lt1"/>
+          </a:fontRef>
+        </p:style>
+        <p:txBody>
+          <a:bodyPr rtlCol="0" anchor="ctr"/>
+          <a:lstStyle/>
+          <a:p>
+            <a:pPr algn="ctr"/>
+          </a:p>
+        </p:txBody>
+      </p:sp>
+      <p:sp>
+        <p:nvSpPr>
+          <p:cNvPr id="3" name="Rounded Rectangle 2"/>
+          <p:cNvSpPr/>
+          <p:nvPr/>
+        </p:nvSpPr>
+        <p:spPr>
+          <a:xfrm>
+            <a:off x="548640" y="256032"/>
+            <a:ext cx="685800" cy="457200"/>
+          </a:xfrm>
+          <a:prstGeom prst="roundRect">
+            <a:avLst/>
+          </a:prstGeom>
+          <a:solidFill>
+            <a:srgbClr val="0070C0"/>
+          </a:solidFill>
+          <a:ln>
+            <a:noFill/>
+          </a:ln>
+          <a:effectLst/>
+        </p:spPr>
+        <p:style>
+          <a:lnRef idx="1">
+            <a:schemeClr val="accent1"/>
+          </a:lnRef>
+          <a:fillRef idx="3">
+            <a:schemeClr val="accent1"/>
+          </a:fillRef>
+          <a:effectRef idx="2">
+            <a:schemeClr val="accent1"/>
+          </a:effectRef>
+          <a:fontRef idx="minor">
+            <a:schemeClr val="lt1"/>
+          </a:fontRef>
+        </p:style>
+        <p:txBody>
+          <a:bodyPr rtlCol="0" anchor="ctr"/>
+          <a:lstStyle/>
+          <a:p>
+            <a:pPr algn="ctr">
+              <a:defRPr sz="1400" b="1">
+                <a:solidFill>
+                  <a:srgbClr val="FFFFFF"/>
+                </a:solidFill>
+                <a:latin typeface="맑은 고딕"/>
+              </a:defRPr>
+            </a:pPr>
+            <a:r>
+              <a:t>A09</a:t>
+            </a:r>
+          </a:p>
+        </p:txBody>
+      </p:sp>
+      <p:sp>
+        <p:nvSpPr>
+          <p:cNvPr id="4" name="TextBox 3"/>
+          <p:cNvSpPr txBox="1"/>
+          <p:nvPr/>
+        </p:nvSpPr>
+        <p:spPr>
+          <a:xfrm>
+            <a:off x="1371600" y="274320"/>
+            <a:ext cx="10241280" cy="548640"/>
+          </a:xfrm>
+          <a:prstGeom prst="rect">
+            <a:avLst/>
+          </a:prstGeom>
+          <a:noFill/>
+        </p:spPr>
+        <p:txBody>
+          <a:bodyPr wrap="square">
+            <a:spAutoFit/>
+          </a:bodyPr>
+          <a:lstStyle/>
+          <a:p>
+            <a:pPr algn="l">
+              <a:defRPr sz="2200" b="1">
+                <a:solidFill>
+                  <a:srgbClr val="1F1F1F"/>
+                </a:solidFill>
+                <a:latin typeface="맑은 고딕"/>
+              </a:defRPr>
+            </a:pPr>
+            <a:r>
+              <a:t>인프라 관리</a:t>
+            </a:r>
+          </a:p>
+        </p:txBody>
+      </p:sp>
+      <p:sp>
+        <p:nvSpPr>
+          <p:cNvPr id="5" name="Rectangle 4"/>
+          <p:cNvSpPr/>
+          <p:nvPr/>
+        </p:nvSpPr>
+        <p:spPr>
+          <a:xfrm>
+            <a:off x="548640" y="841248"/>
+            <a:ext cx="1828800" cy="27432"/>
+          </a:xfrm>
+          <a:prstGeom prst="rect">
+            <a:avLst/>
+          </a:prstGeom>
+          <a:solidFill>
+            <a:srgbClr val="0070C0"/>
+          </a:solidFill>
+          <a:ln>
+            <a:noFill/>
+          </a:ln>
+          <a:effectLst/>
+        </p:spPr>
+        <p:style>
+          <a:lnRef idx="1">
+            <a:schemeClr val="accent1"/>
+          </a:lnRef>
+          <a:fillRef idx="3">
+            <a:schemeClr val="accent1"/>
+          </a:fillRef>
+          <a:effectRef idx="2">
+            <a:schemeClr val="accent1"/>
+          </a:effectRef>
+          <a:fontRef idx="minor">
+            <a:schemeClr val="lt1"/>
+          </a:fontRef>
+        </p:style>
+        <p:txBody>
+          <a:bodyPr rtlCol="0" anchor="ctr"/>
+          <a:lstStyle/>
+          <a:p>
+            <a:pPr algn="ctr"/>
+          </a:p>
+        </p:txBody>
+      </p:sp>
+      <p:sp>
+        <p:nvSpPr>
+          <p:cNvPr id="6" name="Rounded Rectangle 5"/>
+          <p:cNvSpPr/>
+          <p:nvPr/>
+        </p:nvSpPr>
+        <p:spPr>
+          <a:xfrm>
+            <a:off x="640080" y="1097280"/>
+            <a:ext cx="10908792" cy="4892040"/>
+          </a:xfrm>
+          <a:prstGeom prst="roundRect">
+            <a:avLst/>
+          </a:prstGeom>
+          <a:solidFill>
+            <a:srgbClr val="F8F9FB"/>
+          </a:solidFill>
+          <a:ln w="15240">
+            <a:solidFill>
+              <a:srgbClr val="0070C0"/>
+            </a:solidFill>
+          </a:ln>
+          <a:effectLst/>
+        </p:spPr>
+        <p:style>
+          <a:lnRef idx="1">
+            <a:schemeClr val="accent1"/>
+          </a:lnRef>
+          <a:fillRef idx="3">
+            <a:schemeClr val="accent1"/>
+          </a:fillRef>
+          <a:effectRef idx="2">
+            <a:schemeClr val="accent1"/>
+          </a:effectRef>
+          <a:fontRef idx="minor">
+            <a:schemeClr val="lt1"/>
+          </a:fontRef>
+        </p:style>
+        <p:txBody>
+          <a:bodyPr rtlCol="0" anchor="ctr"/>
+          <a:lstStyle/>
+          <a:p>
+            <a:pPr algn="ctr"/>
+          </a:p>
+        </p:txBody>
+      </p:sp>
+      <p:sp>
+        <p:nvSpPr>
+          <p:cNvPr id="7" name="TextBox 6"/>
+          <p:cNvSpPr txBox="1"/>
+          <p:nvPr/>
+        </p:nvSpPr>
+        <p:spPr>
+          <a:xfrm>
+            <a:off x="640080" y="2834640"/>
+            <a:ext cx="10908792" cy="548640"/>
+          </a:xfrm>
+          <a:prstGeom prst="rect">
+            <a:avLst/>
+          </a:prstGeom>
+          <a:noFill/>
+        </p:spPr>
+        <p:txBody>
+          <a:bodyPr wrap="square">
+            <a:spAutoFit/>
+          </a:bodyPr>
+          <a:lstStyle/>
+          <a:p>
+            <a:pPr algn="ctr">
+              <a:defRPr sz="2000" b="1">
+                <a:solidFill>
+                  <a:srgbClr val="8C8C9A"/>
+                </a:solidFill>
+                <a:latin typeface="맑은 고딕"/>
+              </a:defRPr>
+            </a:pPr>
+            <a:r>
+              <a:t>🖼  화면 캡처 위치</a:t>
+            </a:r>
+          </a:p>
+        </p:txBody>
+      </p:sp>
+      <p:sp>
+        <p:nvSpPr>
+          <p:cNvPr id="8" name="TextBox 7"/>
+          <p:cNvSpPr txBox="1"/>
+          <p:nvPr/>
+        </p:nvSpPr>
+        <p:spPr>
+          <a:xfrm>
+            <a:off x="640080" y="3474720"/>
+            <a:ext cx="10908792" cy="457200"/>
+          </a:xfrm>
+          <a:prstGeom prst="rect">
+            <a:avLst/>
+          </a:prstGeom>
+          <a:noFill/>
+        </p:spPr>
+        <p:txBody>
+          <a:bodyPr wrap="square">
+            <a:spAutoFit/>
+          </a:bodyPr>
+          <a:lstStyle/>
+          <a:p>
+            <a:pPr algn="ctr">
+              <a:defRPr sz="1300" b="0">
+                <a:solidFill>
+                  <a:srgbClr val="0070C0"/>
+                </a:solidFill>
+                <a:latin typeface="Consolas"/>
+              </a:defRPr>
+            </a:pPr>
+            <a:r>
+              <a:t>docs/images/infrastructure.png</a:t>
+            </a:r>
+          </a:p>
+        </p:txBody>
+      </p:sp>
+      <p:sp>
+        <p:nvSpPr>
+          <p:cNvPr id="9" name="TextBox 8"/>
+          <p:cNvSpPr txBox="1"/>
+          <p:nvPr/>
+        </p:nvSpPr>
+        <p:spPr>
+          <a:xfrm>
+            <a:off x="640080" y="3977640"/>
+            <a:ext cx="10908792" cy="457200"/>
+          </a:xfrm>
+          <a:prstGeom prst="rect">
+            <a:avLst/>
+          </a:prstGeom>
+          <a:noFill/>
+        </p:spPr>
+        <p:txBody>
+          <a:bodyPr wrap="square">
+            <a:spAutoFit/>
+          </a:bodyPr>
+          <a:lstStyle/>
+          <a:p>
+            <a:pPr algn="ctr">
+              <a:defRPr sz="1100" b="0">
+                <a:solidFill>
+                  <a:srgbClr val="8C8C9A"/>
+                </a:solidFill>
+                <a:latin typeface="맑은 고딕"/>
+              </a:defRPr>
+            </a:pPr>
+            <a:r>
+              <a:t>이 파일명으로 저장 후 스크립트를 다시 실행하면 자동 삽입됩니다</a:t>
+            </a:r>
+          </a:p>
+        </p:txBody>
+      </p:sp>
+      <p:sp>
+        <p:nvSpPr>
+          <p:cNvPr id="10" name="TextBox 9"/>
+          <p:cNvSpPr txBox="1"/>
+          <p:nvPr/>
+        </p:nvSpPr>
+        <p:spPr>
+          <a:xfrm>
+            <a:off x="640080" y="6144768"/>
+            <a:ext cx="10908792" cy="502920"/>
+          </a:xfrm>
+          <a:prstGeom prst="rect">
+            <a:avLst/>
+          </a:prstGeom>
+          <a:noFill/>
+        </p:spPr>
+        <p:txBody>
+          <a:bodyPr wrap="square">
+            <a:spAutoFit/>
+          </a:bodyPr>
+          <a:lstStyle/>
+          <a:p>
+            <a:pPr algn="l">
+              <a:defRPr sz="1300" b="0">
+                <a:solidFill>
+                  <a:srgbClr val="5A5A6E"/>
+                </a:solidFill>
+                <a:latin typeface="맑은 고딕"/>
+              </a:defRPr>
+            </a:pPr>
+            <a:r>
+              <a:t>장비 CRUD + 라이프사이클 관리</a:t>
+            </a:r>
+          </a:p>
+        </p:txBody>
+      </p:sp>
+      <p:sp>
+        <p:nvSpPr>
+          <p:cNvPr id="11" name="TextBox 10"/>
+          <p:cNvSpPr txBox="1"/>
+          <p:nvPr/>
+        </p:nvSpPr>
+        <p:spPr>
+          <a:xfrm>
+            <a:off x="10972800" y="6492240"/>
+            <a:ext cx="914400" cy="274320"/>
+          </a:xfrm>
+          <a:prstGeom prst="rect">
+            <a:avLst/>
+          </a:prstGeom>
+          <a:noFill/>
+        </p:spPr>
+        <p:txBody>
+          <a:bodyPr wrap="square">
+            <a:spAutoFit/>
+          </a:bodyPr>
+          <a:lstStyle/>
+          <a:p>
+            <a:pPr algn="r">
+              <a:defRPr sz="1000" b="0">
+                <a:solidFill>
+                  <a:srgbClr val="8C8C9A"/>
+                </a:solidFill>
+                <a:latin typeface="맑은 고딕"/>
+              </a:defRPr>
+            </a:pPr>
+            <a:r>
+              <a:t>37</a:t>
+            </a:r>
+          </a:p>
+        </p:txBody>
+      </p:sp>
+    </p:spTree>
+  </p:cSld>
+  <p:clrMapOvr>
+    <a:masterClrMapping/>
+  </p:clrMapOvr>
+</p:sld>
+</file>
+
+<file path=ppt/slides/slide38.xml><?xml version="1.0" encoding="utf-8"?>
+<p:sld xmlns:a="http://schemas.openxmlformats.org/drawingml/2006/main" xmlns:p="http://schemas.openxmlformats.org/presentationml/2006/main" xmlns:r="http://schemas.openxmlformats.org/officeDocument/2006/relationships">
+  <p:cSld>
+    <p:bg>
+      <p:bgPr>
+        <a:solidFill>
+          <a:srgbClr val="FFFFFF"/>
+        </a:solidFill>
+        <a:effectLst/>
+      </p:bgPr>
+    </p:bg>
+    <p:spTree>
+      <p:nvGrpSpPr>
+        <p:cNvPr id="1" name=""/>
+        <p:cNvGrpSpPr/>
+        <p:nvPr/>
+      </p:nvGrpSpPr>
+      <p:grpSpPr/>
+      <p:sp>
+        <p:nvSpPr>
+          <p:cNvPr id="2" name="Rectangle 1"/>
+          <p:cNvSpPr/>
+          <p:nvPr/>
+        </p:nvSpPr>
+        <p:spPr>
+          <a:xfrm>
+            <a:off x="0" y="0"/>
+            <a:ext cx="12191695" cy="45720"/>
+          </a:xfrm>
+          <a:prstGeom prst="rect">
+            <a:avLst/>
+          </a:prstGeom>
+          <a:solidFill>
+            <a:srgbClr val="0070C0"/>
+          </a:solidFill>
+          <a:ln>
+            <a:noFill/>
+          </a:ln>
+          <a:effectLst/>
+        </p:spPr>
+        <p:style>
+          <a:lnRef idx="1">
+            <a:schemeClr val="accent1"/>
+          </a:lnRef>
+          <a:fillRef idx="3">
+            <a:schemeClr val="accent1"/>
+          </a:fillRef>
+          <a:effectRef idx="2">
+            <a:schemeClr val="accent1"/>
+          </a:effectRef>
+          <a:fontRef idx="minor">
+            <a:schemeClr val="lt1"/>
+          </a:fontRef>
+        </p:style>
+        <p:txBody>
+          <a:bodyPr rtlCol="0" anchor="ctr"/>
+          <a:lstStyle/>
+          <a:p>
+            <a:pPr algn="ctr"/>
+          </a:p>
+        </p:txBody>
+      </p:sp>
+      <p:sp>
+        <p:nvSpPr>
+          <p:cNvPr id="3" name="Rounded Rectangle 2"/>
+          <p:cNvSpPr/>
+          <p:nvPr/>
+        </p:nvSpPr>
+        <p:spPr>
+          <a:xfrm>
+            <a:off x="548640" y="256032"/>
+            <a:ext cx="685800" cy="457200"/>
+          </a:xfrm>
+          <a:prstGeom prst="roundRect">
+            <a:avLst/>
+          </a:prstGeom>
+          <a:solidFill>
+            <a:srgbClr val="0070C0"/>
+          </a:solidFill>
+          <a:ln>
+            <a:noFill/>
+          </a:ln>
+          <a:effectLst/>
+        </p:spPr>
+        <p:style>
+          <a:lnRef idx="1">
+            <a:schemeClr val="accent1"/>
+          </a:lnRef>
+          <a:fillRef idx="3">
+            <a:schemeClr val="accent1"/>
+          </a:fillRef>
+          <a:effectRef idx="2">
+            <a:schemeClr val="accent1"/>
+          </a:effectRef>
+          <a:fontRef idx="minor">
+            <a:schemeClr val="lt1"/>
+          </a:fontRef>
+        </p:style>
+        <p:txBody>
+          <a:bodyPr rtlCol="0" anchor="ctr"/>
+          <a:lstStyle/>
+          <a:p>
+            <a:pPr algn="ctr">
+              <a:defRPr sz="1400" b="1">
+                <a:solidFill>
+                  <a:srgbClr val="FFFFFF"/>
+                </a:solidFill>
+                <a:latin typeface="맑은 고딕"/>
+              </a:defRPr>
+            </a:pPr>
+            <a:r>
+              <a:t>A10</a:t>
+            </a:r>
+          </a:p>
+        </p:txBody>
+      </p:sp>
+      <p:sp>
+        <p:nvSpPr>
+          <p:cNvPr id="4" name="TextBox 3"/>
+          <p:cNvSpPr txBox="1"/>
+          <p:nvPr/>
+        </p:nvSpPr>
+        <p:spPr>
+          <a:xfrm>
+            <a:off x="1371600" y="274320"/>
+            <a:ext cx="10241280" cy="548640"/>
+          </a:xfrm>
+          <a:prstGeom prst="rect">
+            <a:avLst/>
+          </a:prstGeom>
+          <a:noFill/>
+        </p:spPr>
+        <p:txBody>
+          <a:bodyPr wrap="square">
+            <a:spAutoFit/>
+          </a:bodyPr>
+          <a:lstStyle/>
+          <a:p>
+            <a:pPr algn="l">
+              <a:defRPr sz="2200" b="1">
+                <a:solidFill>
+                  <a:srgbClr val="1F1F1F"/>
+                </a:solidFill>
+                <a:latin typeface="맑은 고딕"/>
+              </a:defRPr>
+            </a:pPr>
+            <a:r>
+              <a:t>인프라 — CSV 일괄 등록</a:t>
+            </a:r>
+          </a:p>
+        </p:txBody>
+      </p:sp>
+      <p:sp>
+        <p:nvSpPr>
+          <p:cNvPr id="5" name="Rectangle 4"/>
+          <p:cNvSpPr/>
+          <p:nvPr/>
+        </p:nvSpPr>
+        <p:spPr>
+          <a:xfrm>
+            <a:off x="548640" y="841248"/>
+            <a:ext cx="1828800" cy="27432"/>
+          </a:xfrm>
+          <a:prstGeom prst="rect">
+            <a:avLst/>
+          </a:prstGeom>
+          <a:solidFill>
+            <a:srgbClr val="0070C0"/>
+          </a:solidFill>
+          <a:ln>
+            <a:noFill/>
+          </a:ln>
+          <a:effectLst/>
+        </p:spPr>
+        <p:style>
+          <a:lnRef idx="1">
+            <a:schemeClr val="accent1"/>
+          </a:lnRef>
+          <a:fillRef idx="3">
+            <a:schemeClr val="accent1"/>
+          </a:fillRef>
+          <a:effectRef idx="2">
+            <a:schemeClr val="accent1"/>
+          </a:effectRef>
+          <a:fontRef idx="minor">
+            <a:schemeClr val="lt1"/>
+          </a:fontRef>
+        </p:style>
+        <p:txBody>
+          <a:bodyPr rtlCol="0" anchor="ctr"/>
+          <a:lstStyle/>
+          <a:p>
+            <a:pPr algn="ctr"/>
+          </a:p>
+        </p:txBody>
+      </p:sp>
+      <p:sp>
+        <p:nvSpPr>
+          <p:cNvPr id="6" name="Rounded Rectangle 5"/>
+          <p:cNvSpPr/>
+          <p:nvPr/>
+        </p:nvSpPr>
+        <p:spPr>
+          <a:xfrm>
+            <a:off x="640080" y="1097280"/>
+            <a:ext cx="10908792" cy="4892040"/>
+          </a:xfrm>
+          <a:prstGeom prst="roundRect">
+            <a:avLst/>
+          </a:prstGeom>
+          <a:solidFill>
+            <a:srgbClr val="F8F9FB"/>
+          </a:solidFill>
+          <a:ln w="15240">
+            <a:solidFill>
+              <a:srgbClr val="0070C0"/>
+            </a:solidFill>
+          </a:ln>
+          <a:effectLst/>
+        </p:spPr>
+        <p:style>
+          <a:lnRef idx="1">
+            <a:schemeClr val="accent1"/>
+          </a:lnRef>
+          <a:fillRef idx="3">
+            <a:schemeClr val="accent1"/>
+          </a:fillRef>
+          <a:effectRef idx="2">
+            <a:schemeClr val="accent1"/>
+          </a:effectRef>
+          <a:fontRef idx="minor">
+            <a:schemeClr val="lt1"/>
+          </a:fontRef>
+        </p:style>
+        <p:txBody>
+          <a:bodyPr rtlCol="0" anchor="ctr"/>
+          <a:lstStyle/>
+          <a:p>
+            <a:pPr algn="ctr"/>
+          </a:p>
+        </p:txBody>
+      </p:sp>
+      <p:sp>
+        <p:nvSpPr>
+          <p:cNvPr id="7" name="TextBox 6"/>
+          <p:cNvSpPr txBox="1"/>
+          <p:nvPr/>
+        </p:nvSpPr>
+        <p:spPr>
+          <a:xfrm>
+            <a:off x="640080" y="2834640"/>
+            <a:ext cx="10908792" cy="548640"/>
+          </a:xfrm>
+          <a:prstGeom prst="rect">
+            <a:avLst/>
+          </a:prstGeom>
+          <a:noFill/>
+        </p:spPr>
+        <p:txBody>
+          <a:bodyPr wrap="square">
+            <a:spAutoFit/>
+          </a:bodyPr>
+          <a:lstStyle/>
+          <a:p>
+            <a:pPr algn="ctr">
+              <a:defRPr sz="2000" b="1">
+                <a:solidFill>
+                  <a:srgbClr val="8C8C9A"/>
+                </a:solidFill>
+                <a:latin typeface="맑은 고딕"/>
+              </a:defRPr>
+            </a:pPr>
+            <a:r>
+              <a:t>🖼  화면 캡처 위치</a:t>
+            </a:r>
+          </a:p>
+        </p:txBody>
+      </p:sp>
+      <p:sp>
+        <p:nvSpPr>
+          <p:cNvPr id="8" name="TextBox 7"/>
+          <p:cNvSpPr txBox="1"/>
+          <p:nvPr/>
+        </p:nvSpPr>
+        <p:spPr>
+          <a:xfrm>
+            <a:off x="640080" y="3474720"/>
+            <a:ext cx="10908792" cy="457200"/>
+          </a:xfrm>
+          <a:prstGeom prst="rect">
+            <a:avLst/>
+          </a:prstGeom>
+          <a:noFill/>
+        </p:spPr>
+        <p:txBody>
+          <a:bodyPr wrap="square">
+            <a:spAutoFit/>
+          </a:bodyPr>
+          <a:lstStyle/>
+          <a:p>
+            <a:pPr algn="ctr">
+              <a:defRPr sz="1300" b="0">
+                <a:solidFill>
+                  <a:srgbClr val="0070C0"/>
+                </a:solidFill>
+                <a:latin typeface="Consolas"/>
+              </a:defRPr>
+            </a:pPr>
+            <a:r>
+              <a:t>docs/images/infrastructure-csv.png</a:t>
+            </a:r>
+          </a:p>
+        </p:txBody>
+      </p:sp>
+      <p:sp>
+        <p:nvSpPr>
+          <p:cNvPr id="9" name="TextBox 8"/>
+          <p:cNvSpPr txBox="1"/>
+          <p:nvPr/>
+        </p:nvSpPr>
+        <p:spPr>
+          <a:xfrm>
+            <a:off x="640080" y="3977640"/>
+            <a:ext cx="10908792" cy="457200"/>
+          </a:xfrm>
+          <a:prstGeom prst="rect">
+            <a:avLst/>
+          </a:prstGeom>
+          <a:noFill/>
+        </p:spPr>
+        <p:txBody>
+          <a:bodyPr wrap="square">
+            <a:spAutoFit/>
+          </a:bodyPr>
+          <a:lstStyle/>
+          <a:p>
+            <a:pPr algn="ctr">
+              <a:defRPr sz="1100" b="0">
+                <a:solidFill>
+                  <a:srgbClr val="8C8C9A"/>
+                </a:solidFill>
+                <a:latin typeface="맑은 고딕"/>
+              </a:defRPr>
+            </a:pPr>
+            <a:r>
+              <a:t>이 파일명으로 저장 후 스크립트를 다시 실행하면 자동 삽입됩니다</a:t>
+            </a:r>
+          </a:p>
+        </p:txBody>
+      </p:sp>
+      <p:sp>
+        <p:nvSpPr>
+          <p:cNvPr id="10" name="TextBox 9"/>
+          <p:cNvSpPr txBox="1"/>
+          <p:nvPr/>
+        </p:nvSpPr>
+        <p:spPr>
+          <a:xfrm>
+            <a:off x="640080" y="6144768"/>
+            <a:ext cx="10908792" cy="502920"/>
+          </a:xfrm>
+          <a:prstGeom prst="rect">
+            <a:avLst/>
+          </a:prstGeom>
+          <a:noFill/>
+        </p:spPr>
+        <p:txBody>
+          <a:bodyPr wrap="square">
+            <a:spAutoFit/>
+          </a:bodyPr>
+          <a:lstStyle/>
+          <a:p>
+            <a:pPr algn="l">
+              <a:defRPr sz="1300" b="0">
+                <a:solidFill>
+                  <a:srgbClr val="5A5A6E"/>
+                </a:solidFill>
+                <a:latin typeface="맑은 고딕"/>
+              </a:defRPr>
+            </a:pPr>
+            <a:r>
+              <a:t>CSV 업로드로 장비 일괄 등록</a:t>
+            </a:r>
+          </a:p>
+        </p:txBody>
+      </p:sp>
+      <p:sp>
+        <p:nvSpPr>
+          <p:cNvPr id="11" name="TextBox 10"/>
+          <p:cNvSpPr txBox="1"/>
+          <p:nvPr/>
+        </p:nvSpPr>
+        <p:spPr>
+          <a:xfrm>
+            <a:off x="10972800" y="6492240"/>
+            <a:ext cx="914400" cy="274320"/>
+          </a:xfrm>
+          <a:prstGeom prst="rect">
+            <a:avLst/>
+          </a:prstGeom>
+          <a:noFill/>
+        </p:spPr>
+        <p:txBody>
+          <a:bodyPr wrap="square">
+            <a:spAutoFit/>
+          </a:bodyPr>
+          <a:lstStyle/>
+          <a:p>
+            <a:pPr algn="r">
+              <a:defRPr sz="1000" b="0">
+                <a:solidFill>
+                  <a:srgbClr val="8C8C9A"/>
+                </a:solidFill>
+                <a:latin typeface="맑은 고딕"/>
+              </a:defRPr>
+            </a:pPr>
+            <a:r>
+              <a:t>38</a:t>
+            </a:r>
+          </a:p>
+        </p:txBody>
+      </p:sp>
+    </p:spTree>
+  </p:cSld>
+  <p:clrMapOvr>
+    <a:masterClrMapping/>
+  </p:clrMapOvr>
+</p:sld>
+</file>
+
+<file path=ppt/slides/slide39.xml><?xml version="1.0" encoding="utf-8"?>
+<p:sld xmlns:a="http://schemas.openxmlformats.org/drawingml/2006/main" xmlns:p="http://schemas.openxmlformats.org/presentationml/2006/main" xmlns:r="http://schemas.openxmlformats.org/officeDocument/2006/relationships">
+  <p:cSld>
+    <p:bg>
+      <p:bgPr>
+        <a:solidFill>
+          <a:srgbClr val="FFFFFF"/>
+        </a:solidFill>
+        <a:effectLst/>
+      </p:bgPr>
+    </p:bg>
+    <p:spTree>
+      <p:nvGrpSpPr>
+        <p:cNvPr id="1" name=""/>
+        <p:cNvGrpSpPr/>
+        <p:nvPr/>
+      </p:nvGrpSpPr>
+      <p:grpSpPr/>
+      <p:sp>
+        <p:nvSpPr>
+          <p:cNvPr id="2" name="Rectangle 1"/>
+          <p:cNvSpPr/>
+          <p:nvPr/>
+        </p:nvSpPr>
+        <p:spPr>
+          <a:xfrm>
+            <a:off x="0" y="0"/>
+            <a:ext cx="12191695" cy="45720"/>
+          </a:xfrm>
+          <a:prstGeom prst="rect">
+            <a:avLst/>
+          </a:prstGeom>
+          <a:solidFill>
+            <a:srgbClr val="0070C0"/>
+          </a:solidFill>
+          <a:ln>
+            <a:noFill/>
+          </a:ln>
+          <a:effectLst/>
+        </p:spPr>
+        <p:style>
+          <a:lnRef idx="1">
+            <a:schemeClr val="accent1"/>
+          </a:lnRef>
+          <a:fillRef idx="3">
+            <a:schemeClr val="accent1"/>
+          </a:fillRef>
+          <a:effectRef idx="2">
+            <a:schemeClr val="accent1"/>
+          </a:effectRef>
+          <a:fontRef idx="minor">
+            <a:schemeClr val="lt1"/>
+          </a:fontRef>
+        </p:style>
+        <p:txBody>
+          <a:bodyPr rtlCol="0" anchor="ctr"/>
+          <a:lstStyle/>
+          <a:p>
+            <a:pPr algn="ctr"/>
+          </a:p>
+        </p:txBody>
+      </p:sp>
+      <p:sp>
+        <p:nvSpPr>
+          <p:cNvPr id="3" name="Rounded Rectangle 2"/>
+          <p:cNvSpPr/>
+          <p:nvPr/>
+        </p:nvSpPr>
+        <p:spPr>
+          <a:xfrm>
+            <a:off x="548640" y="256032"/>
+            <a:ext cx="685800" cy="457200"/>
+          </a:xfrm>
+          <a:prstGeom prst="roundRect">
+            <a:avLst/>
+          </a:prstGeom>
+          <a:solidFill>
+            <a:srgbClr val="0070C0"/>
+          </a:solidFill>
+          <a:ln>
+            <a:noFill/>
+          </a:ln>
+          <a:effectLst/>
+        </p:spPr>
+        <p:style>
+          <a:lnRef idx="1">
+            <a:schemeClr val="accent1"/>
+          </a:lnRef>
+          <a:fillRef idx="3">
+            <a:schemeClr val="accent1"/>
+          </a:fillRef>
+          <a:effectRef idx="2">
+            <a:schemeClr val="accent1"/>
+          </a:effectRef>
+          <a:fontRef idx="minor">
+            <a:schemeClr val="lt1"/>
+          </a:fontRef>
+        </p:style>
+        <p:txBody>
+          <a:bodyPr rtlCol="0" anchor="ctr"/>
+          <a:lstStyle/>
+          <a:p>
+            <a:pPr algn="ctr">
+              <a:defRPr sz="1400" b="1">
+                <a:solidFill>
+                  <a:srgbClr val="FFFFFF"/>
+                </a:solidFill>
+                <a:latin typeface="맑은 고딕"/>
+              </a:defRPr>
+            </a:pPr>
+            <a:r>
+              <a:t>A11</a:t>
+            </a:r>
+          </a:p>
+        </p:txBody>
+      </p:sp>
+      <p:sp>
+        <p:nvSpPr>
+          <p:cNvPr id="4" name="TextBox 3"/>
+          <p:cNvSpPr txBox="1"/>
+          <p:nvPr/>
+        </p:nvSpPr>
+        <p:spPr>
+          <a:xfrm>
+            <a:off x="1371600" y="274320"/>
+            <a:ext cx="10241280" cy="548640"/>
+          </a:xfrm>
+          <a:prstGeom prst="rect">
+            <a:avLst/>
+          </a:prstGeom>
+          <a:noFill/>
+        </p:spPr>
+        <p:txBody>
+          <a:bodyPr wrap="square">
+            <a:spAutoFit/>
+          </a:bodyPr>
+          <a:lstStyle/>
+          <a:p>
+            <a:pPr algn="l">
+              <a:defRPr sz="2200" b="1">
+                <a:solidFill>
+                  <a:srgbClr val="1F1F1F"/>
+                </a:solidFill>
+                <a:latin typeface="맑은 고딕"/>
+              </a:defRPr>
+            </a:pPr>
+            <a:r>
+              <a:t>Digital Twin — 평면도</a:t>
+            </a:r>
+          </a:p>
+        </p:txBody>
+      </p:sp>
+      <p:sp>
+        <p:nvSpPr>
+          <p:cNvPr id="5" name="Rectangle 4"/>
+          <p:cNvSpPr/>
+          <p:nvPr/>
+        </p:nvSpPr>
+        <p:spPr>
+          <a:xfrm>
+            <a:off x="548640" y="841248"/>
+            <a:ext cx="1828800" cy="27432"/>
+          </a:xfrm>
+          <a:prstGeom prst="rect">
+            <a:avLst/>
+          </a:prstGeom>
+          <a:solidFill>
+            <a:srgbClr val="0070C0"/>
+          </a:solidFill>
+          <a:ln>
+            <a:noFill/>
+          </a:ln>
+          <a:effectLst/>
+        </p:spPr>
+        <p:style>
+          <a:lnRef idx="1">
+            <a:schemeClr val="accent1"/>
+          </a:lnRef>
+          <a:fillRef idx="3">
+            <a:schemeClr val="accent1"/>
+          </a:fillRef>
+          <a:effectRef idx="2">
+            <a:schemeClr val="accent1"/>
+          </a:effectRef>
+          <a:fontRef idx="minor">
+            <a:schemeClr val="lt1"/>
+          </a:fontRef>
+        </p:style>
+        <p:txBody>
+          <a:bodyPr rtlCol="0" anchor="ctr"/>
+          <a:lstStyle/>
+          <a:p>
+            <a:pPr algn="ctr"/>
+          </a:p>
+        </p:txBody>
+      </p:sp>
+      <p:sp>
+        <p:nvSpPr>
+          <p:cNvPr id="6" name="Rounded Rectangle 5"/>
+          <p:cNvSpPr/>
+          <p:nvPr/>
+        </p:nvSpPr>
+        <p:spPr>
+          <a:xfrm>
+            <a:off x="640080" y="1097280"/>
+            <a:ext cx="10908792" cy="4892040"/>
+          </a:xfrm>
+          <a:prstGeom prst="roundRect">
+            <a:avLst/>
+          </a:prstGeom>
+          <a:solidFill>
+            <a:srgbClr val="F8F9FB"/>
+          </a:solidFill>
+          <a:ln w="15240">
+            <a:solidFill>
+              <a:srgbClr val="0070C0"/>
+            </a:solidFill>
+          </a:ln>
+          <a:effectLst/>
+        </p:spPr>
+        <p:style>
+          <a:lnRef idx="1">
+            <a:schemeClr val="accent1"/>
+          </a:lnRef>
+          <a:fillRef idx="3">
+            <a:schemeClr val="accent1"/>
+          </a:fillRef>
+          <a:effectRef idx="2">
+            <a:schemeClr val="accent1"/>
+          </a:effectRef>
+          <a:fontRef idx="minor">
+            <a:schemeClr val="lt1"/>
+          </a:fontRef>
+        </p:style>
+        <p:txBody>
+          <a:bodyPr rtlCol="0" anchor="ctr"/>
+          <a:lstStyle/>
+          <a:p>
+            <a:pPr algn="ctr"/>
+          </a:p>
+        </p:txBody>
+      </p:sp>
+      <p:sp>
+        <p:nvSpPr>
+          <p:cNvPr id="7" name="TextBox 6"/>
+          <p:cNvSpPr txBox="1"/>
+          <p:nvPr/>
+        </p:nvSpPr>
+        <p:spPr>
+          <a:xfrm>
+            <a:off x="640080" y="2834640"/>
+            <a:ext cx="10908792" cy="548640"/>
+          </a:xfrm>
+          <a:prstGeom prst="rect">
+            <a:avLst/>
+          </a:prstGeom>
+          <a:noFill/>
+        </p:spPr>
+        <p:txBody>
+          <a:bodyPr wrap="square">
+            <a:spAutoFit/>
+          </a:bodyPr>
+          <a:lstStyle/>
+          <a:p>
+            <a:pPr algn="ctr">
+              <a:defRPr sz="2000" b="1">
+                <a:solidFill>
+                  <a:srgbClr val="8C8C9A"/>
+                </a:solidFill>
+                <a:latin typeface="맑은 고딕"/>
+              </a:defRPr>
+            </a:pPr>
+            <a:r>
+              <a:t>🖼  화면 캡처 위치</a:t>
+            </a:r>
+          </a:p>
+        </p:txBody>
+      </p:sp>
+      <p:sp>
+        <p:nvSpPr>
+          <p:cNvPr id="8" name="TextBox 7"/>
+          <p:cNvSpPr txBox="1"/>
+          <p:nvPr/>
+        </p:nvSpPr>
+        <p:spPr>
+          <a:xfrm>
+            <a:off x="640080" y="3474720"/>
+            <a:ext cx="10908792" cy="457200"/>
+          </a:xfrm>
+          <a:prstGeom prst="rect">
+            <a:avLst/>
+          </a:prstGeom>
+          <a:noFill/>
+        </p:spPr>
+        <p:txBody>
+          <a:bodyPr wrap="square">
+            <a:spAutoFit/>
+          </a:bodyPr>
+          <a:lstStyle/>
+          <a:p>
+            <a:pPr algn="ctr">
+              <a:defRPr sz="1300" b="0">
+                <a:solidFill>
+                  <a:srgbClr val="0070C0"/>
+                </a:solidFill>
+                <a:latin typeface="Consolas"/>
+              </a:defRPr>
+            </a:pPr>
+            <a:r>
+              <a:t>docs/images/digital-twin.png</a:t>
+            </a:r>
+          </a:p>
+        </p:txBody>
+      </p:sp>
+      <p:sp>
+        <p:nvSpPr>
+          <p:cNvPr id="9" name="TextBox 8"/>
+          <p:cNvSpPr txBox="1"/>
+          <p:nvPr/>
+        </p:nvSpPr>
+        <p:spPr>
+          <a:xfrm>
+            <a:off x="640080" y="3977640"/>
+            <a:ext cx="10908792" cy="457200"/>
+          </a:xfrm>
+          <a:prstGeom prst="rect">
+            <a:avLst/>
+          </a:prstGeom>
+          <a:noFill/>
+        </p:spPr>
+        <p:txBody>
+          <a:bodyPr wrap="square">
+            <a:spAutoFit/>
+          </a:bodyPr>
+          <a:lstStyle/>
+          <a:p>
+            <a:pPr algn="ctr">
+              <a:defRPr sz="1100" b="0">
+                <a:solidFill>
+                  <a:srgbClr val="8C8C9A"/>
+                </a:solidFill>
+                <a:latin typeface="맑은 고딕"/>
+              </a:defRPr>
+            </a:pPr>
+            <a:r>
+              <a:t>이 파일명으로 저장 후 스크립트를 다시 실행하면 자동 삽입됩니다</a:t>
+            </a:r>
+          </a:p>
+        </p:txBody>
+      </p:sp>
+      <p:sp>
+        <p:nvSpPr>
+          <p:cNvPr id="10" name="TextBox 9"/>
+          <p:cNvSpPr txBox="1"/>
+          <p:nvPr/>
+        </p:nvSpPr>
+        <p:spPr>
+          <a:xfrm>
+            <a:off x="640080" y="6144768"/>
+            <a:ext cx="10908792" cy="502920"/>
+          </a:xfrm>
+          <a:prstGeom prst="rect">
+            <a:avLst/>
+          </a:prstGeom>
+          <a:noFill/>
+        </p:spPr>
+        <p:txBody>
+          <a:bodyPr wrap="square">
+            <a:spAutoFit/>
+          </a:bodyPr>
+          <a:lstStyle/>
+          <a:p>
+            <a:pPr algn="l">
+              <a:defRPr sz="1300" b="0">
+                <a:solidFill>
+                  <a:srgbClr val="5A5A6E"/>
+                </a:solidFill>
+                <a:latin typeface="맑은 고딕"/>
+              </a:defRPr>
+            </a:pPr>
+            <a:r>
+              <a:t>룸·랙 물리 배치(SVG)</a:t>
+            </a:r>
+          </a:p>
+        </p:txBody>
+      </p:sp>
+      <p:sp>
+        <p:nvSpPr>
+          <p:cNvPr id="11" name="TextBox 10"/>
+          <p:cNvSpPr txBox="1"/>
+          <p:nvPr/>
+        </p:nvSpPr>
+        <p:spPr>
+          <a:xfrm>
+            <a:off x="10972800" y="6492240"/>
+            <a:ext cx="914400" cy="274320"/>
+          </a:xfrm>
+          <a:prstGeom prst="rect">
+            <a:avLst/>
+          </a:prstGeom>
+          <a:noFill/>
+        </p:spPr>
+        <p:txBody>
+          <a:bodyPr wrap="square">
+            <a:spAutoFit/>
+          </a:bodyPr>
+          <a:lstStyle/>
+          <a:p>
+            <a:pPr algn="r">
+              <a:defRPr sz="1000" b="0">
+                <a:solidFill>
+                  <a:srgbClr val="8C8C9A"/>
+                </a:solidFill>
+                <a:latin typeface="맑은 고딕"/>
+              </a:defRPr>
+            </a:pPr>
+            <a:r>
+              <a:t>39</a:t>
+            </a:r>
           </a:p>
         </p:txBody>
       </p:sp>
@@ -14067,6 +19107,4306 @@
 </p:sld>
 </file>
 
+<file path=ppt/slides/slide40.xml><?xml version="1.0" encoding="utf-8"?>
+<p:sld xmlns:a="http://schemas.openxmlformats.org/drawingml/2006/main" xmlns:p="http://schemas.openxmlformats.org/presentationml/2006/main" xmlns:r="http://schemas.openxmlformats.org/officeDocument/2006/relationships">
+  <p:cSld>
+    <p:bg>
+      <p:bgPr>
+        <a:solidFill>
+          <a:srgbClr val="FFFFFF"/>
+        </a:solidFill>
+        <a:effectLst/>
+      </p:bgPr>
+    </p:bg>
+    <p:spTree>
+      <p:nvGrpSpPr>
+        <p:cNvPr id="1" name=""/>
+        <p:cNvGrpSpPr/>
+        <p:nvPr/>
+      </p:nvGrpSpPr>
+      <p:grpSpPr/>
+      <p:sp>
+        <p:nvSpPr>
+          <p:cNvPr id="2" name="Rectangle 1"/>
+          <p:cNvSpPr/>
+          <p:nvPr/>
+        </p:nvSpPr>
+        <p:spPr>
+          <a:xfrm>
+            <a:off x="0" y="0"/>
+            <a:ext cx="12191695" cy="45720"/>
+          </a:xfrm>
+          <a:prstGeom prst="rect">
+            <a:avLst/>
+          </a:prstGeom>
+          <a:solidFill>
+            <a:srgbClr val="0070C0"/>
+          </a:solidFill>
+          <a:ln>
+            <a:noFill/>
+          </a:ln>
+          <a:effectLst/>
+        </p:spPr>
+        <p:style>
+          <a:lnRef idx="1">
+            <a:schemeClr val="accent1"/>
+          </a:lnRef>
+          <a:fillRef idx="3">
+            <a:schemeClr val="accent1"/>
+          </a:fillRef>
+          <a:effectRef idx="2">
+            <a:schemeClr val="accent1"/>
+          </a:effectRef>
+          <a:fontRef idx="minor">
+            <a:schemeClr val="lt1"/>
+          </a:fontRef>
+        </p:style>
+        <p:txBody>
+          <a:bodyPr rtlCol="0" anchor="ctr"/>
+          <a:lstStyle/>
+          <a:p>
+            <a:pPr algn="ctr"/>
+          </a:p>
+        </p:txBody>
+      </p:sp>
+      <p:sp>
+        <p:nvSpPr>
+          <p:cNvPr id="3" name="Rounded Rectangle 2"/>
+          <p:cNvSpPr/>
+          <p:nvPr/>
+        </p:nvSpPr>
+        <p:spPr>
+          <a:xfrm>
+            <a:off x="548640" y="256032"/>
+            <a:ext cx="685800" cy="457200"/>
+          </a:xfrm>
+          <a:prstGeom prst="roundRect">
+            <a:avLst/>
+          </a:prstGeom>
+          <a:solidFill>
+            <a:srgbClr val="0070C0"/>
+          </a:solidFill>
+          <a:ln>
+            <a:noFill/>
+          </a:ln>
+          <a:effectLst/>
+        </p:spPr>
+        <p:style>
+          <a:lnRef idx="1">
+            <a:schemeClr val="accent1"/>
+          </a:lnRef>
+          <a:fillRef idx="3">
+            <a:schemeClr val="accent1"/>
+          </a:fillRef>
+          <a:effectRef idx="2">
+            <a:schemeClr val="accent1"/>
+          </a:effectRef>
+          <a:fontRef idx="minor">
+            <a:schemeClr val="lt1"/>
+          </a:fontRef>
+        </p:style>
+        <p:txBody>
+          <a:bodyPr rtlCol="0" anchor="ctr"/>
+          <a:lstStyle/>
+          <a:p>
+            <a:pPr algn="ctr">
+              <a:defRPr sz="1400" b="1">
+                <a:solidFill>
+                  <a:srgbClr val="FFFFFF"/>
+                </a:solidFill>
+                <a:latin typeface="맑은 고딕"/>
+              </a:defRPr>
+            </a:pPr>
+            <a:r>
+              <a:t>A12</a:t>
+            </a:r>
+          </a:p>
+        </p:txBody>
+      </p:sp>
+      <p:sp>
+        <p:nvSpPr>
+          <p:cNvPr id="4" name="TextBox 3"/>
+          <p:cNvSpPr txBox="1"/>
+          <p:nvPr/>
+        </p:nvSpPr>
+        <p:spPr>
+          <a:xfrm>
+            <a:off x="1371600" y="274320"/>
+            <a:ext cx="10241280" cy="548640"/>
+          </a:xfrm>
+          <a:prstGeom prst="rect">
+            <a:avLst/>
+          </a:prstGeom>
+          <a:noFill/>
+        </p:spPr>
+        <p:txBody>
+          <a:bodyPr wrap="square">
+            <a:spAutoFit/>
+          </a:bodyPr>
+          <a:lstStyle/>
+          <a:p>
+            <a:pPr algn="l">
+              <a:defRPr sz="2200" b="1">
+                <a:solidFill>
+                  <a:srgbClr val="1F1F1F"/>
+                </a:solidFill>
+                <a:latin typeface="맑은 고딕"/>
+              </a:defRPr>
+            </a:pPr>
+            <a:r>
+              <a:t>Digital Twin — 랙/열지도</a:t>
+            </a:r>
+          </a:p>
+        </p:txBody>
+      </p:sp>
+      <p:sp>
+        <p:nvSpPr>
+          <p:cNvPr id="5" name="Rectangle 4"/>
+          <p:cNvSpPr/>
+          <p:nvPr/>
+        </p:nvSpPr>
+        <p:spPr>
+          <a:xfrm>
+            <a:off x="548640" y="841248"/>
+            <a:ext cx="1828800" cy="27432"/>
+          </a:xfrm>
+          <a:prstGeom prst="rect">
+            <a:avLst/>
+          </a:prstGeom>
+          <a:solidFill>
+            <a:srgbClr val="0070C0"/>
+          </a:solidFill>
+          <a:ln>
+            <a:noFill/>
+          </a:ln>
+          <a:effectLst/>
+        </p:spPr>
+        <p:style>
+          <a:lnRef idx="1">
+            <a:schemeClr val="accent1"/>
+          </a:lnRef>
+          <a:fillRef idx="3">
+            <a:schemeClr val="accent1"/>
+          </a:fillRef>
+          <a:effectRef idx="2">
+            <a:schemeClr val="accent1"/>
+          </a:effectRef>
+          <a:fontRef idx="minor">
+            <a:schemeClr val="lt1"/>
+          </a:fontRef>
+        </p:style>
+        <p:txBody>
+          <a:bodyPr rtlCol="0" anchor="ctr"/>
+          <a:lstStyle/>
+          <a:p>
+            <a:pPr algn="ctr"/>
+          </a:p>
+        </p:txBody>
+      </p:sp>
+      <p:sp>
+        <p:nvSpPr>
+          <p:cNvPr id="6" name="Rounded Rectangle 5"/>
+          <p:cNvSpPr/>
+          <p:nvPr/>
+        </p:nvSpPr>
+        <p:spPr>
+          <a:xfrm>
+            <a:off x="640080" y="1097280"/>
+            <a:ext cx="10908792" cy="4892040"/>
+          </a:xfrm>
+          <a:prstGeom prst="roundRect">
+            <a:avLst/>
+          </a:prstGeom>
+          <a:solidFill>
+            <a:srgbClr val="F8F9FB"/>
+          </a:solidFill>
+          <a:ln w="15240">
+            <a:solidFill>
+              <a:srgbClr val="0070C0"/>
+            </a:solidFill>
+          </a:ln>
+          <a:effectLst/>
+        </p:spPr>
+        <p:style>
+          <a:lnRef idx="1">
+            <a:schemeClr val="accent1"/>
+          </a:lnRef>
+          <a:fillRef idx="3">
+            <a:schemeClr val="accent1"/>
+          </a:fillRef>
+          <a:effectRef idx="2">
+            <a:schemeClr val="accent1"/>
+          </a:effectRef>
+          <a:fontRef idx="minor">
+            <a:schemeClr val="lt1"/>
+          </a:fontRef>
+        </p:style>
+        <p:txBody>
+          <a:bodyPr rtlCol="0" anchor="ctr"/>
+          <a:lstStyle/>
+          <a:p>
+            <a:pPr algn="ctr"/>
+          </a:p>
+        </p:txBody>
+      </p:sp>
+      <p:sp>
+        <p:nvSpPr>
+          <p:cNvPr id="7" name="TextBox 6"/>
+          <p:cNvSpPr txBox="1"/>
+          <p:nvPr/>
+        </p:nvSpPr>
+        <p:spPr>
+          <a:xfrm>
+            <a:off x="640080" y="2834640"/>
+            <a:ext cx="10908792" cy="548640"/>
+          </a:xfrm>
+          <a:prstGeom prst="rect">
+            <a:avLst/>
+          </a:prstGeom>
+          <a:noFill/>
+        </p:spPr>
+        <p:txBody>
+          <a:bodyPr wrap="square">
+            <a:spAutoFit/>
+          </a:bodyPr>
+          <a:lstStyle/>
+          <a:p>
+            <a:pPr algn="ctr">
+              <a:defRPr sz="2000" b="1">
+                <a:solidFill>
+                  <a:srgbClr val="8C8C9A"/>
+                </a:solidFill>
+                <a:latin typeface="맑은 고딕"/>
+              </a:defRPr>
+            </a:pPr>
+            <a:r>
+              <a:t>🖼  화면 캡처 위치</a:t>
+            </a:r>
+          </a:p>
+        </p:txBody>
+      </p:sp>
+      <p:sp>
+        <p:nvSpPr>
+          <p:cNvPr id="8" name="TextBox 7"/>
+          <p:cNvSpPr txBox="1"/>
+          <p:nvPr/>
+        </p:nvSpPr>
+        <p:spPr>
+          <a:xfrm>
+            <a:off x="640080" y="3474720"/>
+            <a:ext cx="10908792" cy="457200"/>
+          </a:xfrm>
+          <a:prstGeom prst="rect">
+            <a:avLst/>
+          </a:prstGeom>
+          <a:noFill/>
+        </p:spPr>
+        <p:txBody>
+          <a:bodyPr wrap="square">
+            <a:spAutoFit/>
+          </a:bodyPr>
+          <a:lstStyle/>
+          <a:p>
+            <a:pPr algn="ctr">
+              <a:defRPr sz="1300" b="0">
+                <a:solidFill>
+                  <a:srgbClr val="0070C0"/>
+                </a:solidFill>
+                <a:latin typeface="Consolas"/>
+              </a:defRPr>
+            </a:pPr>
+            <a:r>
+              <a:t>docs/images/digital-twin-rack.png</a:t>
+            </a:r>
+          </a:p>
+        </p:txBody>
+      </p:sp>
+      <p:sp>
+        <p:nvSpPr>
+          <p:cNvPr id="9" name="TextBox 8"/>
+          <p:cNvSpPr txBox="1"/>
+          <p:nvPr/>
+        </p:nvSpPr>
+        <p:spPr>
+          <a:xfrm>
+            <a:off x="640080" y="3977640"/>
+            <a:ext cx="10908792" cy="457200"/>
+          </a:xfrm>
+          <a:prstGeom prst="rect">
+            <a:avLst/>
+          </a:prstGeom>
+          <a:noFill/>
+        </p:spPr>
+        <p:txBody>
+          <a:bodyPr wrap="square">
+            <a:spAutoFit/>
+          </a:bodyPr>
+          <a:lstStyle/>
+          <a:p>
+            <a:pPr algn="ctr">
+              <a:defRPr sz="1100" b="0">
+                <a:solidFill>
+                  <a:srgbClr val="8C8C9A"/>
+                </a:solidFill>
+                <a:latin typeface="맑은 고딕"/>
+              </a:defRPr>
+            </a:pPr>
+            <a:r>
+              <a:t>이 파일명으로 저장 후 스크립트를 다시 실행하면 자동 삽입됩니다</a:t>
+            </a:r>
+          </a:p>
+        </p:txBody>
+      </p:sp>
+      <p:sp>
+        <p:nvSpPr>
+          <p:cNvPr id="10" name="TextBox 9"/>
+          <p:cNvSpPr txBox="1"/>
+          <p:nvPr/>
+        </p:nvSpPr>
+        <p:spPr>
+          <a:xfrm>
+            <a:off x="640080" y="6144768"/>
+            <a:ext cx="10908792" cy="502920"/>
+          </a:xfrm>
+          <a:prstGeom prst="rect">
+            <a:avLst/>
+          </a:prstGeom>
+          <a:noFill/>
+        </p:spPr>
+        <p:txBody>
+          <a:bodyPr wrap="square">
+            <a:spAutoFit/>
+          </a:bodyPr>
+          <a:lstStyle/>
+          <a:p>
+            <a:pPr algn="l">
+              <a:defRPr sz="1300" b="0">
+                <a:solidFill>
+                  <a:srgbClr val="5A5A6E"/>
+                </a:solidFill>
+                <a:latin typeface="맑은 고딕"/>
+              </a:defRPr>
+            </a:pPr>
+            <a:r>
+              <a:t>랙 배치도 + 온도 히트맵</a:t>
+            </a:r>
+          </a:p>
+        </p:txBody>
+      </p:sp>
+      <p:sp>
+        <p:nvSpPr>
+          <p:cNvPr id="11" name="TextBox 10"/>
+          <p:cNvSpPr txBox="1"/>
+          <p:nvPr/>
+        </p:nvSpPr>
+        <p:spPr>
+          <a:xfrm>
+            <a:off x="10972800" y="6492240"/>
+            <a:ext cx="914400" cy="274320"/>
+          </a:xfrm>
+          <a:prstGeom prst="rect">
+            <a:avLst/>
+          </a:prstGeom>
+          <a:noFill/>
+        </p:spPr>
+        <p:txBody>
+          <a:bodyPr wrap="square">
+            <a:spAutoFit/>
+          </a:bodyPr>
+          <a:lstStyle/>
+          <a:p>
+            <a:pPr algn="r">
+              <a:defRPr sz="1000" b="0">
+                <a:solidFill>
+                  <a:srgbClr val="8C8C9A"/>
+                </a:solidFill>
+                <a:latin typeface="맑은 고딕"/>
+              </a:defRPr>
+            </a:pPr>
+            <a:r>
+              <a:t>40</a:t>
+            </a:r>
+          </a:p>
+        </p:txBody>
+      </p:sp>
+    </p:spTree>
+  </p:cSld>
+  <p:clrMapOvr>
+    <a:masterClrMapping/>
+  </p:clrMapOvr>
+</p:sld>
+</file>
+
+<file path=ppt/slides/slide41.xml><?xml version="1.0" encoding="utf-8"?>
+<p:sld xmlns:a="http://schemas.openxmlformats.org/drawingml/2006/main" xmlns:p="http://schemas.openxmlformats.org/presentationml/2006/main" xmlns:r="http://schemas.openxmlformats.org/officeDocument/2006/relationships">
+  <p:cSld>
+    <p:bg>
+      <p:bgPr>
+        <a:solidFill>
+          <a:srgbClr val="FFFFFF"/>
+        </a:solidFill>
+        <a:effectLst/>
+      </p:bgPr>
+    </p:bg>
+    <p:spTree>
+      <p:nvGrpSpPr>
+        <p:cNvPr id="1" name=""/>
+        <p:cNvGrpSpPr/>
+        <p:nvPr/>
+      </p:nvGrpSpPr>
+      <p:grpSpPr/>
+      <p:sp>
+        <p:nvSpPr>
+          <p:cNvPr id="2" name="Rectangle 1"/>
+          <p:cNvSpPr/>
+          <p:nvPr/>
+        </p:nvSpPr>
+        <p:spPr>
+          <a:xfrm>
+            <a:off x="0" y="0"/>
+            <a:ext cx="12191695" cy="45720"/>
+          </a:xfrm>
+          <a:prstGeom prst="rect">
+            <a:avLst/>
+          </a:prstGeom>
+          <a:solidFill>
+            <a:srgbClr val="0070C0"/>
+          </a:solidFill>
+          <a:ln>
+            <a:noFill/>
+          </a:ln>
+          <a:effectLst/>
+        </p:spPr>
+        <p:style>
+          <a:lnRef idx="1">
+            <a:schemeClr val="accent1"/>
+          </a:lnRef>
+          <a:fillRef idx="3">
+            <a:schemeClr val="accent1"/>
+          </a:fillRef>
+          <a:effectRef idx="2">
+            <a:schemeClr val="accent1"/>
+          </a:effectRef>
+          <a:fontRef idx="minor">
+            <a:schemeClr val="lt1"/>
+          </a:fontRef>
+        </p:style>
+        <p:txBody>
+          <a:bodyPr rtlCol="0" anchor="ctr"/>
+          <a:lstStyle/>
+          <a:p>
+            <a:pPr algn="ctr"/>
+          </a:p>
+        </p:txBody>
+      </p:sp>
+      <p:sp>
+        <p:nvSpPr>
+          <p:cNvPr id="3" name="Rounded Rectangle 2"/>
+          <p:cNvSpPr/>
+          <p:nvPr/>
+        </p:nvSpPr>
+        <p:spPr>
+          <a:xfrm>
+            <a:off x="548640" y="256032"/>
+            <a:ext cx="685800" cy="457200"/>
+          </a:xfrm>
+          <a:prstGeom prst="roundRect">
+            <a:avLst/>
+          </a:prstGeom>
+          <a:solidFill>
+            <a:srgbClr val="0070C0"/>
+          </a:solidFill>
+          <a:ln>
+            <a:noFill/>
+          </a:ln>
+          <a:effectLst/>
+        </p:spPr>
+        <p:style>
+          <a:lnRef idx="1">
+            <a:schemeClr val="accent1"/>
+          </a:lnRef>
+          <a:fillRef idx="3">
+            <a:schemeClr val="accent1"/>
+          </a:fillRef>
+          <a:effectRef idx="2">
+            <a:schemeClr val="accent1"/>
+          </a:effectRef>
+          <a:fontRef idx="minor">
+            <a:schemeClr val="lt1"/>
+          </a:fontRef>
+        </p:style>
+        <p:txBody>
+          <a:bodyPr rtlCol="0" anchor="ctr"/>
+          <a:lstStyle/>
+          <a:p>
+            <a:pPr algn="ctr">
+              <a:defRPr sz="1400" b="1">
+                <a:solidFill>
+                  <a:srgbClr val="FFFFFF"/>
+                </a:solidFill>
+                <a:latin typeface="맑은 고딕"/>
+              </a:defRPr>
+            </a:pPr>
+            <a:r>
+              <a:t>A13</a:t>
+            </a:r>
+          </a:p>
+        </p:txBody>
+      </p:sp>
+      <p:sp>
+        <p:nvSpPr>
+          <p:cNvPr id="4" name="TextBox 3"/>
+          <p:cNvSpPr txBox="1"/>
+          <p:nvPr/>
+        </p:nvSpPr>
+        <p:spPr>
+          <a:xfrm>
+            <a:off x="1371600" y="274320"/>
+            <a:ext cx="10241280" cy="548640"/>
+          </a:xfrm>
+          <a:prstGeom prst="rect">
+            <a:avLst/>
+          </a:prstGeom>
+          <a:noFill/>
+        </p:spPr>
+        <p:txBody>
+          <a:bodyPr wrap="square">
+            <a:spAutoFit/>
+          </a:bodyPr>
+          <a:lstStyle/>
+          <a:p>
+            <a:pPr algn="l">
+              <a:defRPr sz="2200" b="1">
+                <a:solidFill>
+                  <a:srgbClr val="1F1F1F"/>
+                </a:solidFill>
+                <a:latin typeface="맑은 고딕"/>
+              </a:defRPr>
+            </a:pPr>
+            <a:r>
+              <a:t>랙 관리</a:t>
+            </a:r>
+          </a:p>
+        </p:txBody>
+      </p:sp>
+      <p:sp>
+        <p:nvSpPr>
+          <p:cNvPr id="5" name="Rectangle 4"/>
+          <p:cNvSpPr/>
+          <p:nvPr/>
+        </p:nvSpPr>
+        <p:spPr>
+          <a:xfrm>
+            <a:off x="548640" y="841248"/>
+            <a:ext cx="1828800" cy="27432"/>
+          </a:xfrm>
+          <a:prstGeom prst="rect">
+            <a:avLst/>
+          </a:prstGeom>
+          <a:solidFill>
+            <a:srgbClr val="0070C0"/>
+          </a:solidFill>
+          <a:ln>
+            <a:noFill/>
+          </a:ln>
+          <a:effectLst/>
+        </p:spPr>
+        <p:style>
+          <a:lnRef idx="1">
+            <a:schemeClr val="accent1"/>
+          </a:lnRef>
+          <a:fillRef idx="3">
+            <a:schemeClr val="accent1"/>
+          </a:fillRef>
+          <a:effectRef idx="2">
+            <a:schemeClr val="accent1"/>
+          </a:effectRef>
+          <a:fontRef idx="minor">
+            <a:schemeClr val="lt1"/>
+          </a:fontRef>
+        </p:style>
+        <p:txBody>
+          <a:bodyPr rtlCol="0" anchor="ctr"/>
+          <a:lstStyle/>
+          <a:p>
+            <a:pPr algn="ctr"/>
+          </a:p>
+        </p:txBody>
+      </p:sp>
+      <p:sp>
+        <p:nvSpPr>
+          <p:cNvPr id="6" name="Rounded Rectangle 5"/>
+          <p:cNvSpPr/>
+          <p:nvPr/>
+        </p:nvSpPr>
+        <p:spPr>
+          <a:xfrm>
+            <a:off x="640080" y="1097280"/>
+            <a:ext cx="10908792" cy="4892040"/>
+          </a:xfrm>
+          <a:prstGeom prst="roundRect">
+            <a:avLst/>
+          </a:prstGeom>
+          <a:solidFill>
+            <a:srgbClr val="F8F9FB"/>
+          </a:solidFill>
+          <a:ln w="15240">
+            <a:solidFill>
+              <a:srgbClr val="0070C0"/>
+            </a:solidFill>
+          </a:ln>
+          <a:effectLst/>
+        </p:spPr>
+        <p:style>
+          <a:lnRef idx="1">
+            <a:schemeClr val="accent1"/>
+          </a:lnRef>
+          <a:fillRef idx="3">
+            <a:schemeClr val="accent1"/>
+          </a:fillRef>
+          <a:effectRef idx="2">
+            <a:schemeClr val="accent1"/>
+          </a:effectRef>
+          <a:fontRef idx="minor">
+            <a:schemeClr val="lt1"/>
+          </a:fontRef>
+        </p:style>
+        <p:txBody>
+          <a:bodyPr rtlCol="0" anchor="ctr"/>
+          <a:lstStyle/>
+          <a:p>
+            <a:pPr algn="ctr"/>
+          </a:p>
+        </p:txBody>
+      </p:sp>
+      <p:sp>
+        <p:nvSpPr>
+          <p:cNvPr id="7" name="TextBox 6"/>
+          <p:cNvSpPr txBox="1"/>
+          <p:nvPr/>
+        </p:nvSpPr>
+        <p:spPr>
+          <a:xfrm>
+            <a:off x="640080" y="2834640"/>
+            <a:ext cx="10908792" cy="548640"/>
+          </a:xfrm>
+          <a:prstGeom prst="rect">
+            <a:avLst/>
+          </a:prstGeom>
+          <a:noFill/>
+        </p:spPr>
+        <p:txBody>
+          <a:bodyPr wrap="square">
+            <a:spAutoFit/>
+          </a:bodyPr>
+          <a:lstStyle/>
+          <a:p>
+            <a:pPr algn="ctr">
+              <a:defRPr sz="2000" b="1">
+                <a:solidFill>
+                  <a:srgbClr val="8C8C9A"/>
+                </a:solidFill>
+                <a:latin typeface="맑은 고딕"/>
+              </a:defRPr>
+            </a:pPr>
+            <a:r>
+              <a:t>🖼  화면 캡처 위치</a:t>
+            </a:r>
+          </a:p>
+        </p:txBody>
+      </p:sp>
+      <p:sp>
+        <p:nvSpPr>
+          <p:cNvPr id="8" name="TextBox 7"/>
+          <p:cNvSpPr txBox="1"/>
+          <p:nvPr/>
+        </p:nvSpPr>
+        <p:spPr>
+          <a:xfrm>
+            <a:off x="640080" y="3474720"/>
+            <a:ext cx="10908792" cy="457200"/>
+          </a:xfrm>
+          <a:prstGeom prst="rect">
+            <a:avLst/>
+          </a:prstGeom>
+          <a:noFill/>
+        </p:spPr>
+        <p:txBody>
+          <a:bodyPr wrap="square">
+            <a:spAutoFit/>
+          </a:bodyPr>
+          <a:lstStyle/>
+          <a:p>
+            <a:pPr algn="ctr">
+              <a:defRPr sz="1300" b="0">
+                <a:solidFill>
+                  <a:srgbClr val="0070C0"/>
+                </a:solidFill>
+                <a:latin typeface="Consolas"/>
+              </a:defRPr>
+            </a:pPr>
+            <a:r>
+              <a:t>docs/images/rack-management.png</a:t>
+            </a:r>
+          </a:p>
+        </p:txBody>
+      </p:sp>
+      <p:sp>
+        <p:nvSpPr>
+          <p:cNvPr id="9" name="TextBox 8"/>
+          <p:cNvSpPr txBox="1"/>
+          <p:nvPr/>
+        </p:nvSpPr>
+        <p:spPr>
+          <a:xfrm>
+            <a:off x="640080" y="3977640"/>
+            <a:ext cx="10908792" cy="457200"/>
+          </a:xfrm>
+          <a:prstGeom prst="rect">
+            <a:avLst/>
+          </a:prstGeom>
+          <a:noFill/>
+        </p:spPr>
+        <p:txBody>
+          <a:bodyPr wrap="square">
+            <a:spAutoFit/>
+          </a:bodyPr>
+          <a:lstStyle/>
+          <a:p>
+            <a:pPr algn="ctr">
+              <a:defRPr sz="1100" b="0">
+                <a:solidFill>
+                  <a:srgbClr val="8C8C9A"/>
+                </a:solidFill>
+                <a:latin typeface="맑은 고딕"/>
+              </a:defRPr>
+            </a:pPr>
+            <a:r>
+              <a:t>이 파일명으로 저장 후 스크립트를 다시 실행하면 자동 삽입됩니다</a:t>
+            </a:r>
+          </a:p>
+        </p:txBody>
+      </p:sp>
+      <p:sp>
+        <p:nvSpPr>
+          <p:cNvPr id="10" name="TextBox 9"/>
+          <p:cNvSpPr txBox="1"/>
+          <p:nvPr/>
+        </p:nvSpPr>
+        <p:spPr>
+          <a:xfrm>
+            <a:off x="640080" y="6144768"/>
+            <a:ext cx="10908792" cy="502920"/>
+          </a:xfrm>
+          <a:prstGeom prst="rect">
+            <a:avLst/>
+          </a:prstGeom>
+          <a:noFill/>
+        </p:spPr>
+        <p:txBody>
+          <a:bodyPr wrap="square">
+            <a:spAutoFit/>
+          </a:bodyPr>
+          <a:lstStyle/>
+          <a:p>
+            <a:pPr algn="l">
+              <a:defRPr sz="1300" b="0">
+                <a:solidFill>
+                  <a:srgbClr val="5A5A6E"/>
+                </a:solidFill>
+                <a:latin typeface="맑은 고딕"/>
+              </a:defRPr>
+            </a:pPr>
+            <a:r>
+              <a:t>랙 배치·드래그&amp;드롭</a:t>
+            </a:r>
+          </a:p>
+        </p:txBody>
+      </p:sp>
+      <p:sp>
+        <p:nvSpPr>
+          <p:cNvPr id="11" name="TextBox 10"/>
+          <p:cNvSpPr txBox="1"/>
+          <p:nvPr/>
+        </p:nvSpPr>
+        <p:spPr>
+          <a:xfrm>
+            <a:off x="10972800" y="6492240"/>
+            <a:ext cx="914400" cy="274320"/>
+          </a:xfrm>
+          <a:prstGeom prst="rect">
+            <a:avLst/>
+          </a:prstGeom>
+          <a:noFill/>
+        </p:spPr>
+        <p:txBody>
+          <a:bodyPr wrap="square">
+            <a:spAutoFit/>
+          </a:bodyPr>
+          <a:lstStyle/>
+          <a:p>
+            <a:pPr algn="r">
+              <a:defRPr sz="1000" b="0">
+                <a:solidFill>
+                  <a:srgbClr val="8C8C9A"/>
+                </a:solidFill>
+                <a:latin typeface="맑은 고딕"/>
+              </a:defRPr>
+            </a:pPr>
+            <a:r>
+              <a:t>41</a:t>
+            </a:r>
+          </a:p>
+        </p:txBody>
+      </p:sp>
+    </p:spTree>
+  </p:cSld>
+  <p:clrMapOvr>
+    <a:masterClrMapping/>
+  </p:clrMapOvr>
+</p:sld>
+</file>
+
+<file path=ppt/slides/slide42.xml><?xml version="1.0" encoding="utf-8"?>
+<p:sld xmlns:a="http://schemas.openxmlformats.org/drawingml/2006/main" xmlns:p="http://schemas.openxmlformats.org/presentationml/2006/main" xmlns:r="http://schemas.openxmlformats.org/officeDocument/2006/relationships">
+  <p:cSld>
+    <p:bg>
+      <p:bgPr>
+        <a:solidFill>
+          <a:srgbClr val="FFFFFF"/>
+        </a:solidFill>
+        <a:effectLst/>
+      </p:bgPr>
+    </p:bg>
+    <p:spTree>
+      <p:nvGrpSpPr>
+        <p:cNvPr id="1" name=""/>
+        <p:cNvGrpSpPr/>
+        <p:nvPr/>
+      </p:nvGrpSpPr>
+      <p:grpSpPr/>
+      <p:sp>
+        <p:nvSpPr>
+          <p:cNvPr id="2" name="Rectangle 1"/>
+          <p:cNvSpPr/>
+          <p:nvPr/>
+        </p:nvSpPr>
+        <p:spPr>
+          <a:xfrm>
+            <a:off x="0" y="0"/>
+            <a:ext cx="12191695" cy="45720"/>
+          </a:xfrm>
+          <a:prstGeom prst="rect">
+            <a:avLst/>
+          </a:prstGeom>
+          <a:solidFill>
+            <a:srgbClr val="0070C0"/>
+          </a:solidFill>
+          <a:ln>
+            <a:noFill/>
+          </a:ln>
+          <a:effectLst/>
+        </p:spPr>
+        <p:style>
+          <a:lnRef idx="1">
+            <a:schemeClr val="accent1"/>
+          </a:lnRef>
+          <a:fillRef idx="3">
+            <a:schemeClr val="accent1"/>
+          </a:fillRef>
+          <a:effectRef idx="2">
+            <a:schemeClr val="accent1"/>
+          </a:effectRef>
+          <a:fontRef idx="minor">
+            <a:schemeClr val="lt1"/>
+          </a:fontRef>
+        </p:style>
+        <p:txBody>
+          <a:bodyPr rtlCol="0" anchor="ctr"/>
+          <a:lstStyle/>
+          <a:p>
+            <a:pPr algn="ctr"/>
+          </a:p>
+        </p:txBody>
+      </p:sp>
+      <p:sp>
+        <p:nvSpPr>
+          <p:cNvPr id="3" name="Rounded Rectangle 2"/>
+          <p:cNvSpPr/>
+          <p:nvPr/>
+        </p:nvSpPr>
+        <p:spPr>
+          <a:xfrm>
+            <a:off x="548640" y="256032"/>
+            <a:ext cx="685800" cy="457200"/>
+          </a:xfrm>
+          <a:prstGeom prst="roundRect">
+            <a:avLst/>
+          </a:prstGeom>
+          <a:solidFill>
+            <a:srgbClr val="0070C0"/>
+          </a:solidFill>
+          <a:ln>
+            <a:noFill/>
+          </a:ln>
+          <a:effectLst/>
+        </p:spPr>
+        <p:style>
+          <a:lnRef idx="1">
+            <a:schemeClr val="accent1"/>
+          </a:lnRef>
+          <a:fillRef idx="3">
+            <a:schemeClr val="accent1"/>
+          </a:fillRef>
+          <a:effectRef idx="2">
+            <a:schemeClr val="accent1"/>
+          </a:effectRef>
+          <a:fontRef idx="minor">
+            <a:schemeClr val="lt1"/>
+          </a:fontRef>
+        </p:style>
+        <p:txBody>
+          <a:bodyPr rtlCol="0" anchor="ctr"/>
+          <a:lstStyle/>
+          <a:p>
+            <a:pPr algn="ctr">
+              <a:defRPr sz="1400" b="1">
+                <a:solidFill>
+                  <a:srgbClr val="FFFFFF"/>
+                </a:solidFill>
+                <a:latin typeface="맑은 고딕"/>
+              </a:defRPr>
+            </a:pPr>
+            <a:r>
+              <a:t>A14</a:t>
+            </a:r>
+          </a:p>
+        </p:txBody>
+      </p:sp>
+      <p:sp>
+        <p:nvSpPr>
+          <p:cNvPr id="4" name="TextBox 3"/>
+          <p:cNvSpPr txBox="1"/>
+          <p:nvPr/>
+        </p:nvSpPr>
+        <p:spPr>
+          <a:xfrm>
+            <a:off x="1371600" y="274320"/>
+            <a:ext cx="10241280" cy="548640"/>
+          </a:xfrm>
+          <a:prstGeom prst="rect">
+            <a:avLst/>
+          </a:prstGeom>
+          <a:noFill/>
+        </p:spPr>
+        <p:txBody>
+          <a:bodyPr wrap="square">
+            <a:spAutoFit/>
+          </a:bodyPr>
+          <a:lstStyle/>
+          <a:p>
+            <a:pPr algn="l">
+              <a:defRPr sz="2200" b="1">
+                <a:solidFill>
+                  <a:srgbClr val="1F1F1F"/>
+                </a:solidFill>
+                <a:latin typeface="맑은 고딕"/>
+              </a:defRPr>
+            </a:pPr>
+            <a:r>
+              <a:t>펌웨어 관리</a:t>
+            </a:r>
+          </a:p>
+        </p:txBody>
+      </p:sp>
+      <p:sp>
+        <p:nvSpPr>
+          <p:cNvPr id="5" name="Rectangle 4"/>
+          <p:cNvSpPr/>
+          <p:nvPr/>
+        </p:nvSpPr>
+        <p:spPr>
+          <a:xfrm>
+            <a:off x="548640" y="841248"/>
+            <a:ext cx="1828800" cy="27432"/>
+          </a:xfrm>
+          <a:prstGeom prst="rect">
+            <a:avLst/>
+          </a:prstGeom>
+          <a:solidFill>
+            <a:srgbClr val="0070C0"/>
+          </a:solidFill>
+          <a:ln>
+            <a:noFill/>
+          </a:ln>
+          <a:effectLst/>
+        </p:spPr>
+        <p:style>
+          <a:lnRef idx="1">
+            <a:schemeClr val="accent1"/>
+          </a:lnRef>
+          <a:fillRef idx="3">
+            <a:schemeClr val="accent1"/>
+          </a:fillRef>
+          <a:effectRef idx="2">
+            <a:schemeClr val="accent1"/>
+          </a:effectRef>
+          <a:fontRef idx="minor">
+            <a:schemeClr val="lt1"/>
+          </a:fontRef>
+        </p:style>
+        <p:txBody>
+          <a:bodyPr rtlCol="0" anchor="ctr"/>
+          <a:lstStyle/>
+          <a:p>
+            <a:pPr algn="ctr"/>
+          </a:p>
+        </p:txBody>
+      </p:sp>
+      <p:sp>
+        <p:nvSpPr>
+          <p:cNvPr id="6" name="Rounded Rectangle 5"/>
+          <p:cNvSpPr/>
+          <p:nvPr/>
+        </p:nvSpPr>
+        <p:spPr>
+          <a:xfrm>
+            <a:off x="640080" y="1097280"/>
+            <a:ext cx="10908792" cy="4892040"/>
+          </a:xfrm>
+          <a:prstGeom prst="roundRect">
+            <a:avLst/>
+          </a:prstGeom>
+          <a:solidFill>
+            <a:srgbClr val="F8F9FB"/>
+          </a:solidFill>
+          <a:ln w="15240">
+            <a:solidFill>
+              <a:srgbClr val="0070C0"/>
+            </a:solidFill>
+          </a:ln>
+          <a:effectLst/>
+        </p:spPr>
+        <p:style>
+          <a:lnRef idx="1">
+            <a:schemeClr val="accent1"/>
+          </a:lnRef>
+          <a:fillRef idx="3">
+            <a:schemeClr val="accent1"/>
+          </a:fillRef>
+          <a:effectRef idx="2">
+            <a:schemeClr val="accent1"/>
+          </a:effectRef>
+          <a:fontRef idx="minor">
+            <a:schemeClr val="lt1"/>
+          </a:fontRef>
+        </p:style>
+        <p:txBody>
+          <a:bodyPr rtlCol="0" anchor="ctr"/>
+          <a:lstStyle/>
+          <a:p>
+            <a:pPr algn="ctr"/>
+          </a:p>
+        </p:txBody>
+      </p:sp>
+      <p:sp>
+        <p:nvSpPr>
+          <p:cNvPr id="7" name="TextBox 6"/>
+          <p:cNvSpPr txBox="1"/>
+          <p:nvPr/>
+        </p:nvSpPr>
+        <p:spPr>
+          <a:xfrm>
+            <a:off x="640080" y="2834640"/>
+            <a:ext cx="10908792" cy="548640"/>
+          </a:xfrm>
+          <a:prstGeom prst="rect">
+            <a:avLst/>
+          </a:prstGeom>
+          <a:noFill/>
+        </p:spPr>
+        <p:txBody>
+          <a:bodyPr wrap="square">
+            <a:spAutoFit/>
+          </a:bodyPr>
+          <a:lstStyle/>
+          <a:p>
+            <a:pPr algn="ctr">
+              <a:defRPr sz="2000" b="1">
+                <a:solidFill>
+                  <a:srgbClr val="8C8C9A"/>
+                </a:solidFill>
+                <a:latin typeface="맑은 고딕"/>
+              </a:defRPr>
+            </a:pPr>
+            <a:r>
+              <a:t>🖼  화면 캡처 위치</a:t>
+            </a:r>
+          </a:p>
+        </p:txBody>
+      </p:sp>
+      <p:sp>
+        <p:nvSpPr>
+          <p:cNvPr id="8" name="TextBox 7"/>
+          <p:cNvSpPr txBox="1"/>
+          <p:nvPr/>
+        </p:nvSpPr>
+        <p:spPr>
+          <a:xfrm>
+            <a:off x="640080" y="3474720"/>
+            <a:ext cx="10908792" cy="457200"/>
+          </a:xfrm>
+          <a:prstGeom prst="rect">
+            <a:avLst/>
+          </a:prstGeom>
+          <a:noFill/>
+        </p:spPr>
+        <p:txBody>
+          <a:bodyPr wrap="square">
+            <a:spAutoFit/>
+          </a:bodyPr>
+          <a:lstStyle/>
+          <a:p>
+            <a:pPr algn="ctr">
+              <a:defRPr sz="1300" b="0">
+                <a:solidFill>
+                  <a:srgbClr val="0070C0"/>
+                </a:solidFill>
+                <a:latin typeface="Consolas"/>
+              </a:defRPr>
+            </a:pPr>
+            <a:r>
+              <a:t>docs/images/firmware.png</a:t>
+            </a:r>
+          </a:p>
+        </p:txBody>
+      </p:sp>
+      <p:sp>
+        <p:nvSpPr>
+          <p:cNvPr id="9" name="TextBox 8"/>
+          <p:cNvSpPr txBox="1"/>
+          <p:nvPr/>
+        </p:nvSpPr>
+        <p:spPr>
+          <a:xfrm>
+            <a:off x="640080" y="3977640"/>
+            <a:ext cx="10908792" cy="457200"/>
+          </a:xfrm>
+          <a:prstGeom prst="rect">
+            <a:avLst/>
+          </a:prstGeom>
+          <a:noFill/>
+        </p:spPr>
+        <p:txBody>
+          <a:bodyPr wrap="square">
+            <a:spAutoFit/>
+          </a:bodyPr>
+          <a:lstStyle/>
+          <a:p>
+            <a:pPr algn="ctr">
+              <a:defRPr sz="1100" b="0">
+                <a:solidFill>
+                  <a:srgbClr val="8C8C9A"/>
+                </a:solidFill>
+                <a:latin typeface="맑은 고딕"/>
+              </a:defRPr>
+            </a:pPr>
+            <a:r>
+              <a:t>이 파일명으로 저장 후 스크립트를 다시 실행하면 자동 삽입됩니다</a:t>
+            </a:r>
+          </a:p>
+        </p:txBody>
+      </p:sp>
+      <p:sp>
+        <p:nvSpPr>
+          <p:cNvPr id="10" name="TextBox 9"/>
+          <p:cNvSpPr txBox="1"/>
+          <p:nvPr/>
+        </p:nvSpPr>
+        <p:spPr>
+          <a:xfrm>
+            <a:off x="640080" y="6144768"/>
+            <a:ext cx="10908792" cy="502920"/>
+          </a:xfrm>
+          <a:prstGeom prst="rect">
+            <a:avLst/>
+          </a:prstGeom>
+          <a:noFill/>
+        </p:spPr>
+        <p:txBody>
+          <a:bodyPr wrap="square">
+            <a:spAutoFit/>
+          </a:bodyPr>
+          <a:lstStyle/>
+          <a:p>
+            <a:pPr algn="l">
+              <a:defRPr sz="1300" b="0">
+                <a:solidFill>
+                  <a:srgbClr val="5A5A6E"/>
+                </a:solidFill>
+                <a:latin typeface="맑은 고딕"/>
+              </a:defRPr>
+            </a:pPr>
+            <a:r>
+              <a:t>모델별 BIOS/펌웨어 버전 비교</a:t>
+            </a:r>
+          </a:p>
+        </p:txBody>
+      </p:sp>
+      <p:sp>
+        <p:nvSpPr>
+          <p:cNvPr id="11" name="TextBox 10"/>
+          <p:cNvSpPr txBox="1"/>
+          <p:nvPr/>
+        </p:nvSpPr>
+        <p:spPr>
+          <a:xfrm>
+            <a:off x="10972800" y="6492240"/>
+            <a:ext cx="914400" cy="274320"/>
+          </a:xfrm>
+          <a:prstGeom prst="rect">
+            <a:avLst/>
+          </a:prstGeom>
+          <a:noFill/>
+        </p:spPr>
+        <p:txBody>
+          <a:bodyPr wrap="square">
+            <a:spAutoFit/>
+          </a:bodyPr>
+          <a:lstStyle/>
+          <a:p>
+            <a:pPr algn="r">
+              <a:defRPr sz="1000" b="0">
+                <a:solidFill>
+                  <a:srgbClr val="8C8C9A"/>
+                </a:solidFill>
+                <a:latin typeface="맑은 고딕"/>
+              </a:defRPr>
+            </a:pPr>
+            <a:r>
+              <a:t>42</a:t>
+            </a:r>
+          </a:p>
+        </p:txBody>
+      </p:sp>
+    </p:spTree>
+  </p:cSld>
+  <p:clrMapOvr>
+    <a:masterClrMapping/>
+  </p:clrMapOvr>
+</p:sld>
+</file>
+
+<file path=ppt/slides/slide43.xml><?xml version="1.0" encoding="utf-8"?>
+<p:sld xmlns:a="http://schemas.openxmlformats.org/drawingml/2006/main" xmlns:p="http://schemas.openxmlformats.org/presentationml/2006/main" xmlns:r="http://schemas.openxmlformats.org/officeDocument/2006/relationships">
+  <p:cSld>
+    <p:bg>
+      <p:bgPr>
+        <a:solidFill>
+          <a:srgbClr val="FFFFFF"/>
+        </a:solidFill>
+        <a:effectLst/>
+      </p:bgPr>
+    </p:bg>
+    <p:spTree>
+      <p:nvGrpSpPr>
+        <p:cNvPr id="1" name=""/>
+        <p:cNvGrpSpPr/>
+        <p:nvPr/>
+      </p:nvGrpSpPr>
+      <p:grpSpPr/>
+      <p:sp>
+        <p:nvSpPr>
+          <p:cNvPr id="2" name="Rectangle 1"/>
+          <p:cNvSpPr/>
+          <p:nvPr/>
+        </p:nvSpPr>
+        <p:spPr>
+          <a:xfrm>
+            <a:off x="0" y="0"/>
+            <a:ext cx="12191695" cy="45720"/>
+          </a:xfrm>
+          <a:prstGeom prst="rect">
+            <a:avLst/>
+          </a:prstGeom>
+          <a:solidFill>
+            <a:srgbClr val="0070C0"/>
+          </a:solidFill>
+          <a:ln>
+            <a:noFill/>
+          </a:ln>
+          <a:effectLst/>
+        </p:spPr>
+        <p:style>
+          <a:lnRef idx="1">
+            <a:schemeClr val="accent1"/>
+          </a:lnRef>
+          <a:fillRef idx="3">
+            <a:schemeClr val="accent1"/>
+          </a:fillRef>
+          <a:effectRef idx="2">
+            <a:schemeClr val="accent1"/>
+          </a:effectRef>
+          <a:fontRef idx="minor">
+            <a:schemeClr val="lt1"/>
+          </a:fontRef>
+        </p:style>
+        <p:txBody>
+          <a:bodyPr rtlCol="0" anchor="ctr"/>
+          <a:lstStyle/>
+          <a:p>
+            <a:pPr algn="ctr"/>
+          </a:p>
+        </p:txBody>
+      </p:sp>
+      <p:sp>
+        <p:nvSpPr>
+          <p:cNvPr id="3" name="Rounded Rectangle 2"/>
+          <p:cNvSpPr/>
+          <p:nvPr/>
+        </p:nvSpPr>
+        <p:spPr>
+          <a:xfrm>
+            <a:off x="548640" y="256032"/>
+            <a:ext cx="685800" cy="457200"/>
+          </a:xfrm>
+          <a:prstGeom prst="roundRect">
+            <a:avLst/>
+          </a:prstGeom>
+          <a:solidFill>
+            <a:srgbClr val="0070C0"/>
+          </a:solidFill>
+          <a:ln>
+            <a:noFill/>
+          </a:ln>
+          <a:effectLst/>
+        </p:spPr>
+        <p:style>
+          <a:lnRef idx="1">
+            <a:schemeClr val="accent1"/>
+          </a:lnRef>
+          <a:fillRef idx="3">
+            <a:schemeClr val="accent1"/>
+          </a:fillRef>
+          <a:effectRef idx="2">
+            <a:schemeClr val="accent1"/>
+          </a:effectRef>
+          <a:fontRef idx="minor">
+            <a:schemeClr val="lt1"/>
+          </a:fontRef>
+        </p:style>
+        <p:txBody>
+          <a:bodyPr rtlCol="0" anchor="ctr"/>
+          <a:lstStyle/>
+          <a:p>
+            <a:pPr algn="ctr">
+              <a:defRPr sz="1400" b="1">
+                <a:solidFill>
+                  <a:srgbClr val="FFFFFF"/>
+                </a:solidFill>
+                <a:latin typeface="맑은 고딕"/>
+              </a:defRPr>
+            </a:pPr>
+            <a:r>
+              <a:t>A15</a:t>
+            </a:r>
+          </a:p>
+        </p:txBody>
+      </p:sp>
+      <p:sp>
+        <p:nvSpPr>
+          <p:cNvPr id="4" name="TextBox 3"/>
+          <p:cNvSpPr txBox="1"/>
+          <p:nvPr/>
+        </p:nvSpPr>
+        <p:spPr>
+          <a:xfrm>
+            <a:off x="1371600" y="274320"/>
+            <a:ext cx="10241280" cy="548640"/>
+          </a:xfrm>
+          <a:prstGeom prst="rect">
+            <a:avLst/>
+          </a:prstGeom>
+          <a:noFill/>
+        </p:spPr>
+        <p:txBody>
+          <a:bodyPr wrap="square">
+            <a:spAutoFit/>
+          </a:bodyPr>
+          <a:lstStyle/>
+          <a:p>
+            <a:pPr algn="l">
+              <a:defRPr sz="2200" b="1">
+                <a:solidFill>
+                  <a:srgbClr val="1F1F1F"/>
+                </a:solidFill>
+                <a:latin typeface="맑은 고딕"/>
+              </a:defRPr>
+            </a:pPr>
+            <a:r>
+              <a:t>워크로드</a:t>
+            </a:r>
+          </a:p>
+        </p:txBody>
+      </p:sp>
+      <p:sp>
+        <p:nvSpPr>
+          <p:cNvPr id="5" name="Rectangle 4"/>
+          <p:cNvSpPr/>
+          <p:nvPr/>
+        </p:nvSpPr>
+        <p:spPr>
+          <a:xfrm>
+            <a:off x="548640" y="841248"/>
+            <a:ext cx="1828800" cy="27432"/>
+          </a:xfrm>
+          <a:prstGeom prst="rect">
+            <a:avLst/>
+          </a:prstGeom>
+          <a:solidFill>
+            <a:srgbClr val="0070C0"/>
+          </a:solidFill>
+          <a:ln>
+            <a:noFill/>
+          </a:ln>
+          <a:effectLst/>
+        </p:spPr>
+        <p:style>
+          <a:lnRef idx="1">
+            <a:schemeClr val="accent1"/>
+          </a:lnRef>
+          <a:fillRef idx="3">
+            <a:schemeClr val="accent1"/>
+          </a:fillRef>
+          <a:effectRef idx="2">
+            <a:schemeClr val="accent1"/>
+          </a:effectRef>
+          <a:fontRef idx="minor">
+            <a:schemeClr val="lt1"/>
+          </a:fontRef>
+        </p:style>
+        <p:txBody>
+          <a:bodyPr rtlCol="0" anchor="ctr"/>
+          <a:lstStyle/>
+          <a:p>
+            <a:pPr algn="ctr"/>
+          </a:p>
+        </p:txBody>
+      </p:sp>
+      <p:sp>
+        <p:nvSpPr>
+          <p:cNvPr id="6" name="Rounded Rectangle 5"/>
+          <p:cNvSpPr/>
+          <p:nvPr/>
+        </p:nvSpPr>
+        <p:spPr>
+          <a:xfrm>
+            <a:off x="640080" y="1097280"/>
+            <a:ext cx="10908792" cy="4892040"/>
+          </a:xfrm>
+          <a:prstGeom prst="roundRect">
+            <a:avLst/>
+          </a:prstGeom>
+          <a:solidFill>
+            <a:srgbClr val="F8F9FB"/>
+          </a:solidFill>
+          <a:ln w="15240">
+            <a:solidFill>
+              <a:srgbClr val="0070C0"/>
+            </a:solidFill>
+          </a:ln>
+          <a:effectLst/>
+        </p:spPr>
+        <p:style>
+          <a:lnRef idx="1">
+            <a:schemeClr val="accent1"/>
+          </a:lnRef>
+          <a:fillRef idx="3">
+            <a:schemeClr val="accent1"/>
+          </a:fillRef>
+          <a:effectRef idx="2">
+            <a:schemeClr val="accent1"/>
+          </a:effectRef>
+          <a:fontRef idx="minor">
+            <a:schemeClr val="lt1"/>
+          </a:fontRef>
+        </p:style>
+        <p:txBody>
+          <a:bodyPr rtlCol="0" anchor="ctr"/>
+          <a:lstStyle/>
+          <a:p>
+            <a:pPr algn="ctr"/>
+          </a:p>
+        </p:txBody>
+      </p:sp>
+      <p:sp>
+        <p:nvSpPr>
+          <p:cNvPr id="7" name="TextBox 6"/>
+          <p:cNvSpPr txBox="1"/>
+          <p:nvPr/>
+        </p:nvSpPr>
+        <p:spPr>
+          <a:xfrm>
+            <a:off x="640080" y="2834640"/>
+            <a:ext cx="10908792" cy="548640"/>
+          </a:xfrm>
+          <a:prstGeom prst="rect">
+            <a:avLst/>
+          </a:prstGeom>
+          <a:noFill/>
+        </p:spPr>
+        <p:txBody>
+          <a:bodyPr wrap="square">
+            <a:spAutoFit/>
+          </a:bodyPr>
+          <a:lstStyle/>
+          <a:p>
+            <a:pPr algn="ctr">
+              <a:defRPr sz="2000" b="1">
+                <a:solidFill>
+                  <a:srgbClr val="8C8C9A"/>
+                </a:solidFill>
+                <a:latin typeface="맑은 고딕"/>
+              </a:defRPr>
+            </a:pPr>
+            <a:r>
+              <a:t>🖼  화면 캡처 위치</a:t>
+            </a:r>
+          </a:p>
+        </p:txBody>
+      </p:sp>
+      <p:sp>
+        <p:nvSpPr>
+          <p:cNvPr id="8" name="TextBox 7"/>
+          <p:cNvSpPr txBox="1"/>
+          <p:nvPr/>
+        </p:nvSpPr>
+        <p:spPr>
+          <a:xfrm>
+            <a:off x="640080" y="3474720"/>
+            <a:ext cx="10908792" cy="457200"/>
+          </a:xfrm>
+          <a:prstGeom prst="rect">
+            <a:avLst/>
+          </a:prstGeom>
+          <a:noFill/>
+        </p:spPr>
+        <p:txBody>
+          <a:bodyPr wrap="square">
+            <a:spAutoFit/>
+          </a:bodyPr>
+          <a:lstStyle/>
+          <a:p>
+            <a:pPr algn="ctr">
+              <a:defRPr sz="1300" b="0">
+                <a:solidFill>
+                  <a:srgbClr val="0070C0"/>
+                </a:solidFill>
+                <a:latin typeface="Consolas"/>
+              </a:defRPr>
+            </a:pPr>
+            <a:r>
+              <a:t>docs/images/workloads.png</a:t>
+            </a:r>
+          </a:p>
+        </p:txBody>
+      </p:sp>
+      <p:sp>
+        <p:nvSpPr>
+          <p:cNvPr id="9" name="TextBox 8"/>
+          <p:cNvSpPr txBox="1"/>
+          <p:nvPr/>
+        </p:nvSpPr>
+        <p:spPr>
+          <a:xfrm>
+            <a:off x="640080" y="3977640"/>
+            <a:ext cx="10908792" cy="457200"/>
+          </a:xfrm>
+          <a:prstGeom prst="rect">
+            <a:avLst/>
+          </a:prstGeom>
+          <a:noFill/>
+        </p:spPr>
+        <p:txBody>
+          <a:bodyPr wrap="square">
+            <a:spAutoFit/>
+          </a:bodyPr>
+          <a:lstStyle/>
+          <a:p>
+            <a:pPr algn="ctr">
+              <a:defRPr sz="1100" b="0">
+                <a:solidFill>
+                  <a:srgbClr val="8C8C9A"/>
+                </a:solidFill>
+                <a:latin typeface="맑은 고딕"/>
+              </a:defRPr>
+            </a:pPr>
+            <a:r>
+              <a:t>이 파일명으로 저장 후 스크립트를 다시 실행하면 자동 삽입됩니다</a:t>
+            </a:r>
+          </a:p>
+        </p:txBody>
+      </p:sp>
+      <p:sp>
+        <p:nvSpPr>
+          <p:cNvPr id="10" name="TextBox 9"/>
+          <p:cNvSpPr txBox="1"/>
+          <p:nvPr/>
+        </p:nvSpPr>
+        <p:spPr>
+          <a:xfrm>
+            <a:off x="640080" y="6144768"/>
+            <a:ext cx="10908792" cy="502920"/>
+          </a:xfrm>
+          <a:prstGeom prst="rect">
+            <a:avLst/>
+          </a:prstGeom>
+          <a:noFill/>
+        </p:spPr>
+        <p:txBody>
+          <a:bodyPr wrap="square">
+            <a:spAutoFit/>
+          </a:bodyPr>
+          <a:lstStyle/>
+          <a:p>
+            <a:pPr algn="l">
+              <a:defRPr sz="1300" b="0">
+                <a:solidFill>
+                  <a:srgbClr val="5A5A6E"/>
+                </a:solidFill>
+                <a:latin typeface="맑은 고딕"/>
+              </a:defRPr>
+            </a:pPr>
+            <a:r>
+              <a:t>K8s Pod / 평가(Evaluation)</a:t>
+            </a:r>
+          </a:p>
+        </p:txBody>
+      </p:sp>
+      <p:sp>
+        <p:nvSpPr>
+          <p:cNvPr id="11" name="TextBox 10"/>
+          <p:cNvSpPr txBox="1"/>
+          <p:nvPr/>
+        </p:nvSpPr>
+        <p:spPr>
+          <a:xfrm>
+            <a:off x="10972800" y="6492240"/>
+            <a:ext cx="914400" cy="274320"/>
+          </a:xfrm>
+          <a:prstGeom prst="rect">
+            <a:avLst/>
+          </a:prstGeom>
+          <a:noFill/>
+        </p:spPr>
+        <p:txBody>
+          <a:bodyPr wrap="square">
+            <a:spAutoFit/>
+          </a:bodyPr>
+          <a:lstStyle/>
+          <a:p>
+            <a:pPr algn="r">
+              <a:defRPr sz="1000" b="0">
+                <a:solidFill>
+                  <a:srgbClr val="8C8C9A"/>
+                </a:solidFill>
+                <a:latin typeface="맑은 고딕"/>
+              </a:defRPr>
+            </a:pPr>
+            <a:r>
+              <a:t>43</a:t>
+            </a:r>
+          </a:p>
+        </p:txBody>
+      </p:sp>
+    </p:spTree>
+  </p:cSld>
+  <p:clrMapOvr>
+    <a:masterClrMapping/>
+  </p:clrMapOvr>
+</p:sld>
+</file>
+
+<file path=ppt/slides/slide44.xml><?xml version="1.0" encoding="utf-8"?>
+<p:sld xmlns:a="http://schemas.openxmlformats.org/drawingml/2006/main" xmlns:p="http://schemas.openxmlformats.org/presentationml/2006/main" xmlns:r="http://schemas.openxmlformats.org/officeDocument/2006/relationships">
+  <p:cSld>
+    <p:bg>
+      <p:bgPr>
+        <a:solidFill>
+          <a:srgbClr val="FFFFFF"/>
+        </a:solidFill>
+        <a:effectLst/>
+      </p:bgPr>
+    </p:bg>
+    <p:spTree>
+      <p:nvGrpSpPr>
+        <p:cNvPr id="1" name=""/>
+        <p:cNvGrpSpPr/>
+        <p:nvPr/>
+      </p:nvGrpSpPr>
+      <p:grpSpPr/>
+      <p:sp>
+        <p:nvSpPr>
+          <p:cNvPr id="2" name="Rectangle 1"/>
+          <p:cNvSpPr/>
+          <p:nvPr/>
+        </p:nvSpPr>
+        <p:spPr>
+          <a:xfrm>
+            <a:off x="0" y="0"/>
+            <a:ext cx="12191695" cy="45720"/>
+          </a:xfrm>
+          <a:prstGeom prst="rect">
+            <a:avLst/>
+          </a:prstGeom>
+          <a:solidFill>
+            <a:srgbClr val="0070C0"/>
+          </a:solidFill>
+          <a:ln>
+            <a:noFill/>
+          </a:ln>
+          <a:effectLst/>
+        </p:spPr>
+        <p:style>
+          <a:lnRef idx="1">
+            <a:schemeClr val="accent1"/>
+          </a:lnRef>
+          <a:fillRef idx="3">
+            <a:schemeClr val="accent1"/>
+          </a:fillRef>
+          <a:effectRef idx="2">
+            <a:schemeClr val="accent1"/>
+          </a:effectRef>
+          <a:fontRef idx="minor">
+            <a:schemeClr val="lt1"/>
+          </a:fontRef>
+        </p:style>
+        <p:txBody>
+          <a:bodyPr rtlCol="0" anchor="ctr"/>
+          <a:lstStyle/>
+          <a:p>
+            <a:pPr algn="ctr"/>
+          </a:p>
+        </p:txBody>
+      </p:sp>
+      <p:sp>
+        <p:nvSpPr>
+          <p:cNvPr id="3" name="Rounded Rectangle 2"/>
+          <p:cNvSpPr/>
+          <p:nvPr/>
+        </p:nvSpPr>
+        <p:spPr>
+          <a:xfrm>
+            <a:off x="548640" y="256032"/>
+            <a:ext cx="685800" cy="457200"/>
+          </a:xfrm>
+          <a:prstGeom prst="roundRect">
+            <a:avLst/>
+          </a:prstGeom>
+          <a:solidFill>
+            <a:srgbClr val="0070C0"/>
+          </a:solidFill>
+          <a:ln>
+            <a:noFill/>
+          </a:ln>
+          <a:effectLst/>
+        </p:spPr>
+        <p:style>
+          <a:lnRef idx="1">
+            <a:schemeClr val="accent1"/>
+          </a:lnRef>
+          <a:fillRef idx="3">
+            <a:schemeClr val="accent1"/>
+          </a:fillRef>
+          <a:effectRef idx="2">
+            <a:schemeClr val="accent1"/>
+          </a:effectRef>
+          <a:fontRef idx="minor">
+            <a:schemeClr val="lt1"/>
+          </a:fontRef>
+        </p:style>
+        <p:txBody>
+          <a:bodyPr rtlCol="0" anchor="ctr"/>
+          <a:lstStyle/>
+          <a:p>
+            <a:pPr algn="ctr">
+              <a:defRPr sz="1400" b="1">
+                <a:solidFill>
+                  <a:srgbClr val="FFFFFF"/>
+                </a:solidFill>
+                <a:latin typeface="맑은 고딕"/>
+              </a:defRPr>
+            </a:pPr>
+            <a:r>
+              <a:t>A16</a:t>
+            </a:r>
+          </a:p>
+        </p:txBody>
+      </p:sp>
+      <p:sp>
+        <p:nvSpPr>
+          <p:cNvPr id="4" name="TextBox 3"/>
+          <p:cNvSpPr txBox="1"/>
+          <p:nvPr/>
+        </p:nvSpPr>
+        <p:spPr>
+          <a:xfrm>
+            <a:off x="1371600" y="274320"/>
+            <a:ext cx="10241280" cy="548640"/>
+          </a:xfrm>
+          <a:prstGeom prst="rect">
+            <a:avLst/>
+          </a:prstGeom>
+          <a:noFill/>
+        </p:spPr>
+        <p:txBody>
+          <a:bodyPr wrap="square">
+            <a:spAutoFit/>
+          </a:bodyPr>
+          <a:lstStyle/>
+          <a:p>
+            <a:pPr algn="l">
+              <a:defRPr sz="2200" b="1">
+                <a:solidFill>
+                  <a:srgbClr val="1F1F1F"/>
+                </a:solidFill>
+                <a:latin typeface="맑은 고딕"/>
+              </a:defRPr>
+            </a:pPr>
+            <a:r>
+              <a:t>알림 — 규칙</a:t>
+            </a:r>
+          </a:p>
+        </p:txBody>
+      </p:sp>
+      <p:sp>
+        <p:nvSpPr>
+          <p:cNvPr id="5" name="Rectangle 4"/>
+          <p:cNvSpPr/>
+          <p:nvPr/>
+        </p:nvSpPr>
+        <p:spPr>
+          <a:xfrm>
+            <a:off x="548640" y="841248"/>
+            <a:ext cx="1828800" cy="27432"/>
+          </a:xfrm>
+          <a:prstGeom prst="rect">
+            <a:avLst/>
+          </a:prstGeom>
+          <a:solidFill>
+            <a:srgbClr val="0070C0"/>
+          </a:solidFill>
+          <a:ln>
+            <a:noFill/>
+          </a:ln>
+          <a:effectLst/>
+        </p:spPr>
+        <p:style>
+          <a:lnRef idx="1">
+            <a:schemeClr val="accent1"/>
+          </a:lnRef>
+          <a:fillRef idx="3">
+            <a:schemeClr val="accent1"/>
+          </a:fillRef>
+          <a:effectRef idx="2">
+            <a:schemeClr val="accent1"/>
+          </a:effectRef>
+          <a:fontRef idx="minor">
+            <a:schemeClr val="lt1"/>
+          </a:fontRef>
+        </p:style>
+        <p:txBody>
+          <a:bodyPr rtlCol="0" anchor="ctr"/>
+          <a:lstStyle/>
+          <a:p>
+            <a:pPr algn="ctr"/>
+          </a:p>
+        </p:txBody>
+      </p:sp>
+      <p:sp>
+        <p:nvSpPr>
+          <p:cNvPr id="6" name="Rounded Rectangle 5"/>
+          <p:cNvSpPr/>
+          <p:nvPr/>
+        </p:nvSpPr>
+        <p:spPr>
+          <a:xfrm>
+            <a:off x="640080" y="1097280"/>
+            <a:ext cx="10908792" cy="4892040"/>
+          </a:xfrm>
+          <a:prstGeom prst="roundRect">
+            <a:avLst/>
+          </a:prstGeom>
+          <a:solidFill>
+            <a:srgbClr val="F8F9FB"/>
+          </a:solidFill>
+          <a:ln w="15240">
+            <a:solidFill>
+              <a:srgbClr val="0070C0"/>
+            </a:solidFill>
+          </a:ln>
+          <a:effectLst/>
+        </p:spPr>
+        <p:style>
+          <a:lnRef idx="1">
+            <a:schemeClr val="accent1"/>
+          </a:lnRef>
+          <a:fillRef idx="3">
+            <a:schemeClr val="accent1"/>
+          </a:fillRef>
+          <a:effectRef idx="2">
+            <a:schemeClr val="accent1"/>
+          </a:effectRef>
+          <a:fontRef idx="minor">
+            <a:schemeClr val="lt1"/>
+          </a:fontRef>
+        </p:style>
+        <p:txBody>
+          <a:bodyPr rtlCol="0" anchor="ctr"/>
+          <a:lstStyle/>
+          <a:p>
+            <a:pPr algn="ctr"/>
+          </a:p>
+        </p:txBody>
+      </p:sp>
+      <p:sp>
+        <p:nvSpPr>
+          <p:cNvPr id="7" name="TextBox 6"/>
+          <p:cNvSpPr txBox="1"/>
+          <p:nvPr/>
+        </p:nvSpPr>
+        <p:spPr>
+          <a:xfrm>
+            <a:off x="640080" y="2834640"/>
+            <a:ext cx="10908792" cy="548640"/>
+          </a:xfrm>
+          <a:prstGeom prst="rect">
+            <a:avLst/>
+          </a:prstGeom>
+          <a:noFill/>
+        </p:spPr>
+        <p:txBody>
+          <a:bodyPr wrap="square">
+            <a:spAutoFit/>
+          </a:bodyPr>
+          <a:lstStyle/>
+          <a:p>
+            <a:pPr algn="ctr">
+              <a:defRPr sz="2000" b="1">
+                <a:solidFill>
+                  <a:srgbClr val="8C8C9A"/>
+                </a:solidFill>
+                <a:latin typeface="맑은 고딕"/>
+              </a:defRPr>
+            </a:pPr>
+            <a:r>
+              <a:t>🖼  화면 캡처 위치</a:t>
+            </a:r>
+          </a:p>
+        </p:txBody>
+      </p:sp>
+      <p:sp>
+        <p:nvSpPr>
+          <p:cNvPr id="8" name="TextBox 7"/>
+          <p:cNvSpPr txBox="1"/>
+          <p:nvPr/>
+        </p:nvSpPr>
+        <p:spPr>
+          <a:xfrm>
+            <a:off x="640080" y="3474720"/>
+            <a:ext cx="10908792" cy="457200"/>
+          </a:xfrm>
+          <a:prstGeom prst="rect">
+            <a:avLst/>
+          </a:prstGeom>
+          <a:noFill/>
+        </p:spPr>
+        <p:txBody>
+          <a:bodyPr wrap="square">
+            <a:spAutoFit/>
+          </a:bodyPr>
+          <a:lstStyle/>
+          <a:p>
+            <a:pPr algn="ctr">
+              <a:defRPr sz="1300" b="0">
+                <a:solidFill>
+                  <a:srgbClr val="0070C0"/>
+                </a:solidFill>
+                <a:latin typeface="Consolas"/>
+              </a:defRPr>
+            </a:pPr>
+            <a:r>
+              <a:t>docs/images/alerts-rules.png</a:t>
+            </a:r>
+          </a:p>
+        </p:txBody>
+      </p:sp>
+      <p:sp>
+        <p:nvSpPr>
+          <p:cNvPr id="9" name="TextBox 8"/>
+          <p:cNvSpPr txBox="1"/>
+          <p:nvPr/>
+        </p:nvSpPr>
+        <p:spPr>
+          <a:xfrm>
+            <a:off x="640080" y="3977640"/>
+            <a:ext cx="10908792" cy="457200"/>
+          </a:xfrm>
+          <a:prstGeom prst="rect">
+            <a:avLst/>
+          </a:prstGeom>
+          <a:noFill/>
+        </p:spPr>
+        <p:txBody>
+          <a:bodyPr wrap="square">
+            <a:spAutoFit/>
+          </a:bodyPr>
+          <a:lstStyle/>
+          <a:p>
+            <a:pPr algn="ctr">
+              <a:defRPr sz="1100" b="0">
+                <a:solidFill>
+                  <a:srgbClr val="8C8C9A"/>
+                </a:solidFill>
+                <a:latin typeface="맑은 고딕"/>
+              </a:defRPr>
+            </a:pPr>
+            <a:r>
+              <a:t>이 파일명으로 저장 후 스크립트를 다시 실행하면 자동 삽입됩니다</a:t>
+            </a:r>
+          </a:p>
+        </p:txBody>
+      </p:sp>
+      <p:sp>
+        <p:nvSpPr>
+          <p:cNvPr id="10" name="TextBox 9"/>
+          <p:cNvSpPr txBox="1"/>
+          <p:nvPr/>
+        </p:nvSpPr>
+        <p:spPr>
+          <a:xfrm>
+            <a:off x="640080" y="6144768"/>
+            <a:ext cx="10908792" cy="502920"/>
+          </a:xfrm>
+          <a:prstGeom prst="rect">
+            <a:avLst/>
+          </a:prstGeom>
+          <a:noFill/>
+        </p:spPr>
+        <p:txBody>
+          <a:bodyPr wrap="square">
+            <a:spAutoFit/>
+          </a:bodyPr>
+          <a:lstStyle/>
+          <a:p>
+            <a:pPr algn="l">
+              <a:defRPr sz="1300" b="0">
+                <a:solidFill>
+                  <a:srgbClr val="5A5A6E"/>
+                </a:solidFill>
+                <a:latin typeface="맑은 고딕"/>
+              </a:defRPr>
+            </a:pPr>
+            <a:r>
+              <a:t>알림 규칙 목록·생성</a:t>
+            </a:r>
+          </a:p>
+        </p:txBody>
+      </p:sp>
+      <p:sp>
+        <p:nvSpPr>
+          <p:cNvPr id="11" name="TextBox 10"/>
+          <p:cNvSpPr txBox="1"/>
+          <p:nvPr/>
+        </p:nvSpPr>
+        <p:spPr>
+          <a:xfrm>
+            <a:off x="10972800" y="6492240"/>
+            <a:ext cx="914400" cy="274320"/>
+          </a:xfrm>
+          <a:prstGeom prst="rect">
+            <a:avLst/>
+          </a:prstGeom>
+          <a:noFill/>
+        </p:spPr>
+        <p:txBody>
+          <a:bodyPr wrap="square">
+            <a:spAutoFit/>
+          </a:bodyPr>
+          <a:lstStyle/>
+          <a:p>
+            <a:pPr algn="r">
+              <a:defRPr sz="1000" b="0">
+                <a:solidFill>
+                  <a:srgbClr val="8C8C9A"/>
+                </a:solidFill>
+                <a:latin typeface="맑은 고딕"/>
+              </a:defRPr>
+            </a:pPr>
+            <a:r>
+              <a:t>44</a:t>
+            </a:r>
+          </a:p>
+        </p:txBody>
+      </p:sp>
+    </p:spTree>
+  </p:cSld>
+  <p:clrMapOvr>
+    <a:masterClrMapping/>
+  </p:clrMapOvr>
+</p:sld>
+</file>
+
+<file path=ppt/slides/slide45.xml><?xml version="1.0" encoding="utf-8"?>
+<p:sld xmlns:a="http://schemas.openxmlformats.org/drawingml/2006/main" xmlns:p="http://schemas.openxmlformats.org/presentationml/2006/main" xmlns:r="http://schemas.openxmlformats.org/officeDocument/2006/relationships">
+  <p:cSld>
+    <p:bg>
+      <p:bgPr>
+        <a:solidFill>
+          <a:srgbClr val="FFFFFF"/>
+        </a:solidFill>
+        <a:effectLst/>
+      </p:bgPr>
+    </p:bg>
+    <p:spTree>
+      <p:nvGrpSpPr>
+        <p:cNvPr id="1" name=""/>
+        <p:cNvGrpSpPr/>
+        <p:nvPr/>
+      </p:nvGrpSpPr>
+      <p:grpSpPr/>
+      <p:sp>
+        <p:nvSpPr>
+          <p:cNvPr id="2" name="Rectangle 1"/>
+          <p:cNvSpPr/>
+          <p:nvPr/>
+        </p:nvSpPr>
+        <p:spPr>
+          <a:xfrm>
+            <a:off x="0" y="0"/>
+            <a:ext cx="12191695" cy="45720"/>
+          </a:xfrm>
+          <a:prstGeom prst="rect">
+            <a:avLst/>
+          </a:prstGeom>
+          <a:solidFill>
+            <a:srgbClr val="0070C0"/>
+          </a:solidFill>
+          <a:ln>
+            <a:noFill/>
+          </a:ln>
+          <a:effectLst/>
+        </p:spPr>
+        <p:style>
+          <a:lnRef idx="1">
+            <a:schemeClr val="accent1"/>
+          </a:lnRef>
+          <a:fillRef idx="3">
+            <a:schemeClr val="accent1"/>
+          </a:fillRef>
+          <a:effectRef idx="2">
+            <a:schemeClr val="accent1"/>
+          </a:effectRef>
+          <a:fontRef idx="minor">
+            <a:schemeClr val="lt1"/>
+          </a:fontRef>
+        </p:style>
+        <p:txBody>
+          <a:bodyPr rtlCol="0" anchor="ctr"/>
+          <a:lstStyle/>
+          <a:p>
+            <a:pPr algn="ctr"/>
+          </a:p>
+        </p:txBody>
+      </p:sp>
+      <p:sp>
+        <p:nvSpPr>
+          <p:cNvPr id="3" name="Rounded Rectangle 2"/>
+          <p:cNvSpPr/>
+          <p:nvPr/>
+        </p:nvSpPr>
+        <p:spPr>
+          <a:xfrm>
+            <a:off x="548640" y="256032"/>
+            <a:ext cx="685800" cy="457200"/>
+          </a:xfrm>
+          <a:prstGeom prst="roundRect">
+            <a:avLst/>
+          </a:prstGeom>
+          <a:solidFill>
+            <a:srgbClr val="0070C0"/>
+          </a:solidFill>
+          <a:ln>
+            <a:noFill/>
+          </a:ln>
+          <a:effectLst/>
+        </p:spPr>
+        <p:style>
+          <a:lnRef idx="1">
+            <a:schemeClr val="accent1"/>
+          </a:lnRef>
+          <a:fillRef idx="3">
+            <a:schemeClr val="accent1"/>
+          </a:fillRef>
+          <a:effectRef idx="2">
+            <a:schemeClr val="accent1"/>
+          </a:effectRef>
+          <a:fontRef idx="minor">
+            <a:schemeClr val="lt1"/>
+          </a:fontRef>
+        </p:style>
+        <p:txBody>
+          <a:bodyPr rtlCol="0" anchor="ctr"/>
+          <a:lstStyle/>
+          <a:p>
+            <a:pPr algn="ctr">
+              <a:defRPr sz="1400" b="1">
+                <a:solidFill>
+                  <a:srgbClr val="FFFFFF"/>
+                </a:solidFill>
+                <a:latin typeface="맑은 고딕"/>
+              </a:defRPr>
+            </a:pPr>
+            <a:r>
+              <a:t>A17</a:t>
+            </a:r>
+          </a:p>
+        </p:txBody>
+      </p:sp>
+      <p:sp>
+        <p:nvSpPr>
+          <p:cNvPr id="4" name="TextBox 3"/>
+          <p:cNvSpPr txBox="1"/>
+          <p:nvPr/>
+        </p:nvSpPr>
+        <p:spPr>
+          <a:xfrm>
+            <a:off x="1371600" y="274320"/>
+            <a:ext cx="10241280" cy="548640"/>
+          </a:xfrm>
+          <a:prstGeom prst="rect">
+            <a:avLst/>
+          </a:prstGeom>
+          <a:noFill/>
+        </p:spPr>
+        <p:txBody>
+          <a:bodyPr wrap="square">
+            <a:spAutoFit/>
+          </a:bodyPr>
+          <a:lstStyle/>
+          <a:p>
+            <a:pPr algn="l">
+              <a:defRPr sz="2200" b="1">
+                <a:solidFill>
+                  <a:srgbClr val="1F1F1F"/>
+                </a:solidFill>
+                <a:latin typeface="맑은 고딕"/>
+              </a:defRPr>
+            </a:pPr>
+            <a:r>
+              <a:t>알림 — 이력</a:t>
+            </a:r>
+          </a:p>
+        </p:txBody>
+      </p:sp>
+      <p:sp>
+        <p:nvSpPr>
+          <p:cNvPr id="5" name="Rectangle 4"/>
+          <p:cNvSpPr/>
+          <p:nvPr/>
+        </p:nvSpPr>
+        <p:spPr>
+          <a:xfrm>
+            <a:off x="548640" y="841248"/>
+            <a:ext cx="1828800" cy="27432"/>
+          </a:xfrm>
+          <a:prstGeom prst="rect">
+            <a:avLst/>
+          </a:prstGeom>
+          <a:solidFill>
+            <a:srgbClr val="0070C0"/>
+          </a:solidFill>
+          <a:ln>
+            <a:noFill/>
+          </a:ln>
+          <a:effectLst/>
+        </p:spPr>
+        <p:style>
+          <a:lnRef idx="1">
+            <a:schemeClr val="accent1"/>
+          </a:lnRef>
+          <a:fillRef idx="3">
+            <a:schemeClr val="accent1"/>
+          </a:fillRef>
+          <a:effectRef idx="2">
+            <a:schemeClr val="accent1"/>
+          </a:effectRef>
+          <a:fontRef idx="minor">
+            <a:schemeClr val="lt1"/>
+          </a:fontRef>
+        </p:style>
+        <p:txBody>
+          <a:bodyPr rtlCol="0" anchor="ctr"/>
+          <a:lstStyle/>
+          <a:p>
+            <a:pPr algn="ctr"/>
+          </a:p>
+        </p:txBody>
+      </p:sp>
+      <p:sp>
+        <p:nvSpPr>
+          <p:cNvPr id="6" name="Rounded Rectangle 5"/>
+          <p:cNvSpPr/>
+          <p:nvPr/>
+        </p:nvSpPr>
+        <p:spPr>
+          <a:xfrm>
+            <a:off x="640080" y="1097280"/>
+            <a:ext cx="10908792" cy="4892040"/>
+          </a:xfrm>
+          <a:prstGeom prst="roundRect">
+            <a:avLst/>
+          </a:prstGeom>
+          <a:solidFill>
+            <a:srgbClr val="F8F9FB"/>
+          </a:solidFill>
+          <a:ln w="15240">
+            <a:solidFill>
+              <a:srgbClr val="0070C0"/>
+            </a:solidFill>
+          </a:ln>
+          <a:effectLst/>
+        </p:spPr>
+        <p:style>
+          <a:lnRef idx="1">
+            <a:schemeClr val="accent1"/>
+          </a:lnRef>
+          <a:fillRef idx="3">
+            <a:schemeClr val="accent1"/>
+          </a:fillRef>
+          <a:effectRef idx="2">
+            <a:schemeClr val="accent1"/>
+          </a:effectRef>
+          <a:fontRef idx="minor">
+            <a:schemeClr val="lt1"/>
+          </a:fontRef>
+        </p:style>
+        <p:txBody>
+          <a:bodyPr rtlCol="0" anchor="ctr"/>
+          <a:lstStyle/>
+          <a:p>
+            <a:pPr algn="ctr"/>
+          </a:p>
+        </p:txBody>
+      </p:sp>
+      <p:sp>
+        <p:nvSpPr>
+          <p:cNvPr id="7" name="TextBox 6"/>
+          <p:cNvSpPr txBox="1"/>
+          <p:nvPr/>
+        </p:nvSpPr>
+        <p:spPr>
+          <a:xfrm>
+            <a:off x="640080" y="2834640"/>
+            <a:ext cx="10908792" cy="548640"/>
+          </a:xfrm>
+          <a:prstGeom prst="rect">
+            <a:avLst/>
+          </a:prstGeom>
+          <a:noFill/>
+        </p:spPr>
+        <p:txBody>
+          <a:bodyPr wrap="square">
+            <a:spAutoFit/>
+          </a:bodyPr>
+          <a:lstStyle/>
+          <a:p>
+            <a:pPr algn="ctr">
+              <a:defRPr sz="2000" b="1">
+                <a:solidFill>
+                  <a:srgbClr val="8C8C9A"/>
+                </a:solidFill>
+                <a:latin typeface="맑은 고딕"/>
+              </a:defRPr>
+            </a:pPr>
+            <a:r>
+              <a:t>🖼  화면 캡처 위치</a:t>
+            </a:r>
+          </a:p>
+        </p:txBody>
+      </p:sp>
+      <p:sp>
+        <p:nvSpPr>
+          <p:cNvPr id="8" name="TextBox 7"/>
+          <p:cNvSpPr txBox="1"/>
+          <p:nvPr/>
+        </p:nvSpPr>
+        <p:spPr>
+          <a:xfrm>
+            <a:off x="640080" y="3474720"/>
+            <a:ext cx="10908792" cy="457200"/>
+          </a:xfrm>
+          <a:prstGeom prst="rect">
+            <a:avLst/>
+          </a:prstGeom>
+          <a:noFill/>
+        </p:spPr>
+        <p:txBody>
+          <a:bodyPr wrap="square">
+            <a:spAutoFit/>
+          </a:bodyPr>
+          <a:lstStyle/>
+          <a:p>
+            <a:pPr algn="ctr">
+              <a:defRPr sz="1300" b="0">
+                <a:solidFill>
+                  <a:srgbClr val="0070C0"/>
+                </a:solidFill>
+                <a:latin typeface="Consolas"/>
+              </a:defRPr>
+            </a:pPr>
+            <a:r>
+              <a:t>docs/images/alerts-history.png</a:t>
+            </a:r>
+          </a:p>
+        </p:txBody>
+      </p:sp>
+      <p:sp>
+        <p:nvSpPr>
+          <p:cNvPr id="9" name="TextBox 8"/>
+          <p:cNvSpPr txBox="1"/>
+          <p:nvPr/>
+        </p:nvSpPr>
+        <p:spPr>
+          <a:xfrm>
+            <a:off x="640080" y="3977640"/>
+            <a:ext cx="10908792" cy="457200"/>
+          </a:xfrm>
+          <a:prstGeom prst="rect">
+            <a:avLst/>
+          </a:prstGeom>
+          <a:noFill/>
+        </p:spPr>
+        <p:txBody>
+          <a:bodyPr wrap="square">
+            <a:spAutoFit/>
+          </a:bodyPr>
+          <a:lstStyle/>
+          <a:p>
+            <a:pPr algn="ctr">
+              <a:defRPr sz="1100" b="0">
+                <a:solidFill>
+                  <a:srgbClr val="8C8C9A"/>
+                </a:solidFill>
+                <a:latin typeface="맑은 고딕"/>
+              </a:defRPr>
+            </a:pPr>
+            <a:r>
+              <a:t>이 파일명으로 저장 후 스크립트를 다시 실행하면 자동 삽입됩니다</a:t>
+            </a:r>
+          </a:p>
+        </p:txBody>
+      </p:sp>
+      <p:sp>
+        <p:nvSpPr>
+          <p:cNvPr id="10" name="TextBox 9"/>
+          <p:cNvSpPr txBox="1"/>
+          <p:nvPr/>
+        </p:nvSpPr>
+        <p:spPr>
+          <a:xfrm>
+            <a:off x="640080" y="6144768"/>
+            <a:ext cx="10908792" cy="502920"/>
+          </a:xfrm>
+          <a:prstGeom prst="rect">
+            <a:avLst/>
+          </a:prstGeom>
+          <a:noFill/>
+        </p:spPr>
+        <p:txBody>
+          <a:bodyPr wrap="square">
+            <a:spAutoFit/>
+          </a:bodyPr>
+          <a:lstStyle/>
+          <a:p>
+            <a:pPr algn="l">
+              <a:defRPr sz="1300" b="0">
+                <a:solidFill>
+                  <a:srgbClr val="5A5A6E"/>
+                </a:solidFill>
+                <a:latin typeface="맑은 고딕"/>
+              </a:defRPr>
+            </a:pPr>
+            <a:r>
+              <a:t>발생/해결 알림 이력(날짜 필터)</a:t>
+            </a:r>
+          </a:p>
+        </p:txBody>
+      </p:sp>
+      <p:sp>
+        <p:nvSpPr>
+          <p:cNvPr id="11" name="TextBox 10"/>
+          <p:cNvSpPr txBox="1"/>
+          <p:nvPr/>
+        </p:nvSpPr>
+        <p:spPr>
+          <a:xfrm>
+            <a:off x="10972800" y="6492240"/>
+            <a:ext cx="914400" cy="274320"/>
+          </a:xfrm>
+          <a:prstGeom prst="rect">
+            <a:avLst/>
+          </a:prstGeom>
+          <a:noFill/>
+        </p:spPr>
+        <p:txBody>
+          <a:bodyPr wrap="square">
+            <a:spAutoFit/>
+          </a:bodyPr>
+          <a:lstStyle/>
+          <a:p>
+            <a:pPr algn="r">
+              <a:defRPr sz="1000" b="0">
+                <a:solidFill>
+                  <a:srgbClr val="8C8C9A"/>
+                </a:solidFill>
+                <a:latin typeface="맑은 고딕"/>
+              </a:defRPr>
+            </a:pPr>
+            <a:r>
+              <a:t>45</a:t>
+            </a:r>
+          </a:p>
+        </p:txBody>
+      </p:sp>
+    </p:spTree>
+  </p:cSld>
+  <p:clrMapOvr>
+    <a:masterClrMapping/>
+  </p:clrMapOvr>
+</p:sld>
+</file>
+
+<file path=ppt/slides/slide46.xml><?xml version="1.0" encoding="utf-8"?>
+<p:sld xmlns:a="http://schemas.openxmlformats.org/drawingml/2006/main" xmlns:p="http://schemas.openxmlformats.org/presentationml/2006/main" xmlns:r="http://schemas.openxmlformats.org/officeDocument/2006/relationships">
+  <p:cSld>
+    <p:bg>
+      <p:bgPr>
+        <a:solidFill>
+          <a:srgbClr val="FFFFFF"/>
+        </a:solidFill>
+        <a:effectLst/>
+      </p:bgPr>
+    </p:bg>
+    <p:spTree>
+      <p:nvGrpSpPr>
+        <p:cNvPr id="1" name=""/>
+        <p:cNvGrpSpPr/>
+        <p:nvPr/>
+      </p:nvGrpSpPr>
+      <p:grpSpPr/>
+      <p:sp>
+        <p:nvSpPr>
+          <p:cNvPr id="2" name="Rectangle 1"/>
+          <p:cNvSpPr/>
+          <p:nvPr/>
+        </p:nvSpPr>
+        <p:spPr>
+          <a:xfrm>
+            <a:off x="0" y="0"/>
+            <a:ext cx="12191695" cy="45720"/>
+          </a:xfrm>
+          <a:prstGeom prst="rect">
+            <a:avLst/>
+          </a:prstGeom>
+          <a:solidFill>
+            <a:srgbClr val="0070C0"/>
+          </a:solidFill>
+          <a:ln>
+            <a:noFill/>
+          </a:ln>
+          <a:effectLst/>
+        </p:spPr>
+        <p:style>
+          <a:lnRef idx="1">
+            <a:schemeClr val="accent1"/>
+          </a:lnRef>
+          <a:fillRef idx="3">
+            <a:schemeClr val="accent1"/>
+          </a:fillRef>
+          <a:effectRef idx="2">
+            <a:schemeClr val="accent1"/>
+          </a:effectRef>
+          <a:fontRef idx="minor">
+            <a:schemeClr val="lt1"/>
+          </a:fontRef>
+        </p:style>
+        <p:txBody>
+          <a:bodyPr rtlCol="0" anchor="ctr"/>
+          <a:lstStyle/>
+          <a:p>
+            <a:pPr algn="ctr"/>
+          </a:p>
+        </p:txBody>
+      </p:sp>
+      <p:sp>
+        <p:nvSpPr>
+          <p:cNvPr id="3" name="Rounded Rectangle 2"/>
+          <p:cNvSpPr/>
+          <p:nvPr/>
+        </p:nvSpPr>
+        <p:spPr>
+          <a:xfrm>
+            <a:off x="548640" y="256032"/>
+            <a:ext cx="685800" cy="457200"/>
+          </a:xfrm>
+          <a:prstGeom prst="roundRect">
+            <a:avLst/>
+          </a:prstGeom>
+          <a:solidFill>
+            <a:srgbClr val="0070C0"/>
+          </a:solidFill>
+          <a:ln>
+            <a:noFill/>
+          </a:ln>
+          <a:effectLst/>
+        </p:spPr>
+        <p:style>
+          <a:lnRef idx="1">
+            <a:schemeClr val="accent1"/>
+          </a:lnRef>
+          <a:fillRef idx="3">
+            <a:schemeClr val="accent1"/>
+          </a:fillRef>
+          <a:effectRef idx="2">
+            <a:schemeClr val="accent1"/>
+          </a:effectRef>
+          <a:fontRef idx="minor">
+            <a:schemeClr val="lt1"/>
+          </a:fontRef>
+        </p:style>
+        <p:txBody>
+          <a:bodyPr rtlCol="0" anchor="ctr"/>
+          <a:lstStyle/>
+          <a:p>
+            <a:pPr algn="ctr">
+              <a:defRPr sz="1400" b="1">
+                <a:solidFill>
+                  <a:srgbClr val="FFFFFF"/>
+                </a:solidFill>
+                <a:latin typeface="맑은 고딕"/>
+              </a:defRPr>
+            </a:pPr>
+            <a:r>
+              <a:t>A18</a:t>
+            </a:r>
+          </a:p>
+        </p:txBody>
+      </p:sp>
+      <p:sp>
+        <p:nvSpPr>
+          <p:cNvPr id="4" name="TextBox 3"/>
+          <p:cNvSpPr txBox="1"/>
+          <p:nvPr/>
+        </p:nvSpPr>
+        <p:spPr>
+          <a:xfrm>
+            <a:off x="1371600" y="274320"/>
+            <a:ext cx="10241280" cy="548640"/>
+          </a:xfrm>
+          <a:prstGeom prst="rect">
+            <a:avLst/>
+          </a:prstGeom>
+          <a:noFill/>
+        </p:spPr>
+        <p:txBody>
+          <a:bodyPr wrap="square">
+            <a:spAutoFit/>
+          </a:bodyPr>
+          <a:lstStyle/>
+          <a:p>
+            <a:pPr algn="l">
+              <a:defRPr sz="2200" b="1">
+                <a:solidFill>
+                  <a:srgbClr val="1F1F1F"/>
+                </a:solidFill>
+                <a:latin typeface="맑은 고딕"/>
+              </a:defRPr>
+            </a:pPr>
+            <a:r>
+              <a:t>용량 계획</a:t>
+            </a:r>
+          </a:p>
+        </p:txBody>
+      </p:sp>
+      <p:sp>
+        <p:nvSpPr>
+          <p:cNvPr id="5" name="Rectangle 4"/>
+          <p:cNvSpPr/>
+          <p:nvPr/>
+        </p:nvSpPr>
+        <p:spPr>
+          <a:xfrm>
+            <a:off x="548640" y="841248"/>
+            <a:ext cx="1828800" cy="27432"/>
+          </a:xfrm>
+          <a:prstGeom prst="rect">
+            <a:avLst/>
+          </a:prstGeom>
+          <a:solidFill>
+            <a:srgbClr val="0070C0"/>
+          </a:solidFill>
+          <a:ln>
+            <a:noFill/>
+          </a:ln>
+          <a:effectLst/>
+        </p:spPr>
+        <p:style>
+          <a:lnRef idx="1">
+            <a:schemeClr val="accent1"/>
+          </a:lnRef>
+          <a:fillRef idx="3">
+            <a:schemeClr val="accent1"/>
+          </a:fillRef>
+          <a:effectRef idx="2">
+            <a:schemeClr val="accent1"/>
+          </a:effectRef>
+          <a:fontRef idx="minor">
+            <a:schemeClr val="lt1"/>
+          </a:fontRef>
+        </p:style>
+        <p:txBody>
+          <a:bodyPr rtlCol="0" anchor="ctr"/>
+          <a:lstStyle/>
+          <a:p>
+            <a:pPr algn="ctr"/>
+          </a:p>
+        </p:txBody>
+      </p:sp>
+      <p:sp>
+        <p:nvSpPr>
+          <p:cNvPr id="6" name="Rounded Rectangle 5"/>
+          <p:cNvSpPr/>
+          <p:nvPr/>
+        </p:nvSpPr>
+        <p:spPr>
+          <a:xfrm>
+            <a:off x="640080" y="1097280"/>
+            <a:ext cx="10908792" cy="4892040"/>
+          </a:xfrm>
+          <a:prstGeom prst="roundRect">
+            <a:avLst/>
+          </a:prstGeom>
+          <a:solidFill>
+            <a:srgbClr val="F8F9FB"/>
+          </a:solidFill>
+          <a:ln w="15240">
+            <a:solidFill>
+              <a:srgbClr val="0070C0"/>
+            </a:solidFill>
+          </a:ln>
+          <a:effectLst/>
+        </p:spPr>
+        <p:style>
+          <a:lnRef idx="1">
+            <a:schemeClr val="accent1"/>
+          </a:lnRef>
+          <a:fillRef idx="3">
+            <a:schemeClr val="accent1"/>
+          </a:fillRef>
+          <a:effectRef idx="2">
+            <a:schemeClr val="accent1"/>
+          </a:effectRef>
+          <a:fontRef idx="minor">
+            <a:schemeClr val="lt1"/>
+          </a:fontRef>
+        </p:style>
+        <p:txBody>
+          <a:bodyPr rtlCol="0" anchor="ctr"/>
+          <a:lstStyle/>
+          <a:p>
+            <a:pPr algn="ctr"/>
+          </a:p>
+        </p:txBody>
+      </p:sp>
+      <p:sp>
+        <p:nvSpPr>
+          <p:cNvPr id="7" name="TextBox 6"/>
+          <p:cNvSpPr txBox="1"/>
+          <p:nvPr/>
+        </p:nvSpPr>
+        <p:spPr>
+          <a:xfrm>
+            <a:off x="640080" y="2834640"/>
+            <a:ext cx="10908792" cy="548640"/>
+          </a:xfrm>
+          <a:prstGeom prst="rect">
+            <a:avLst/>
+          </a:prstGeom>
+          <a:noFill/>
+        </p:spPr>
+        <p:txBody>
+          <a:bodyPr wrap="square">
+            <a:spAutoFit/>
+          </a:bodyPr>
+          <a:lstStyle/>
+          <a:p>
+            <a:pPr algn="ctr">
+              <a:defRPr sz="2000" b="1">
+                <a:solidFill>
+                  <a:srgbClr val="8C8C9A"/>
+                </a:solidFill>
+                <a:latin typeface="맑은 고딕"/>
+              </a:defRPr>
+            </a:pPr>
+            <a:r>
+              <a:t>🖼  화면 캡처 위치</a:t>
+            </a:r>
+          </a:p>
+        </p:txBody>
+      </p:sp>
+      <p:sp>
+        <p:nvSpPr>
+          <p:cNvPr id="8" name="TextBox 7"/>
+          <p:cNvSpPr txBox="1"/>
+          <p:nvPr/>
+        </p:nvSpPr>
+        <p:spPr>
+          <a:xfrm>
+            <a:off x="640080" y="3474720"/>
+            <a:ext cx="10908792" cy="457200"/>
+          </a:xfrm>
+          <a:prstGeom prst="rect">
+            <a:avLst/>
+          </a:prstGeom>
+          <a:noFill/>
+        </p:spPr>
+        <p:txBody>
+          <a:bodyPr wrap="square">
+            <a:spAutoFit/>
+          </a:bodyPr>
+          <a:lstStyle/>
+          <a:p>
+            <a:pPr algn="ctr">
+              <a:defRPr sz="1300" b="0">
+                <a:solidFill>
+                  <a:srgbClr val="0070C0"/>
+                </a:solidFill>
+                <a:latin typeface="Consolas"/>
+              </a:defRPr>
+            </a:pPr>
+            <a:r>
+              <a:t>docs/images/capacity.png</a:t>
+            </a:r>
+          </a:p>
+        </p:txBody>
+      </p:sp>
+      <p:sp>
+        <p:nvSpPr>
+          <p:cNvPr id="9" name="TextBox 8"/>
+          <p:cNvSpPr txBox="1"/>
+          <p:nvPr/>
+        </p:nvSpPr>
+        <p:spPr>
+          <a:xfrm>
+            <a:off x="640080" y="3977640"/>
+            <a:ext cx="10908792" cy="457200"/>
+          </a:xfrm>
+          <a:prstGeom prst="rect">
+            <a:avLst/>
+          </a:prstGeom>
+          <a:noFill/>
+        </p:spPr>
+        <p:txBody>
+          <a:bodyPr wrap="square">
+            <a:spAutoFit/>
+          </a:bodyPr>
+          <a:lstStyle/>
+          <a:p>
+            <a:pPr algn="ctr">
+              <a:defRPr sz="1100" b="0">
+                <a:solidFill>
+                  <a:srgbClr val="8C8C9A"/>
+                </a:solidFill>
+                <a:latin typeface="맑은 고딕"/>
+              </a:defRPr>
+            </a:pPr>
+            <a:r>
+              <a:t>이 파일명으로 저장 후 스크립트를 다시 실행하면 자동 삽입됩니다</a:t>
+            </a:r>
+          </a:p>
+        </p:txBody>
+      </p:sp>
+      <p:sp>
+        <p:nvSpPr>
+          <p:cNvPr id="10" name="TextBox 9"/>
+          <p:cNvSpPr txBox="1"/>
+          <p:nvPr/>
+        </p:nvSpPr>
+        <p:spPr>
+          <a:xfrm>
+            <a:off x="640080" y="6144768"/>
+            <a:ext cx="10908792" cy="502920"/>
+          </a:xfrm>
+          <a:prstGeom prst="rect">
+            <a:avLst/>
+          </a:prstGeom>
+          <a:noFill/>
+        </p:spPr>
+        <p:txBody>
+          <a:bodyPr wrap="square">
+            <a:spAutoFit/>
+          </a:bodyPr>
+          <a:lstStyle/>
+          <a:p>
+            <a:pPr algn="l">
+              <a:defRPr sz="1300" b="0">
+                <a:solidFill>
+                  <a:srgbClr val="5A5A6E"/>
+                </a:solidFill>
+                <a:latin typeface="맑은 고딕"/>
+              </a:defRPr>
+            </a:pPr>
+            <a:r>
+              <a:t>전력·공간·냉각 + 12개월 예측</a:t>
+            </a:r>
+          </a:p>
+        </p:txBody>
+      </p:sp>
+      <p:sp>
+        <p:nvSpPr>
+          <p:cNvPr id="11" name="TextBox 10"/>
+          <p:cNvSpPr txBox="1"/>
+          <p:nvPr/>
+        </p:nvSpPr>
+        <p:spPr>
+          <a:xfrm>
+            <a:off x="10972800" y="6492240"/>
+            <a:ext cx="914400" cy="274320"/>
+          </a:xfrm>
+          <a:prstGeom prst="rect">
+            <a:avLst/>
+          </a:prstGeom>
+          <a:noFill/>
+        </p:spPr>
+        <p:txBody>
+          <a:bodyPr wrap="square">
+            <a:spAutoFit/>
+          </a:bodyPr>
+          <a:lstStyle/>
+          <a:p>
+            <a:pPr algn="r">
+              <a:defRPr sz="1000" b="0">
+                <a:solidFill>
+                  <a:srgbClr val="8C8C9A"/>
+                </a:solidFill>
+                <a:latin typeface="맑은 고딕"/>
+              </a:defRPr>
+            </a:pPr>
+            <a:r>
+              <a:t>46</a:t>
+            </a:r>
+          </a:p>
+        </p:txBody>
+      </p:sp>
+    </p:spTree>
+  </p:cSld>
+  <p:clrMapOvr>
+    <a:masterClrMapping/>
+  </p:clrMapOvr>
+</p:sld>
+</file>
+
+<file path=ppt/slides/slide47.xml><?xml version="1.0" encoding="utf-8"?>
+<p:sld xmlns:a="http://schemas.openxmlformats.org/drawingml/2006/main" xmlns:p="http://schemas.openxmlformats.org/presentationml/2006/main" xmlns:r="http://schemas.openxmlformats.org/officeDocument/2006/relationships">
+  <p:cSld>
+    <p:bg>
+      <p:bgPr>
+        <a:solidFill>
+          <a:srgbClr val="FFFFFF"/>
+        </a:solidFill>
+        <a:effectLst/>
+      </p:bgPr>
+    </p:bg>
+    <p:spTree>
+      <p:nvGrpSpPr>
+        <p:cNvPr id="1" name=""/>
+        <p:cNvGrpSpPr/>
+        <p:nvPr/>
+      </p:nvGrpSpPr>
+      <p:grpSpPr/>
+      <p:sp>
+        <p:nvSpPr>
+          <p:cNvPr id="2" name="Rectangle 1"/>
+          <p:cNvSpPr/>
+          <p:nvPr/>
+        </p:nvSpPr>
+        <p:spPr>
+          <a:xfrm>
+            <a:off x="0" y="0"/>
+            <a:ext cx="12191695" cy="45720"/>
+          </a:xfrm>
+          <a:prstGeom prst="rect">
+            <a:avLst/>
+          </a:prstGeom>
+          <a:solidFill>
+            <a:srgbClr val="0070C0"/>
+          </a:solidFill>
+          <a:ln>
+            <a:noFill/>
+          </a:ln>
+          <a:effectLst/>
+        </p:spPr>
+        <p:style>
+          <a:lnRef idx="1">
+            <a:schemeClr val="accent1"/>
+          </a:lnRef>
+          <a:fillRef idx="3">
+            <a:schemeClr val="accent1"/>
+          </a:fillRef>
+          <a:effectRef idx="2">
+            <a:schemeClr val="accent1"/>
+          </a:effectRef>
+          <a:fontRef idx="minor">
+            <a:schemeClr val="lt1"/>
+          </a:fontRef>
+        </p:style>
+        <p:txBody>
+          <a:bodyPr rtlCol="0" anchor="ctr"/>
+          <a:lstStyle/>
+          <a:p>
+            <a:pPr algn="ctr"/>
+          </a:p>
+        </p:txBody>
+      </p:sp>
+      <p:sp>
+        <p:nvSpPr>
+          <p:cNvPr id="3" name="Rounded Rectangle 2"/>
+          <p:cNvSpPr/>
+          <p:nvPr/>
+        </p:nvSpPr>
+        <p:spPr>
+          <a:xfrm>
+            <a:off x="548640" y="256032"/>
+            <a:ext cx="685800" cy="457200"/>
+          </a:xfrm>
+          <a:prstGeom prst="roundRect">
+            <a:avLst/>
+          </a:prstGeom>
+          <a:solidFill>
+            <a:srgbClr val="0070C0"/>
+          </a:solidFill>
+          <a:ln>
+            <a:noFill/>
+          </a:ln>
+          <a:effectLst/>
+        </p:spPr>
+        <p:style>
+          <a:lnRef idx="1">
+            <a:schemeClr val="accent1"/>
+          </a:lnRef>
+          <a:fillRef idx="3">
+            <a:schemeClr val="accent1"/>
+          </a:fillRef>
+          <a:effectRef idx="2">
+            <a:schemeClr val="accent1"/>
+          </a:effectRef>
+          <a:fontRef idx="minor">
+            <a:schemeClr val="lt1"/>
+          </a:fontRef>
+        </p:style>
+        <p:txBody>
+          <a:bodyPr rtlCol="0" anchor="ctr"/>
+          <a:lstStyle/>
+          <a:p>
+            <a:pPr algn="ctr">
+              <a:defRPr sz="1400" b="1">
+                <a:solidFill>
+                  <a:srgbClr val="FFFFFF"/>
+                </a:solidFill>
+                <a:latin typeface="맑은 고딕"/>
+              </a:defRPr>
+            </a:pPr>
+            <a:r>
+              <a:t>A19</a:t>
+            </a:r>
+          </a:p>
+        </p:txBody>
+      </p:sp>
+      <p:sp>
+        <p:nvSpPr>
+          <p:cNvPr id="4" name="TextBox 3"/>
+          <p:cNvSpPr txBox="1"/>
+          <p:nvPr/>
+        </p:nvSpPr>
+        <p:spPr>
+          <a:xfrm>
+            <a:off x="1371600" y="274320"/>
+            <a:ext cx="10241280" cy="548640"/>
+          </a:xfrm>
+          <a:prstGeom prst="rect">
+            <a:avLst/>
+          </a:prstGeom>
+          <a:noFill/>
+        </p:spPr>
+        <p:txBody>
+          <a:bodyPr wrap="square">
+            <a:spAutoFit/>
+          </a:bodyPr>
+          <a:lstStyle/>
+          <a:p>
+            <a:pPr algn="l">
+              <a:defRPr sz="2200" b="1">
+                <a:solidFill>
+                  <a:srgbClr val="1F1F1F"/>
+                </a:solidFill>
+                <a:latin typeface="맑은 고딕"/>
+              </a:defRPr>
+            </a:pPr>
+            <a:r>
+              <a:t>리포트</a:t>
+            </a:r>
+          </a:p>
+        </p:txBody>
+      </p:sp>
+      <p:sp>
+        <p:nvSpPr>
+          <p:cNvPr id="5" name="Rectangle 4"/>
+          <p:cNvSpPr/>
+          <p:nvPr/>
+        </p:nvSpPr>
+        <p:spPr>
+          <a:xfrm>
+            <a:off x="548640" y="841248"/>
+            <a:ext cx="1828800" cy="27432"/>
+          </a:xfrm>
+          <a:prstGeom prst="rect">
+            <a:avLst/>
+          </a:prstGeom>
+          <a:solidFill>
+            <a:srgbClr val="0070C0"/>
+          </a:solidFill>
+          <a:ln>
+            <a:noFill/>
+          </a:ln>
+          <a:effectLst/>
+        </p:spPr>
+        <p:style>
+          <a:lnRef idx="1">
+            <a:schemeClr val="accent1"/>
+          </a:lnRef>
+          <a:fillRef idx="3">
+            <a:schemeClr val="accent1"/>
+          </a:fillRef>
+          <a:effectRef idx="2">
+            <a:schemeClr val="accent1"/>
+          </a:effectRef>
+          <a:fontRef idx="minor">
+            <a:schemeClr val="lt1"/>
+          </a:fontRef>
+        </p:style>
+        <p:txBody>
+          <a:bodyPr rtlCol="0" anchor="ctr"/>
+          <a:lstStyle/>
+          <a:p>
+            <a:pPr algn="ctr"/>
+          </a:p>
+        </p:txBody>
+      </p:sp>
+      <p:sp>
+        <p:nvSpPr>
+          <p:cNvPr id="6" name="Rounded Rectangle 5"/>
+          <p:cNvSpPr/>
+          <p:nvPr/>
+        </p:nvSpPr>
+        <p:spPr>
+          <a:xfrm>
+            <a:off x="640080" y="1097280"/>
+            <a:ext cx="10908792" cy="4892040"/>
+          </a:xfrm>
+          <a:prstGeom prst="roundRect">
+            <a:avLst/>
+          </a:prstGeom>
+          <a:solidFill>
+            <a:srgbClr val="F8F9FB"/>
+          </a:solidFill>
+          <a:ln w="15240">
+            <a:solidFill>
+              <a:srgbClr val="0070C0"/>
+            </a:solidFill>
+          </a:ln>
+          <a:effectLst/>
+        </p:spPr>
+        <p:style>
+          <a:lnRef idx="1">
+            <a:schemeClr val="accent1"/>
+          </a:lnRef>
+          <a:fillRef idx="3">
+            <a:schemeClr val="accent1"/>
+          </a:fillRef>
+          <a:effectRef idx="2">
+            <a:schemeClr val="accent1"/>
+          </a:effectRef>
+          <a:fontRef idx="minor">
+            <a:schemeClr val="lt1"/>
+          </a:fontRef>
+        </p:style>
+        <p:txBody>
+          <a:bodyPr rtlCol="0" anchor="ctr"/>
+          <a:lstStyle/>
+          <a:p>
+            <a:pPr algn="ctr"/>
+          </a:p>
+        </p:txBody>
+      </p:sp>
+      <p:sp>
+        <p:nvSpPr>
+          <p:cNvPr id="7" name="TextBox 6"/>
+          <p:cNvSpPr txBox="1"/>
+          <p:nvPr/>
+        </p:nvSpPr>
+        <p:spPr>
+          <a:xfrm>
+            <a:off x="640080" y="2834640"/>
+            <a:ext cx="10908792" cy="548640"/>
+          </a:xfrm>
+          <a:prstGeom prst="rect">
+            <a:avLst/>
+          </a:prstGeom>
+          <a:noFill/>
+        </p:spPr>
+        <p:txBody>
+          <a:bodyPr wrap="square">
+            <a:spAutoFit/>
+          </a:bodyPr>
+          <a:lstStyle/>
+          <a:p>
+            <a:pPr algn="ctr">
+              <a:defRPr sz="2000" b="1">
+                <a:solidFill>
+                  <a:srgbClr val="8C8C9A"/>
+                </a:solidFill>
+                <a:latin typeface="맑은 고딕"/>
+              </a:defRPr>
+            </a:pPr>
+            <a:r>
+              <a:t>🖼  화면 캡처 위치</a:t>
+            </a:r>
+          </a:p>
+        </p:txBody>
+      </p:sp>
+      <p:sp>
+        <p:nvSpPr>
+          <p:cNvPr id="8" name="TextBox 7"/>
+          <p:cNvSpPr txBox="1"/>
+          <p:nvPr/>
+        </p:nvSpPr>
+        <p:spPr>
+          <a:xfrm>
+            <a:off x="640080" y="3474720"/>
+            <a:ext cx="10908792" cy="457200"/>
+          </a:xfrm>
+          <a:prstGeom prst="rect">
+            <a:avLst/>
+          </a:prstGeom>
+          <a:noFill/>
+        </p:spPr>
+        <p:txBody>
+          <a:bodyPr wrap="square">
+            <a:spAutoFit/>
+          </a:bodyPr>
+          <a:lstStyle/>
+          <a:p>
+            <a:pPr algn="ctr">
+              <a:defRPr sz="1300" b="0">
+                <a:solidFill>
+                  <a:srgbClr val="0070C0"/>
+                </a:solidFill>
+                <a:latin typeface="Consolas"/>
+              </a:defRPr>
+            </a:pPr>
+            <a:r>
+              <a:t>docs/images/reports.png</a:t>
+            </a:r>
+          </a:p>
+        </p:txBody>
+      </p:sp>
+      <p:sp>
+        <p:nvSpPr>
+          <p:cNvPr id="9" name="TextBox 8"/>
+          <p:cNvSpPr txBox="1"/>
+          <p:nvPr/>
+        </p:nvSpPr>
+        <p:spPr>
+          <a:xfrm>
+            <a:off x="640080" y="3977640"/>
+            <a:ext cx="10908792" cy="457200"/>
+          </a:xfrm>
+          <a:prstGeom prst="rect">
+            <a:avLst/>
+          </a:prstGeom>
+          <a:noFill/>
+        </p:spPr>
+        <p:txBody>
+          <a:bodyPr wrap="square">
+            <a:spAutoFit/>
+          </a:bodyPr>
+          <a:lstStyle/>
+          <a:p>
+            <a:pPr algn="ctr">
+              <a:defRPr sz="1100" b="0">
+                <a:solidFill>
+                  <a:srgbClr val="8C8C9A"/>
+                </a:solidFill>
+                <a:latin typeface="맑은 고딕"/>
+              </a:defRPr>
+            </a:pPr>
+            <a:r>
+              <a:t>이 파일명으로 저장 후 스크립트를 다시 실행하면 자동 삽입됩니다</a:t>
+            </a:r>
+          </a:p>
+        </p:txBody>
+      </p:sp>
+      <p:sp>
+        <p:nvSpPr>
+          <p:cNvPr id="10" name="TextBox 9"/>
+          <p:cNvSpPr txBox="1"/>
+          <p:nvPr/>
+        </p:nvSpPr>
+        <p:spPr>
+          <a:xfrm>
+            <a:off x="640080" y="6144768"/>
+            <a:ext cx="10908792" cy="502920"/>
+          </a:xfrm>
+          <a:prstGeom prst="rect">
+            <a:avLst/>
+          </a:prstGeom>
+          <a:noFill/>
+        </p:spPr>
+        <p:txBody>
+          <a:bodyPr wrap="square">
+            <a:spAutoFit/>
+          </a:bodyPr>
+          <a:lstStyle/>
+          <a:p>
+            <a:pPr algn="l">
+              <a:defRPr sz="1300" b="0">
+                <a:solidFill>
+                  <a:srgbClr val="5A5A6E"/>
+                </a:solidFill>
+                <a:latin typeface="맑은 고딕"/>
+              </a:defRPr>
+            </a:pPr>
+            <a:r>
+              <a:t>리포트 생성 및 출력</a:t>
+            </a:r>
+          </a:p>
+        </p:txBody>
+      </p:sp>
+      <p:sp>
+        <p:nvSpPr>
+          <p:cNvPr id="11" name="TextBox 10"/>
+          <p:cNvSpPr txBox="1"/>
+          <p:nvPr/>
+        </p:nvSpPr>
+        <p:spPr>
+          <a:xfrm>
+            <a:off x="10972800" y="6492240"/>
+            <a:ext cx="914400" cy="274320"/>
+          </a:xfrm>
+          <a:prstGeom prst="rect">
+            <a:avLst/>
+          </a:prstGeom>
+          <a:noFill/>
+        </p:spPr>
+        <p:txBody>
+          <a:bodyPr wrap="square">
+            <a:spAutoFit/>
+          </a:bodyPr>
+          <a:lstStyle/>
+          <a:p>
+            <a:pPr algn="r">
+              <a:defRPr sz="1000" b="0">
+                <a:solidFill>
+                  <a:srgbClr val="8C8C9A"/>
+                </a:solidFill>
+                <a:latin typeface="맑은 고딕"/>
+              </a:defRPr>
+            </a:pPr>
+            <a:r>
+              <a:t>47</a:t>
+            </a:r>
+          </a:p>
+        </p:txBody>
+      </p:sp>
+    </p:spTree>
+  </p:cSld>
+  <p:clrMapOvr>
+    <a:masterClrMapping/>
+  </p:clrMapOvr>
+</p:sld>
+</file>
+
+<file path=ppt/slides/slide48.xml><?xml version="1.0" encoding="utf-8"?>
+<p:sld xmlns:a="http://schemas.openxmlformats.org/drawingml/2006/main" xmlns:p="http://schemas.openxmlformats.org/presentationml/2006/main" xmlns:r="http://schemas.openxmlformats.org/officeDocument/2006/relationships">
+  <p:cSld>
+    <p:bg>
+      <p:bgPr>
+        <a:solidFill>
+          <a:srgbClr val="FFFFFF"/>
+        </a:solidFill>
+        <a:effectLst/>
+      </p:bgPr>
+    </p:bg>
+    <p:spTree>
+      <p:nvGrpSpPr>
+        <p:cNvPr id="1" name=""/>
+        <p:cNvGrpSpPr/>
+        <p:nvPr/>
+      </p:nvGrpSpPr>
+      <p:grpSpPr/>
+      <p:sp>
+        <p:nvSpPr>
+          <p:cNvPr id="2" name="Rectangle 1"/>
+          <p:cNvSpPr/>
+          <p:nvPr/>
+        </p:nvSpPr>
+        <p:spPr>
+          <a:xfrm>
+            <a:off x="0" y="0"/>
+            <a:ext cx="12191695" cy="45720"/>
+          </a:xfrm>
+          <a:prstGeom prst="rect">
+            <a:avLst/>
+          </a:prstGeom>
+          <a:solidFill>
+            <a:srgbClr val="0070C0"/>
+          </a:solidFill>
+          <a:ln>
+            <a:noFill/>
+          </a:ln>
+          <a:effectLst/>
+        </p:spPr>
+        <p:style>
+          <a:lnRef idx="1">
+            <a:schemeClr val="accent1"/>
+          </a:lnRef>
+          <a:fillRef idx="3">
+            <a:schemeClr val="accent1"/>
+          </a:fillRef>
+          <a:effectRef idx="2">
+            <a:schemeClr val="accent1"/>
+          </a:effectRef>
+          <a:fontRef idx="minor">
+            <a:schemeClr val="lt1"/>
+          </a:fontRef>
+        </p:style>
+        <p:txBody>
+          <a:bodyPr rtlCol="0" anchor="ctr"/>
+          <a:lstStyle/>
+          <a:p>
+            <a:pPr algn="ctr"/>
+          </a:p>
+        </p:txBody>
+      </p:sp>
+      <p:sp>
+        <p:nvSpPr>
+          <p:cNvPr id="3" name="Rounded Rectangle 2"/>
+          <p:cNvSpPr/>
+          <p:nvPr/>
+        </p:nvSpPr>
+        <p:spPr>
+          <a:xfrm>
+            <a:off x="548640" y="256032"/>
+            <a:ext cx="685800" cy="457200"/>
+          </a:xfrm>
+          <a:prstGeom prst="roundRect">
+            <a:avLst/>
+          </a:prstGeom>
+          <a:solidFill>
+            <a:srgbClr val="0070C0"/>
+          </a:solidFill>
+          <a:ln>
+            <a:noFill/>
+          </a:ln>
+          <a:effectLst/>
+        </p:spPr>
+        <p:style>
+          <a:lnRef idx="1">
+            <a:schemeClr val="accent1"/>
+          </a:lnRef>
+          <a:fillRef idx="3">
+            <a:schemeClr val="accent1"/>
+          </a:fillRef>
+          <a:effectRef idx="2">
+            <a:schemeClr val="accent1"/>
+          </a:effectRef>
+          <a:fontRef idx="minor">
+            <a:schemeClr val="lt1"/>
+          </a:fontRef>
+        </p:style>
+        <p:txBody>
+          <a:bodyPr rtlCol="0" anchor="ctr"/>
+          <a:lstStyle/>
+          <a:p>
+            <a:pPr algn="ctr">
+              <a:defRPr sz="1400" b="1">
+                <a:solidFill>
+                  <a:srgbClr val="FFFFFF"/>
+                </a:solidFill>
+                <a:latin typeface="맑은 고딕"/>
+              </a:defRPr>
+            </a:pPr>
+            <a:r>
+              <a:t>A20</a:t>
+            </a:r>
+          </a:p>
+        </p:txBody>
+      </p:sp>
+      <p:sp>
+        <p:nvSpPr>
+          <p:cNvPr id="4" name="TextBox 3"/>
+          <p:cNvSpPr txBox="1"/>
+          <p:nvPr/>
+        </p:nvSpPr>
+        <p:spPr>
+          <a:xfrm>
+            <a:off x="1371600" y="274320"/>
+            <a:ext cx="10241280" cy="548640"/>
+          </a:xfrm>
+          <a:prstGeom prst="rect">
+            <a:avLst/>
+          </a:prstGeom>
+          <a:noFill/>
+        </p:spPr>
+        <p:txBody>
+          <a:bodyPr wrap="square">
+            <a:spAutoFit/>
+          </a:bodyPr>
+          <a:lstStyle/>
+          <a:p>
+            <a:pPr algn="l">
+              <a:defRPr sz="2200" b="1">
+                <a:solidFill>
+                  <a:srgbClr val="1F1F1F"/>
+                </a:solidFill>
+                <a:latin typeface="맑은 고딕"/>
+              </a:defRPr>
+            </a:pPr>
+            <a:r>
+              <a:t>설정 — RBAC/조직</a:t>
+            </a:r>
+          </a:p>
+        </p:txBody>
+      </p:sp>
+      <p:sp>
+        <p:nvSpPr>
+          <p:cNvPr id="5" name="Rectangle 4"/>
+          <p:cNvSpPr/>
+          <p:nvPr/>
+        </p:nvSpPr>
+        <p:spPr>
+          <a:xfrm>
+            <a:off x="548640" y="841248"/>
+            <a:ext cx="1828800" cy="27432"/>
+          </a:xfrm>
+          <a:prstGeom prst="rect">
+            <a:avLst/>
+          </a:prstGeom>
+          <a:solidFill>
+            <a:srgbClr val="0070C0"/>
+          </a:solidFill>
+          <a:ln>
+            <a:noFill/>
+          </a:ln>
+          <a:effectLst/>
+        </p:spPr>
+        <p:style>
+          <a:lnRef idx="1">
+            <a:schemeClr val="accent1"/>
+          </a:lnRef>
+          <a:fillRef idx="3">
+            <a:schemeClr val="accent1"/>
+          </a:fillRef>
+          <a:effectRef idx="2">
+            <a:schemeClr val="accent1"/>
+          </a:effectRef>
+          <a:fontRef idx="minor">
+            <a:schemeClr val="lt1"/>
+          </a:fontRef>
+        </p:style>
+        <p:txBody>
+          <a:bodyPr rtlCol="0" anchor="ctr"/>
+          <a:lstStyle/>
+          <a:p>
+            <a:pPr algn="ctr"/>
+          </a:p>
+        </p:txBody>
+      </p:sp>
+      <p:sp>
+        <p:nvSpPr>
+          <p:cNvPr id="6" name="Rounded Rectangle 5"/>
+          <p:cNvSpPr/>
+          <p:nvPr/>
+        </p:nvSpPr>
+        <p:spPr>
+          <a:xfrm>
+            <a:off x="640080" y="1097280"/>
+            <a:ext cx="10908792" cy="4892040"/>
+          </a:xfrm>
+          <a:prstGeom prst="roundRect">
+            <a:avLst/>
+          </a:prstGeom>
+          <a:solidFill>
+            <a:srgbClr val="F8F9FB"/>
+          </a:solidFill>
+          <a:ln w="15240">
+            <a:solidFill>
+              <a:srgbClr val="0070C0"/>
+            </a:solidFill>
+          </a:ln>
+          <a:effectLst/>
+        </p:spPr>
+        <p:style>
+          <a:lnRef idx="1">
+            <a:schemeClr val="accent1"/>
+          </a:lnRef>
+          <a:fillRef idx="3">
+            <a:schemeClr val="accent1"/>
+          </a:fillRef>
+          <a:effectRef idx="2">
+            <a:schemeClr val="accent1"/>
+          </a:effectRef>
+          <a:fontRef idx="minor">
+            <a:schemeClr val="lt1"/>
+          </a:fontRef>
+        </p:style>
+        <p:txBody>
+          <a:bodyPr rtlCol="0" anchor="ctr"/>
+          <a:lstStyle/>
+          <a:p>
+            <a:pPr algn="ctr"/>
+          </a:p>
+        </p:txBody>
+      </p:sp>
+      <p:sp>
+        <p:nvSpPr>
+          <p:cNvPr id="7" name="TextBox 6"/>
+          <p:cNvSpPr txBox="1"/>
+          <p:nvPr/>
+        </p:nvSpPr>
+        <p:spPr>
+          <a:xfrm>
+            <a:off x="640080" y="2834640"/>
+            <a:ext cx="10908792" cy="548640"/>
+          </a:xfrm>
+          <a:prstGeom prst="rect">
+            <a:avLst/>
+          </a:prstGeom>
+          <a:noFill/>
+        </p:spPr>
+        <p:txBody>
+          <a:bodyPr wrap="square">
+            <a:spAutoFit/>
+          </a:bodyPr>
+          <a:lstStyle/>
+          <a:p>
+            <a:pPr algn="ctr">
+              <a:defRPr sz="2000" b="1">
+                <a:solidFill>
+                  <a:srgbClr val="8C8C9A"/>
+                </a:solidFill>
+                <a:latin typeface="맑은 고딕"/>
+              </a:defRPr>
+            </a:pPr>
+            <a:r>
+              <a:t>🖼  화면 캡처 위치</a:t>
+            </a:r>
+          </a:p>
+        </p:txBody>
+      </p:sp>
+      <p:sp>
+        <p:nvSpPr>
+          <p:cNvPr id="8" name="TextBox 7"/>
+          <p:cNvSpPr txBox="1"/>
+          <p:nvPr/>
+        </p:nvSpPr>
+        <p:spPr>
+          <a:xfrm>
+            <a:off x="640080" y="3474720"/>
+            <a:ext cx="10908792" cy="457200"/>
+          </a:xfrm>
+          <a:prstGeom prst="rect">
+            <a:avLst/>
+          </a:prstGeom>
+          <a:noFill/>
+        </p:spPr>
+        <p:txBody>
+          <a:bodyPr wrap="square">
+            <a:spAutoFit/>
+          </a:bodyPr>
+          <a:lstStyle/>
+          <a:p>
+            <a:pPr algn="ctr">
+              <a:defRPr sz="1300" b="0">
+                <a:solidFill>
+                  <a:srgbClr val="0070C0"/>
+                </a:solidFill>
+                <a:latin typeface="Consolas"/>
+              </a:defRPr>
+            </a:pPr>
+            <a:r>
+              <a:t>docs/images/settings-rbac.png</a:t>
+            </a:r>
+          </a:p>
+        </p:txBody>
+      </p:sp>
+      <p:sp>
+        <p:nvSpPr>
+          <p:cNvPr id="9" name="TextBox 8"/>
+          <p:cNvSpPr txBox="1"/>
+          <p:nvPr/>
+        </p:nvSpPr>
+        <p:spPr>
+          <a:xfrm>
+            <a:off x="640080" y="3977640"/>
+            <a:ext cx="10908792" cy="457200"/>
+          </a:xfrm>
+          <a:prstGeom prst="rect">
+            <a:avLst/>
+          </a:prstGeom>
+          <a:noFill/>
+        </p:spPr>
+        <p:txBody>
+          <a:bodyPr wrap="square">
+            <a:spAutoFit/>
+          </a:bodyPr>
+          <a:lstStyle/>
+          <a:p>
+            <a:pPr algn="ctr">
+              <a:defRPr sz="1100" b="0">
+                <a:solidFill>
+                  <a:srgbClr val="8C8C9A"/>
+                </a:solidFill>
+                <a:latin typeface="맑은 고딕"/>
+              </a:defRPr>
+            </a:pPr>
+            <a:r>
+              <a:t>이 파일명으로 저장 후 스크립트를 다시 실행하면 자동 삽입됩니다</a:t>
+            </a:r>
+          </a:p>
+        </p:txBody>
+      </p:sp>
+      <p:sp>
+        <p:nvSpPr>
+          <p:cNvPr id="10" name="TextBox 9"/>
+          <p:cNvSpPr txBox="1"/>
+          <p:nvPr/>
+        </p:nvSpPr>
+        <p:spPr>
+          <a:xfrm>
+            <a:off x="640080" y="6144768"/>
+            <a:ext cx="10908792" cy="502920"/>
+          </a:xfrm>
+          <a:prstGeom prst="rect">
+            <a:avLst/>
+          </a:prstGeom>
+          <a:noFill/>
+        </p:spPr>
+        <p:txBody>
+          <a:bodyPr wrap="square">
+            <a:spAutoFit/>
+          </a:bodyPr>
+          <a:lstStyle/>
+          <a:p>
+            <a:pPr algn="l">
+              <a:defRPr sz="1300" b="0">
+                <a:solidFill>
+                  <a:srgbClr val="5A5A6E"/>
+                </a:solidFill>
+                <a:latin typeface="맑은 고딕"/>
+              </a:defRPr>
+            </a:pPr>
+            <a:r>
+              <a:t>사용자·역할·조직별 접근 제어</a:t>
+            </a:r>
+          </a:p>
+        </p:txBody>
+      </p:sp>
+      <p:sp>
+        <p:nvSpPr>
+          <p:cNvPr id="11" name="TextBox 10"/>
+          <p:cNvSpPr txBox="1"/>
+          <p:nvPr/>
+        </p:nvSpPr>
+        <p:spPr>
+          <a:xfrm>
+            <a:off x="10972800" y="6492240"/>
+            <a:ext cx="914400" cy="274320"/>
+          </a:xfrm>
+          <a:prstGeom prst="rect">
+            <a:avLst/>
+          </a:prstGeom>
+          <a:noFill/>
+        </p:spPr>
+        <p:txBody>
+          <a:bodyPr wrap="square">
+            <a:spAutoFit/>
+          </a:bodyPr>
+          <a:lstStyle/>
+          <a:p>
+            <a:pPr algn="r">
+              <a:defRPr sz="1000" b="0">
+                <a:solidFill>
+                  <a:srgbClr val="8C8C9A"/>
+                </a:solidFill>
+                <a:latin typeface="맑은 고딕"/>
+              </a:defRPr>
+            </a:pPr>
+            <a:r>
+              <a:t>48</a:t>
+            </a:r>
+          </a:p>
+        </p:txBody>
+      </p:sp>
+    </p:spTree>
+  </p:cSld>
+  <p:clrMapOvr>
+    <a:masterClrMapping/>
+  </p:clrMapOvr>
+</p:sld>
+</file>
+
+<file path=ppt/slides/slide49.xml><?xml version="1.0" encoding="utf-8"?>
+<p:sld xmlns:a="http://schemas.openxmlformats.org/drawingml/2006/main" xmlns:p="http://schemas.openxmlformats.org/presentationml/2006/main" xmlns:r="http://schemas.openxmlformats.org/officeDocument/2006/relationships">
+  <p:cSld>
+    <p:bg>
+      <p:bgPr>
+        <a:solidFill>
+          <a:srgbClr val="FFFFFF"/>
+        </a:solidFill>
+        <a:effectLst/>
+      </p:bgPr>
+    </p:bg>
+    <p:spTree>
+      <p:nvGrpSpPr>
+        <p:cNvPr id="1" name=""/>
+        <p:cNvGrpSpPr/>
+        <p:nvPr/>
+      </p:nvGrpSpPr>
+      <p:grpSpPr/>
+      <p:sp>
+        <p:nvSpPr>
+          <p:cNvPr id="2" name="Rectangle 1"/>
+          <p:cNvSpPr/>
+          <p:nvPr/>
+        </p:nvSpPr>
+        <p:spPr>
+          <a:xfrm>
+            <a:off x="0" y="0"/>
+            <a:ext cx="12191695" cy="45720"/>
+          </a:xfrm>
+          <a:prstGeom prst="rect">
+            <a:avLst/>
+          </a:prstGeom>
+          <a:solidFill>
+            <a:srgbClr val="0070C0"/>
+          </a:solidFill>
+          <a:ln>
+            <a:noFill/>
+          </a:ln>
+          <a:effectLst/>
+        </p:spPr>
+        <p:style>
+          <a:lnRef idx="1">
+            <a:schemeClr val="accent1"/>
+          </a:lnRef>
+          <a:fillRef idx="3">
+            <a:schemeClr val="accent1"/>
+          </a:fillRef>
+          <a:effectRef idx="2">
+            <a:schemeClr val="accent1"/>
+          </a:effectRef>
+          <a:fontRef idx="minor">
+            <a:schemeClr val="lt1"/>
+          </a:fontRef>
+        </p:style>
+        <p:txBody>
+          <a:bodyPr rtlCol="0" anchor="ctr"/>
+          <a:lstStyle/>
+          <a:p>
+            <a:pPr algn="ctr"/>
+          </a:p>
+        </p:txBody>
+      </p:sp>
+      <p:sp>
+        <p:nvSpPr>
+          <p:cNvPr id="3" name="Rounded Rectangle 2"/>
+          <p:cNvSpPr/>
+          <p:nvPr/>
+        </p:nvSpPr>
+        <p:spPr>
+          <a:xfrm>
+            <a:off x="548640" y="256032"/>
+            <a:ext cx="685800" cy="457200"/>
+          </a:xfrm>
+          <a:prstGeom prst="roundRect">
+            <a:avLst/>
+          </a:prstGeom>
+          <a:solidFill>
+            <a:srgbClr val="0070C0"/>
+          </a:solidFill>
+          <a:ln>
+            <a:noFill/>
+          </a:ln>
+          <a:effectLst/>
+        </p:spPr>
+        <p:style>
+          <a:lnRef idx="1">
+            <a:schemeClr val="accent1"/>
+          </a:lnRef>
+          <a:fillRef idx="3">
+            <a:schemeClr val="accent1"/>
+          </a:fillRef>
+          <a:effectRef idx="2">
+            <a:schemeClr val="accent1"/>
+          </a:effectRef>
+          <a:fontRef idx="minor">
+            <a:schemeClr val="lt1"/>
+          </a:fontRef>
+        </p:style>
+        <p:txBody>
+          <a:bodyPr rtlCol="0" anchor="ctr"/>
+          <a:lstStyle/>
+          <a:p>
+            <a:pPr algn="ctr">
+              <a:defRPr sz="1400" b="1">
+                <a:solidFill>
+                  <a:srgbClr val="FFFFFF"/>
+                </a:solidFill>
+                <a:latin typeface="맑은 고딕"/>
+              </a:defRPr>
+            </a:pPr>
+            <a:r>
+              <a:t>A21</a:t>
+            </a:r>
+          </a:p>
+        </p:txBody>
+      </p:sp>
+      <p:sp>
+        <p:nvSpPr>
+          <p:cNvPr id="4" name="TextBox 3"/>
+          <p:cNvSpPr txBox="1"/>
+          <p:nvPr/>
+        </p:nvSpPr>
+        <p:spPr>
+          <a:xfrm>
+            <a:off x="1371600" y="274320"/>
+            <a:ext cx="10241280" cy="548640"/>
+          </a:xfrm>
+          <a:prstGeom prst="rect">
+            <a:avLst/>
+          </a:prstGeom>
+          <a:noFill/>
+        </p:spPr>
+        <p:txBody>
+          <a:bodyPr wrap="square">
+            <a:spAutoFit/>
+          </a:bodyPr>
+          <a:lstStyle/>
+          <a:p>
+            <a:pPr algn="l">
+              <a:defRPr sz="2200" b="1">
+                <a:solidFill>
+                  <a:srgbClr val="1F1F1F"/>
+                </a:solidFill>
+                <a:latin typeface="맑은 고딕"/>
+              </a:defRPr>
+            </a:pPr>
+            <a:r>
+              <a:t>설정 — 감사 로그</a:t>
+            </a:r>
+          </a:p>
+        </p:txBody>
+      </p:sp>
+      <p:sp>
+        <p:nvSpPr>
+          <p:cNvPr id="5" name="Rectangle 4"/>
+          <p:cNvSpPr/>
+          <p:nvPr/>
+        </p:nvSpPr>
+        <p:spPr>
+          <a:xfrm>
+            <a:off x="548640" y="841248"/>
+            <a:ext cx="1828800" cy="27432"/>
+          </a:xfrm>
+          <a:prstGeom prst="rect">
+            <a:avLst/>
+          </a:prstGeom>
+          <a:solidFill>
+            <a:srgbClr val="0070C0"/>
+          </a:solidFill>
+          <a:ln>
+            <a:noFill/>
+          </a:ln>
+          <a:effectLst/>
+        </p:spPr>
+        <p:style>
+          <a:lnRef idx="1">
+            <a:schemeClr val="accent1"/>
+          </a:lnRef>
+          <a:fillRef idx="3">
+            <a:schemeClr val="accent1"/>
+          </a:fillRef>
+          <a:effectRef idx="2">
+            <a:schemeClr val="accent1"/>
+          </a:effectRef>
+          <a:fontRef idx="minor">
+            <a:schemeClr val="lt1"/>
+          </a:fontRef>
+        </p:style>
+        <p:txBody>
+          <a:bodyPr rtlCol="0" anchor="ctr"/>
+          <a:lstStyle/>
+          <a:p>
+            <a:pPr algn="ctr"/>
+          </a:p>
+        </p:txBody>
+      </p:sp>
+      <p:sp>
+        <p:nvSpPr>
+          <p:cNvPr id="6" name="Rounded Rectangle 5"/>
+          <p:cNvSpPr/>
+          <p:nvPr/>
+        </p:nvSpPr>
+        <p:spPr>
+          <a:xfrm>
+            <a:off x="640080" y="1097280"/>
+            <a:ext cx="10908792" cy="4892040"/>
+          </a:xfrm>
+          <a:prstGeom prst="roundRect">
+            <a:avLst/>
+          </a:prstGeom>
+          <a:solidFill>
+            <a:srgbClr val="F8F9FB"/>
+          </a:solidFill>
+          <a:ln w="15240">
+            <a:solidFill>
+              <a:srgbClr val="0070C0"/>
+            </a:solidFill>
+          </a:ln>
+          <a:effectLst/>
+        </p:spPr>
+        <p:style>
+          <a:lnRef idx="1">
+            <a:schemeClr val="accent1"/>
+          </a:lnRef>
+          <a:fillRef idx="3">
+            <a:schemeClr val="accent1"/>
+          </a:fillRef>
+          <a:effectRef idx="2">
+            <a:schemeClr val="accent1"/>
+          </a:effectRef>
+          <a:fontRef idx="minor">
+            <a:schemeClr val="lt1"/>
+          </a:fontRef>
+        </p:style>
+        <p:txBody>
+          <a:bodyPr rtlCol="0" anchor="ctr"/>
+          <a:lstStyle/>
+          <a:p>
+            <a:pPr algn="ctr"/>
+          </a:p>
+        </p:txBody>
+      </p:sp>
+      <p:sp>
+        <p:nvSpPr>
+          <p:cNvPr id="7" name="TextBox 6"/>
+          <p:cNvSpPr txBox="1"/>
+          <p:nvPr/>
+        </p:nvSpPr>
+        <p:spPr>
+          <a:xfrm>
+            <a:off x="640080" y="2834640"/>
+            <a:ext cx="10908792" cy="548640"/>
+          </a:xfrm>
+          <a:prstGeom prst="rect">
+            <a:avLst/>
+          </a:prstGeom>
+          <a:noFill/>
+        </p:spPr>
+        <p:txBody>
+          <a:bodyPr wrap="square">
+            <a:spAutoFit/>
+          </a:bodyPr>
+          <a:lstStyle/>
+          <a:p>
+            <a:pPr algn="ctr">
+              <a:defRPr sz="2000" b="1">
+                <a:solidFill>
+                  <a:srgbClr val="8C8C9A"/>
+                </a:solidFill>
+                <a:latin typeface="맑은 고딕"/>
+              </a:defRPr>
+            </a:pPr>
+            <a:r>
+              <a:t>🖼  화면 캡처 위치</a:t>
+            </a:r>
+          </a:p>
+        </p:txBody>
+      </p:sp>
+      <p:sp>
+        <p:nvSpPr>
+          <p:cNvPr id="8" name="TextBox 7"/>
+          <p:cNvSpPr txBox="1"/>
+          <p:nvPr/>
+        </p:nvSpPr>
+        <p:spPr>
+          <a:xfrm>
+            <a:off x="640080" y="3474720"/>
+            <a:ext cx="10908792" cy="457200"/>
+          </a:xfrm>
+          <a:prstGeom prst="rect">
+            <a:avLst/>
+          </a:prstGeom>
+          <a:noFill/>
+        </p:spPr>
+        <p:txBody>
+          <a:bodyPr wrap="square">
+            <a:spAutoFit/>
+          </a:bodyPr>
+          <a:lstStyle/>
+          <a:p>
+            <a:pPr algn="ctr">
+              <a:defRPr sz="1300" b="0">
+                <a:solidFill>
+                  <a:srgbClr val="0070C0"/>
+                </a:solidFill>
+                <a:latin typeface="Consolas"/>
+              </a:defRPr>
+            </a:pPr>
+            <a:r>
+              <a:t>docs/images/settings-audit.png</a:t>
+            </a:r>
+          </a:p>
+        </p:txBody>
+      </p:sp>
+      <p:sp>
+        <p:nvSpPr>
+          <p:cNvPr id="9" name="TextBox 8"/>
+          <p:cNvSpPr txBox="1"/>
+          <p:nvPr/>
+        </p:nvSpPr>
+        <p:spPr>
+          <a:xfrm>
+            <a:off x="640080" y="3977640"/>
+            <a:ext cx="10908792" cy="457200"/>
+          </a:xfrm>
+          <a:prstGeom prst="rect">
+            <a:avLst/>
+          </a:prstGeom>
+          <a:noFill/>
+        </p:spPr>
+        <p:txBody>
+          <a:bodyPr wrap="square">
+            <a:spAutoFit/>
+          </a:bodyPr>
+          <a:lstStyle/>
+          <a:p>
+            <a:pPr algn="ctr">
+              <a:defRPr sz="1100" b="0">
+                <a:solidFill>
+                  <a:srgbClr val="8C8C9A"/>
+                </a:solidFill>
+                <a:latin typeface="맑은 고딕"/>
+              </a:defRPr>
+            </a:pPr>
+            <a:r>
+              <a:t>이 파일명으로 저장 후 스크립트를 다시 실행하면 자동 삽입됩니다</a:t>
+            </a:r>
+          </a:p>
+        </p:txBody>
+      </p:sp>
+      <p:sp>
+        <p:nvSpPr>
+          <p:cNvPr id="10" name="TextBox 9"/>
+          <p:cNvSpPr txBox="1"/>
+          <p:nvPr/>
+        </p:nvSpPr>
+        <p:spPr>
+          <a:xfrm>
+            <a:off x="640080" y="6144768"/>
+            <a:ext cx="10908792" cy="502920"/>
+          </a:xfrm>
+          <a:prstGeom prst="rect">
+            <a:avLst/>
+          </a:prstGeom>
+          <a:noFill/>
+        </p:spPr>
+        <p:txBody>
+          <a:bodyPr wrap="square">
+            <a:spAutoFit/>
+          </a:bodyPr>
+          <a:lstStyle/>
+          <a:p>
+            <a:pPr algn="l">
+              <a:defRPr sz="1300" b="0">
+                <a:solidFill>
+                  <a:srgbClr val="5A5A6E"/>
+                </a:solidFill>
+                <a:latin typeface="맑은 고딕"/>
+              </a:defRPr>
+            </a:pPr>
+            <a:r>
+              <a:t>변경/작업 감사 로그</a:t>
+            </a:r>
+          </a:p>
+        </p:txBody>
+      </p:sp>
+      <p:sp>
+        <p:nvSpPr>
+          <p:cNvPr id="11" name="TextBox 10"/>
+          <p:cNvSpPr txBox="1"/>
+          <p:nvPr/>
+        </p:nvSpPr>
+        <p:spPr>
+          <a:xfrm>
+            <a:off x="10972800" y="6492240"/>
+            <a:ext cx="914400" cy="274320"/>
+          </a:xfrm>
+          <a:prstGeom prst="rect">
+            <a:avLst/>
+          </a:prstGeom>
+          <a:noFill/>
+        </p:spPr>
+        <p:txBody>
+          <a:bodyPr wrap="square">
+            <a:spAutoFit/>
+          </a:bodyPr>
+          <a:lstStyle/>
+          <a:p>
+            <a:pPr algn="r">
+              <a:defRPr sz="1000" b="0">
+                <a:solidFill>
+                  <a:srgbClr val="8C8C9A"/>
+                </a:solidFill>
+                <a:latin typeface="맑은 고딕"/>
+              </a:defRPr>
+            </a:pPr>
+            <a:r>
+              <a:t>49</a:t>
+            </a:r>
+          </a:p>
+        </p:txBody>
+      </p:sp>
+    </p:spTree>
+  </p:cSld>
+  <p:clrMapOvr>
+    <a:masterClrMapping/>
+  </p:clrMapOvr>
+</p:sld>
+</file>
+
 <file path=ppt/slides/slide5.xml><?xml version="1.0" encoding="utf-8"?>
 <p:sld xmlns:a="http://schemas.openxmlformats.org/drawingml/2006/main" xmlns:p="http://schemas.openxmlformats.org/presentationml/2006/main" xmlns:r="http://schemas.openxmlformats.org/officeDocument/2006/relationships">
   <p:cSld>
@@ -14343,6 +23683,436 @@
           <a:lstStyle/>
           <a:p>
             <a:pPr algn="ctr"/>
+          </a:p>
+        </p:txBody>
+      </p:sp>
+    </p:spTree>
+  </p:cSld>
+  <p:clrMapOvr>
+    <a:masterClrMapping/>
+  </p:clrMapOvr>
+</p:sld>
+</file>
+
+<file path=ppt/slides/slide50.xml><?xml version="1.0" encoding="utf-8"?>
+<p:sld xmlns:a="http://schemas.openxmlformats.org/drawingml/2006/main" xmlns:p="http://schemas.openxmlformats.org/presentationml/2006/main" xmlns:r="http://schemas.openxmlformats.org/officeDocument/2006/relationships">
+  <p:cSld>
+    <p:bg>
+      <p:bgPr>
+        <a:solidFill>
+          <a:srgbClr val="FFFFFF"/>
+        </a:solidFill>
+        <a:effectLst/>
+      </p:bgPr>
+    </p:bg>
+    <p:spTree>
+      <p:nvGrpSpPr>
+        <p:cNvPr id="1" name=""/>
+        <p:cNvGrpSpPr/>
+        <p:nvPr/>
+      </p:nvGrpSpPr>
+      <p:grpSpPr/>
+      <p:sp>
+        <p:nvSpPr>
+          <p:cNvPr id="2" name="Rectangle 1"/>
+          <p:cNvSpPr/>
+          <p:nvPr/>
+        </p:nvSpPr>
+        <p:spPr>
+          <a:xfrm>
+            <a:off x="0" y="0"/>
+            <a:ext cx="12191695" cy="45720"/>
+          </a:xfrm>
+          <a:prstGeom prst="rect">
+            <a:avLst/>
+          </a:prstGeom>
+          <a:solidFill>
+            <a:srgbClr val="0070C0"/>
+          </a:solidFill>
+          <a:ln>
+            <a:noFill/>
+          </a:ln>
+          <a:effectLst/>
+        </p:spPr>
+        <p:style>
+          <a:lnRef idx="1">
+            <a:schemeClr val="accent1"/>
+          </a:lnRef>
+          <a:fillRef idx="3">
+            <a:schemeClr val="accent1"/>
+          </a:fillRef>
+          <a:effectRef idx="2">
+            <a:schemeClr val="accent1"/>
+          </a:effectRef>
+          <a:fontRef idx="minor">
+            <a:schemeClr val="lt1"/>
+          </a:fontRef>
+        </p:style>
+        <p:txBody>
+          <a:bodyPr rtlCol="0" anchor="ctr"/>
+          <a:lstStyle/>
+          <a:p>
+            <a:pPr algn="ctr"/>
+          </a:p>
+        </p:txBody>
+      </p:sp>
+      <p:sp>
+        <p:nvSpPr>
+          <p:cNvPr id="3" name="Rounded Rectangle 2"/>
+          <p:cNvSpPr/>
+          <p:nvPr/>
+        </p:nvSpPr>
+        <p:spPr>
+          <a:xfrm>
+            <a:off x="548640" y="256032"/>
+            <a:ext cx="685800" cy="457200"/>
+          </a:xfrm>
+          <a:prstGeom prst="roundRect">
+            <a:avLst/>
+          </a:prstGeom>
+          <a:solidFill>
+            <a:srgbClr val="0070C0"/>
+          </a:solidFill>
+          <a:ln>
+            <a:noFill/>
+          </a:ln>
+          <a:effectLst/>
+        </p:spPr>
+        <p:style>
+          <a:lnRef idx="1">
+            <a:schemeClr val="accent1"/>
+          </a:lnRef>
+          <a:fillRef idx="3">
+            <a:schemeClr val="accent1"/>
+          </a:fillRef>
+          <a:effectRef idx="2">
+            <a:schemeClr val="accent1"/>
+          </a:effectRef>
+          <a:fontRef idx="minor">
+            <a:schemeClr val="lt1"/>
+          </a:fontRef>
+        </p:style>
+        <p:txBody>
+          <a:bodyPr rtlCol="0" anchor="ctr"/>
+          <a:lstStyle/>
+          <a:p>
+            <a:pPr algn="ctr">
+              <a:defRPr sz="1400" b="1">
+                <a:solidFill>
+                  <a:srgbClr val="FFFFFF"/>
+                </a:solidFill>
+                <a:latin typeface="맑은 고딕"/>
+              </a:defRPr>
+            </a:pPr>
+            <a:r>
+              <a:t>A22</a:t>
+            </a:r>
+          </a:p>
+        </p:txBody>
+      </p:sp>
+      <p:sp>
+        <p:nvSpPr>
+          <p:cNvPr id="4" name="TextBox 3"/>
+          <p:cNvSpPr txBox="1"/>
+          <p:nvPr/>
+        </p:nvSpPr>
+        <p:spPr>
+          <a:xfrm>
+            <a:off x="1371600" y="274320"/>
+            <a:ext cx="10241280" cy="548640"/>
+          </a:xfrm>
+          <a:prstGeom prst="rect">
+            <a:avLst/>
+          </a:prstGeom>
+          <a:noFill/>
+        </p:spPr>
+        <p:txBody>
+          <a:bodyPr wrap="square">
+            <a:spAutoFit/>
+          </a:bodyPr>
+          <a:lstStyle/>
+          <a:p>
+            <a:pPr algn="l">
+              <a:defRPr sz="2200" b="1">
+                <a:solidFill>
+                  <a:srgbClr val="1F1F1F"/>
+                </a:solidFill>
+                <a:latin typeface="맑은 고딕"/>
+              </a:defRPr>
+            </a:pPr>
+            <a:r>
+              <a:t>전역 검색 (Cmd+K)</a:t>
+            </a:r>
+          </a:p>
+        </p:txBody>
+      </p:sp>
+      <p:sp>
+        <p:nvSpPr>
+          <p:cNvPr id="5" name="Rectangle 4"/>
+          <p:cNvSpPr/>
+          <p:nvPr/>
+        </p:nvSpPr>
+        <p:spPr>
+          <a:xfrm>
+            <a:off x="548640" y="841248"/>
+            <a:ext cx="1828800" cy="27432"/>
+          </a:xfrm>
+          <a:prstGeom prst="rect">
+            <a:avLst/>
+          </a:prstGeom>
+          <a:solidFill>
+            <a:srgbClr val="0070C0"/>
+          </a:solidFill>
+          <a:ln>
+            <a:noFill/>
+          </a:ln>
+          <a:effectLst/>
+        </p:spPr>
+        <p:style>
+          <a:lnRef idx="1">
+            <a:schemeClr val="accent1"/>
+          </a:lnRef>
+          <a:fillRef idx="3">
+            <a:schemeClr val="accent1"/>
+          </a:fillRef>
+          <a:effectRef idx="2">
+            <a:schemeClr val="accent1"/>
+          </a:effectRef>
+          <a:fontRef idx="minor">
+            <a:schemeClr val="lt1"/>
+          </a:fontRef>
+        </p:style>
+        <p:txBody>
+          <a:bodyPr rtlCol="0" anchor="ctr"/>
+          <a:lstStyle/>
+          <a:p>
+            <a:pPr algn="ctr"/>
+          </a:p>
+        </p:txBody>
+      </p:sp>
+      <p:sp>
+        <p:nvSpPr>
+          <p:cNvPr id="6" name="Rounded Rectangle 5"/>
+          <p:cNvSpPr/>
+          <p:nvPr/>
+        </p:nvSpPr>
+        <p:spPr>
+          <a:xfrm>
+            <a:off x="640080" y="1097280"/>
+            <a:ext cx="10908792" cy="4892040"/>
+          </a:xfrm>
+          <a:prstGeom prst="roundRect">
+            <a:avLst/>
+          </a:prstGeom>
+          <a:solidFill>
+            <a:srgbClr val="F8F9FB"/>
+          </a:solidFill>
+          <a:ln w="15240">
+            <a:solidFill>
+              <a:srgbClr val="0070C0"/>
+            </a:solidFill>
+          </a:ln>
+          <a:effectLst/>
+        </p:spPr>
+        <p:style>
+          <a:lnRef idx="1">
+            <a:schemeClr val="accent1"/>
+          </a:lnRef>
+          <a:fillRef idx="3">
+            <a:schemeClr val="accent1"/>
+          </a:fillRef>
+          <a:effectRef idx="2">
+            <a:schemeClr val="accent1"/>
+          </a:effectRef>
+          <a:fontRef idx="minor">
+            <a:schemeClr val="lt1"/>
+          </a:fontRef>
+        </p:style>
+        <p:txBody>
+          <a:bodyPr rtlCol="0" anchor="ctr"/>
+          <a:lstStyle/>
+          <a:p>
+            <a:pPr algn="ctr"/>
+          </a:p>
+        </p:txBody>
+      </p:sp>
+      <p:sp>
+        <p:nvSpPr>
+          <p:cNvPr id="7" name="TextBox 6"/>
+          <p:cNvSpPr txBox="1"/>
+          <p:nvPr/>
+        </p:nvSpPr>
+        <p:spPr>
+          <a:xfrm>
+            <a:off x="640080" y="2834640"/>
+            <a:ext cx="10908792" cy="548640"/>
+          </a:xfrm>
+          <a:prstGeom prst="rect">
+            <a:avLst/>
+          </a:prstGeom>
+          <a:noFill/>
+        </p:spPr>
+        <p:txBody>
+          <a:bodyPr wrap="square">
+            <a:spAutoFit/>
+          </a:bodyPr>
+          <a:lstStyle/>
+          <a:p>
+            <a:pPr algn="ctr">
+              <a:defRPr sz="2000" b="1">
+                <a:solidFill>
+                  <a:srgbClr val="8C8C9A"/>
+                </a:solidFill>
+                <a:latin typeface="맑은 고딕"/>
+              </a:defRPr>
+            </a:pPr>
+            <a:r>
+              <a:t>🖼  화면 캡처 위치</a:t>
+            </a:r>
+          </a:p>
+        </p:txBody>
+      </p:sp>
+      <p:sp>
+        <p:nvSpPr>
+          <p:cNvPr id="8" name="TextBox 7"/>
+          <p:cNvSpPr txBox="1"/>
+          <p:nvPr/>
+        </p:nvSpPr>
+        <p:spPr>
+          <a:xfrm>
+            <a:off x="640080" y="3474720"/>
+            <a:ext cx="10908792" cy="457200"/>
+          </a:xfrm>
+          <a:prstGeom prst="rect">
+            <a:avLst/>
+          </a:prstGeom>
+          <a:noFill/>
+        </p:spPr>
+        <p:txBody>
+          <a:bodyPr wrap="square">
+            <a:spAutoFit/>
+          </a:bodyPr>
+          <a:lstStyle/>
+          <a:p>
+            <a:pPr algn="ctr">
+              <a:defRPr sz="1300" b="0">
+                <a:solidFill>
+                  <a:srgbClr val="0070C0"/>
+                </a:solidFill>
+                <a:latin typeface="Consolas"/>
+              </a:defRPr>
+            </a:pPr>
+            <a:r>
+              <a:t>docs/images/search-cmdk.png</a:t>
+            </a:r>
+          </a:p>
+        </p:txBody>
+      </p:sp>
+      <p:sp>
+        <p:nvSpPr>
+          <p:cNvPr id="9" name="TextBox 8"/>
+          <p:cNvSpPr txBox="1"/>
+          <p:nvPr/>
+        </p:nvSpPr>
+        <p:spPr>
+          <a:xfrm>
+            <a:off x="640080" y="3977640"/>
+            <a:ext cx="10908792" cy="457200"/>
+          </a:xfrm>
+          <a:prstGeom prst="rect">
+            <a:avLst/>
+          </a:prstGeom>
+          <a:noFill/>
+        </p:spPr>
+        <p:txBody>
+          <a:bodyPr wrap="square">
+            <a:spAutoFit/>
+          </a:bodyPr>
+          <a:lstStyle/>
+          <a:p>
+            <a:pPr algn="ctr">
+              <a:defRPr sz="1100" b="0">
+                <a:solidFill>
+                  <a:srgbClr val="8C8C9A"/>
+                </a:solidFill>
+                <a:latin typeface="맑은 고딕"/>
+              </a:defRPr>
+            </a:pPr>
+            <a:r>
+              <a:t>이 파일명으로 저장 후 스크립트를 다시 실행하면 자동 삽입됩니다</a:t>
+            </a:r>
+          </a:p>
+        </p:txBody>
+      </p:sp>
+      <p:sp>
+        <p:nvSpPr>
+          <p:cNvPr id="10" name="TextBox 9"/>
+          <p:cNvSpPr txBox="1"/>
+          <p:nvPr/>
+        </p:nvSpPr>
+        <p:spPr>
+          <a:xfrm>
+            <a:off x="640080" y="6144768"/>
+            <a:ext cx="10908792" cy="502920"/>
+          </a:xfrm>
+          <a:prstGeom prst="rect">
+            <a:avLst/>
+          </a:prstGeom>
+          <a:noFill/>
+        </p:spPr>
+        <p:txBody>
+          <a:bodyPr wrap="square">
+            <a:spAutoFit/>
+          </a:bodyPr>
+          <a:lstStyle/>
+          <a:p>
+            <a:pPr algn="l">
+              <a:defRPr sz="1300" b="0">
+                <a:solidFill>
+                  <a:srgbClr val="5A5A6E"/>
+                </a:solidFill>
+                <a:latin typeface="맑은 고딕"/>
+              </a:defRPr>
+            </a:pPr>
+            <a:r>
+              <a:t>서버·랙·알림 통합 검색</a:t>
+            </a:r>
+          </a:p>
+        </p:txBody>
+      </p:sp>
+      <p:sp>
+        <p:nvSpPr>
+          <p:cNvPr id="11" name="TextBox 10"/>
+          <p:cNvSpPr txBox="1"/>
+          <p:nvPr/>
+        </p:nvSpPr>
+        <p:spPr>
+          <a:xfrm>
+            <a:off x="10972800" y="6492240"/>
+            <a:ext cx="914400" cy="274320"/>
+          </a:xfrm>
+          <a:prstGeom prst="rect">
+            <a:avLst/>
+          </a:prstGeom>
+          <a:noFill/>
+        </p:spPr>
+        <p:txBody>
+          <a:bodyPr wrap="square">
+            <a:spAutoFit/>
+          </a:bodyPr>
+          <a:lstStyle/>
+          <a:p>
+            <a:pPr algn="r">
+              <a:defRPr sz="1000" b="0">
+                <a:solidFill>
+                  <a:srgbClr val="8C8C9A"/>
+                </a:solidFill>
+                <a:latin typeface="맑은 고딕"/>
+              </a:defRPr>
+            </a:pPr>
+            <a:r>
+              <a:t>50</a:t>
+            </a:r>
           </a:p>
         </p:txBody>
       </p:sp>
